--- a/report/知序_答辩.pptx
+++ b/report/知序_答辩.pptx
@@ -4,6 +4,9 @@
   <p:sldMasterIdLst>
     <p:sldMasterId id="2147483648" r:id="rId1"/>
   </p:sldMasterIdLst>
+  <p:notesMasterIdLst>
+    <p:notesMasterId r:id="rId20"/>
+  </p:notesMasterIdLst>
   <p:sldIdLst>
     <p:sldId id="256" r:id="rId2"/>
     <p:sldId id="257" r:id="rId3"/>
@@ -24,10 +27,7 @@
     <p:sldId id="272" r:id="rId18"/>
     <p:sldId id="273" r:id="rId19"/>
   </p:sldIdLst>
-  <p:notesMasterIdLst>
-    <p:notesMasterId r:id="rId20"/>
-  </p:notesMasterIdLst>
-  <p:sldSz cx="9144000" cy="5143500"/>
+  <p:sldSz cx="9144000" cy="5143500" type="screen16x9"/>
   <p:notesSz cx="5143500" cy="9144000"/>
   <p:defaultTextStyle>
     <a:lvl1pPr marL="0" algn="l" defTabSz="914400" rtl="0" eaLnBrk="1" latinLnBrk="0" hangingPunct="1">
@@ -121,6 +121,11 @@
       </a:defRPr>
     </a:lvl9pPr>
   </p:defaultTextStyle>
+  <p:extLst>
+    <p:ext uri="{EFAFB233-063F-42B5-8137-9DF3F51BA10A}">
+      <p15:sldGuideLst xmlns:p15="http://schemas.microsoft.com/office/powerpoint/2012/main"/>
+    </p:ext>
+  </p:extLst>
 </p:presentation>
 </file>
 
@@ -146,234 +151,10 @@
           <a:chExt cx="0" cy="0"/>
         </a:xfrm>
       </p:grpSpPr>
-      <p:sp>
-        <p:nvSpPr>
-          <p:cNvPr id="2" name="Header Placeholder 1"/>
-          <p:cNvSpPr>
-            <a:spLocks noGrp="1"/>
-          </p:cNvSpPr>
-          <p:nvPr>
-            <p:ph type="hdr" sz="quarter"/>
-          </p:nvPr>
-        </p:nvSpPr>
-        <p:spPr>
-          <a:xfrm>
-            <a:off x="0" y="0"/>
-            <a:ext cx="2971800" cy="458788"/>
-          </a:xfrm>
-          <a:prstGeom prst="rect">
-            <a:avLst/>
-          </a:prstGeom>
-        </p:spPr>
-        <p:txBody>
-          <a:bodyPr vert="horz" lIns="91440" tIns="45720" rIns="91440" bIns="45720" rtlCol="0"/>
-          <a:lstStyle>
-            <a:lvl1pPr algn="l">
-              <a:defRPr sz="1200"/>
-            </a:lvl1pPr>
-          </a:lstStyle>
-          <a:p>
-            <a:endParaRPr lang="en-US"/>
-          </a:p>
-        </p:txBody>
-      </p:sp>
-      <p:sp>
-        <p:nvSpPr>
-          <p:cNvPr id="3" name="Date Placeholder 2"/>
-          <p:cNvSpPr>
-            <a:spLocks noGrp="1"/>
-          </p:cNvSpPr>
-          <p:nvPr>
-            <p:ph type="dt" idx="1"/>
-          </p:nvPr>
-        </p:nvSpPr>
-        <p:spPr>
-          <a:xfrm>
-            <a:off x="3884613" y="0"/>
-            <a:ext cx="2971800" cy="458788"/>
-          </a:xfrm>
-          <a:prstGeom prst="rect">
-            <a:avLst/>
-          </a:prstGeom>
-        </p:spPr>
-        <p:txBody>
-          <a:bodyPr vert="horz" lIns="91440" tIns="45720" rIns="91440" bIns="45720" rtlCol="0"/>
-          <a:lstStyle>
-            <a:lvl1pPr algn="r">
-              <a:defRPr sz="1200"/>
-            </a:lvl1pPr>
-          </a:lstStyle>
-          <a:p>
-            <a:fld id="{5282F153-3F37-0F45-9E97-73ACFA13230C}" type="datetimeFigureOut">
-              <a:rPr lang="en-US"/>
-              <a:t>7/23/19</a:t>
-            </a:fld>
-            <a:endParaRPr lang="en-US"/>
-          </a:p>
-        </p:txBody>
-      </p:sp>
-      <p:sp>
-        <p:nvSpPr>
-          <p:cNvPr id="4" name="Slide Image Placeholder 3"/>
-          <p:cNvSpPr>
-            <a:spLocks noGrp="1" noRot="1" noChangeAspect="1"/>
-          </p:cNvSpPr>
-          <p:nvPr>
-            <p:ph type="sldImg" idx="2"/>
-          </p:nvPr>
-        </p:nvSpPr>
-        <p:spPr>
-          <a:xfrm>
-            <a:off x="685800" y="1143000"/>
-            <a:ext cx="5486400" cy="3086100"/>
-          </a:xfrm>
-          <a:prstGeom prst="rect">
-            <a:avLst/>
-          </a:prstGeom>
-          <a:noFill/>
-          <a:ln w="12700">
-            <a:solidFill>
-              <a:prstClr val="black"/>
-            </a:solidFill>
-          </a:ln>
-        </p:spPr>
-        <p:txBody>
-          <a:bodyPr vert="horz" lIns="91440" tIns="45720" rIns="91440" bIns="45720" rtlCol="0" anchor="ctr"/>
-          <a:lstStyle/>
-          <a:p>
-            <a:endParaRPr lang="en-US"/>
-          </a:p>
-        </p:txBody>
-      </p:sp>
-      <p:sp>
-        <p:nvSpPr>
-          <p:cNvPr id="5" name="Notes Placeholder 4"/>
-          <p:cNvSpPr>
-            <a:spLocks noGrp="1"/>
-          </p:cNvSpPr>
-          <p:nvPr>
-            <p:ph type="body" sz="quarter" idx="3"/>
-          </p:nvPr>
-        </p:nvSpPr>
-        <p:spPr>
-          <a:xfrm>
-            <a:off x="685800" y="4400550"/>
-            <a:ext cx="5486400" cy="3600450"/>
-          </a:xfrm>
-          <a:prstGeom prst="rect">
-            <a:avLst/>
-          </a:prstGeom>
-        </p:spPr>
-        <p:txBody>
-          <a:bodyPr vert="horz" lIns="91440" tIns="45720" rIns="91440" bIns="45720" rtlCol="0"/>
-          <a:lstStyle/>
-          <a:p>
-            <a:pPr lvl="0"/>
-            <a:r>
-              <a:rPr lang="en-US"/>
-              <a:t>Click to edit Master text styles</a:t>
-            </a:r>
-          </a:p>
-          <a:p>
-            <a:pPr lvl="1"/>
-            <a:r>
-              <a:rPr lang="en-US"/>
-              <a:t>Second level</a:t>
-            </a:r>
-          </a:p>
-          <a:p>
-            <a:pPr lvl="2"/>
-            <a:r>
-              <a:rPr lang="en-US"/>
-              <a:t>Third level</a:t>
-            </a:r>
-          </a:p>
-          <a:p>
-            <a:pPr lvl="3"/>
-            <a:r>
-              <a:rPr lang="en-US"/>
-              <a:t>Fourth level</a:t>
-            </a:r>
-          </a:p>
-          <a:p>
-            <a:pPr lvl="4"/>
-            <a:r>
-              <a:rPr lang="en-US"/>
-              <a:t>Fifth level</a:t>
-            </a:r>
-          </a:p>
-        </p:txBody>
-      </p:sp>
-      <p:sp>
-        <p:nvSpPr>
-          <p:cNvPr id="6" name="Footer Placeholder 5"/>
-          <p:cNvSpPr>
-            <a:spLocks noGrp="1"/>
-          </p:cNvSpPr>
-          <p:nvPr>
-            <p:ph type="ftr" sz="quarter" idx="4"/>
-          </p:nvPr>
-        </p:nvSpPr>
-        <p:spPr>
-          <a:xfrm>
-            <a:off x="0" y="8685213"/>
-            <a:ext cx="2971800" cy="458787"/>
-          </a:xfrm>
-          <a:prstGeom prst="rect">
-            <a:avLst/>
-          </a:prstGeom>
-        </p:spPr>
-        <p:txBody>
-          <a:bodyPr vert="horz" lIns="91440" tIns="45720" rIns="91440" bIns="45720" rtlCol="0" anchor="b"/>
-          <a:lstStyle>
-            <a:lvl1pPr algn="l">
-              <a:defRPr sz="1200"/>
-            </a:lvl1pPr>
-          </a:lstStyle>
-          <a:p>
-            <a:endParaRPr lang="en-US"/>
-          </a:p>
-        </p:txBody>
-      </p:sp>
-      <p:sp>
-        <p:nvSpPr>
-          <p:cNvPr id="7" name="Slide Number Placeholder 6"/>
-          <p:cNvSpPr>
-            <a:spLocks noGrp="1"/>
-          </p:cNvSpPr>
-          <p:nvPr>
-            <p:ph type="sldNum" sz="quarter" idx="5"/>
-          </p:nvPr>
-        </p:nvSpPr>
-        <p:spPr>
-          <a:xfrm>
-            <a:off x="3884613" y="8685213"/>
-            <a:ext cx="2971800" cy="458787"/>
-          </a:xfrm>
-          <a:prstGeom prst="rect">
-            <a:avLst/>
-          </a:prstGeom>
-        </p:spPr>
-        <p:txBody>
-          <a:bodyPr vert="horz" lIns="91440" tIns="45720" rIns="91440" bIns="45720" rtlCol="0" anchor="b"/>
-          <a:lstStyle>
-            <a:lvl1pPr algn="r">
-              <a:defRPr sz="1200"/>
-            </a:lvl1pPr>
-          </a:lstStyle>
-          <a:p>
-            <a:fld id="{CE5E9CC1-C706-0F49-92D6-E571CC5EEA8F}" type="slidenum">
-              <a:rPr lang="en-US"/>
-              <a:t>‹#›</a:t>
-            </a:fld>
-            <a:endParaRPr lang="en-US"/>
-          </a:p>
-        </p:txBody>
-      </p:sp>
     </p:spTree>
     <p:extLst>
       <p:ext uri="{BB962C8B-B14F-4D97-AF65-F5344CB8AC3E}">
-        <p14:creationId xmlns:p14="http://schemas.microsoft.com/office/powerpoint/2010/main" val="1024086991"/>
+        <p14:creationId xmlns:p14="http://schemas.microsoft.com/office/powerpoint/2010/main" val="481194394"/>
       </p:ext>
     </p:extLst>
   </p:cSld>
@@ -517,10 +298,6 @@
           <a:bodyPr/>
           <a:lstStyle/>
           <a:p>
-            <a:r>
-              <a:rPr lang="en-US" dirty="0"/>
-              <a:t/>
-            </a:r>
             <a:endParaRPr lang="en-US" dirty="0"/>
           </a:p>
         </p:txBody>
@@ -605,10 +382,6 @@
           <a:bodyPr/>
           <a:lstStyle/>
           <a:p>
-            <a:r>
-              <a:rPr lang="en-US" dirty="0"/>
-              <a:t/>
-            </a:r>
             <a:endParaRPr lang="en-US" dirty="0"/>
           </a:p>
         </p:txBody>
@@ -693,10 +466,6 @@
           <a:bodyPr/>
           <a:lstStyle/>
           <a:p>
-            <a:r>
-              <a:rPr lang="en-US" dirty="0"/>
-              <a:t/>
-            </a:r>
             <a:endParaRPr lang="en-US" dirty="0"/>
           </a:p>
         </p:txBody>
@@ -781,10 +550,6 @@
           <a:bodyPr/>
           <a:lstStyle/>
           <a:p>
-            <a:r>
-              <a:rPr lang="en-US" dirty="0"/>
-              <a:t/>
-            </a:r>
             <a:endParaRPr lang="en-US" dirty="0"/>
           </a:p>
         </p:txBody>
@@ -869,10 +634,6 @@
           <a:bodyPr/>
           <a:lstStyle/>
           <a:p>
-            <a:r>
-              <a:rPr lang="en-US" dirty="0"/>
-              <a:t/>
-            </a:r>
             <a:endParaRPr lang="en-US" dirty="0"/>
           </a:p>
         </p:txBody>
@@ -957,10 +718,6 @@
           <a:bodyPr/>
           <a:lstStyle/>
           <a:p>
-            <a:r>
-              <a:rPr lang="en-US" dirty="0"/>
-              <a:t/>
-            </a:r>
             <a:endParaRPr lang="en-US" dirty="0"/>
           </a:p>
         </p:txBody>
@@ -1045,10 +802,6 @@
           <a:bodyPr/>
           <a:lstStyle/>
           <a:p>
-            <a:r>
-              <a:rPr lang="en-US" dirty="0"/>
-              <a:t/>
-            </a:r>
             <a:endParaRPr lang="en-US" dirty="0"/>
           </a:p>
         </p:txBody>
@@ -1133,10 +886,6 @@
           <a:bodyPr/>
           <a:lstStyle/>
           <a:p>
-            <a:r>
-              <a:rPr lang="en-US" dirty="0"/>
-              <a:t/>
-            </a:r>
             <a:endParaRPr lang="en-US" dirty="0"/>
           </a:p>
         </p:txBody>
@@ -1221,10 +970,6 @@
           <a:bodyPr/>
           <a:lstStyle/>
           <a:p>
-            <a:r>
-              <a:rPr lang="en-US" dirty="0"/>
-              <a:t/>
-            </a:r>
             <a:endParaRPr lang="en-US" dirty="0"/>
           </a:p>
         </p:txBody>
@@ -1309,10 +1054,6 @@
           <a:bodyPr/>
           <a:lstStyle/>
           <a:p>
-            <a:r>
-              <a:rPr lang="en-US" dirty="0"/>
-              <a:t/>
-            </a:r>
             <a:endParaRPr lang="en-US" dirty="0"/>
           </a:p>
         </p:txBody>
@@ -1397,10 +1138,6 @@
           <a:bodyPr/>
           <a:lstStyle/>
           <a:p>
-            <a:r>
-              <a:rPr lang="en-US" dirty="0"/>
-              <a:t/>
-            </a:r>
             <a:endParaRPr lang="en-US" dirty="0"/>
           </a:p>
         </p:txBody>
@@ -1485,10 +1222,6 @@
           <a:bodyPr/>
           <a:lstStyle/>
           <a:p>
-            <a:r>
-              <a:rPr lang="en-US" dirty="0"/>
-              <a:t/>
-            </a:r>
             <a:endParaRPr lang="en-US" dirty="0"/>
           </a:p>
         </p:txBody>
@@ -1573,10 +1306,6 @@
           <a:bodyPr/>
           <a:lstStyle/>
           <a:p>
-            <a:r>
-              <a:rPr lang="en-US" dirty="0"/>
-              <a:t/>
-            </a:r>
             <a:endParaRPr lang="en-US" dirty="0"/>
           </a:p>
         </p:txBody>
@@ -1661,10 +1390,6 @@
           <a:bodyPr/>
           <a:lstStyle/>
           <a:p>
-            <a:r>
-              <a:rPr lang="en-US" dirty="0"/>
-              <a:t/>
-            </a:r>
             <a:endParaRPr lang="en-US" dirty="0"/>
           </a:p>
         </p:txBody>
@@ -1749,10 +1474,6 @@
           <a:bodyPr/>
           <a:lstStyle/>
           <a:p>
-            <a:r>
-              <a:rPr lang="en-US" dirty="0"/>
-              <a:t/>
-            </a:r>
             <a:endParaRPr lang="en-US" dirty="0"/>
           </a:p>
         </p:txBody>
@@ -1837,10 +1558,6 @@
           <a:bodyPr/>
           <a:lstStyle/>
           <a:p>
-            <a:r>
-              <a:rPr lang="en-US" dirty="0"/>
-              <a:t/>
-            </a:r>
             <a:endParaRPr lang="en-US" dirty="0"/>
           </a:p>
         </p:txBody>
@@ -1925,10 +1642,6 @@
           <a:bodyPr/>
           <a:lstStyle/>
           <a:p>
-            <a:r>
-              <a:rPr lang="en-US" dirty="0"/>
-              <a:t/>
-            </a:r>
             <a:endParaRPr lang="en-US" dirty="0"/>
           </a:p>
         </p:txBody>
@@ -2013,10 +1726,6 @@
           <a:bodyPr/>
           <a:lstStyle/>
           <a:p>
-            <a:r>
-              <a:rPr lang="en-US" dirty="0"/>
-              <a:t/>
-            </a:r>
             <a:endParaRPr lang="en-US" dirty="0"/>
           </a:p>
         </p:txBody>
@@ -2090,6 +1799,11 @@
 <file path=ppt/slideMasters/slideMaster1.xml><?xml version="1.0" encoding="utf-8"?>
 <p:sldMaster xmlns:a="http://schemas.openxmlformats.org/drawingml/2006/main" xmlns:r="http://schemas.openxmlformats.org/officeDocument/2006/relationships" xmlns:p="http://schemas.openxmlformats.org/presentationml/2006/main">
   <p:cSld>
+    <p:bg>
+      <p:bgRef idx="1001">
+        <a:schemeClr val="bg1"/>
+      </p:bgRef>
+    </p:bg>
     <p:spTree>
       <p:nvGrpSpPr>
         <p:cNvPr id="1" name=""/>
@@ -2372,6 +2086,7 @@
         <a:solidFill>
           <a:srgbClr val="0F172A"/>
         </a:solidFill>
+        <a:effectLst/>
       </p:bgPr>
     </p:bg>
     <p:spTree>
@@ -2496,11 +2211,11 @@
           <a:bodyPr wrap="square" lIns="0" tIns="0" rIns="0" bIns="0" rtlCol="0" anchor="ctr"/>
           <a:lstStyle/>
           <a:p>
-            <a:pPr indent="0" marL="0">
-              <a:buNone/>
-            </a:pPr>
-            <a:r>
-              <a:rPr lang="en-US" sz="1300" b="1" spc="300" kern="0" dirty="0">
+            <a:pPr marL="0" indent="0">
+              <a:buNone/>
+            </a:pPr>
+            <a:r>
+              <a:rPr lang="en-US" sz="1300" b="1" kern="0" spc="300" dirty="0">
                 <a:solidFill>
                   <a:srgbClr val="14B8A6"/>
                 </a:solidFill>
@@ -2535,7 +2250,7 @@
           <a:bodyPr wrap="square" lIns="0" tIns="0" rIns="0" bIns="0" rtlCol="0" anchor="ctr"/>
           <a:lstStyle/>
           <a:p>
-            <a:pPr indent="0" marL="0">
+            <a:pPr marL="0" indent="0">
               <a:buNone/>
             </a:pPr>
             <a:r>
@@ -2574,7 +2289,7 @@
           <a:bodyPr wrap="square" lIns="0" tIns="0" rIns="0" bIns="0" rtlCol="0" anchor="ctr"/>
           <a:lstStyle/>
           <a:p>
-            <a:pPr indent="0" marL="0">
+            <a:pPr marL="0" indent="0">
               <a:buNone/>
             </a:pPr>
             <a:r>
@@ -2613,7 +2328,7 @@
           <a:bodyPr wrap="square" lIns="0" tIns="0" rIns="0" bIns="0" rtlCol="0" anchor="ctr"/>
           <a:lstStyle/>
           <a:p>
-            <a:pPr indent="0" marL="0">
+            <a:pPr marL="0" indent="0">
               <a:buNone/>
             </a:pPr>
             <a:r>
@@ -2627,9 +2342,6 @@
               </a:rPr>
               <a:t>前端 ArkTS / ArkUI</a:t>
             </a:r>
-            <a:pPr indent="0" marL="0">
-              <a:buNone/>
-            </a:pPr>
             <a:r>
               <a:rPr lang="en-US" sz="1300" dirty="0">
                 <a:solidFill>
@@ -2641,9 +2353,6 @@
               </a:rPr>
               <a:t>   ·   </a:t>
             </a:r>
-            <a:pPr indent="0" marL="0">
-              <a:buNone/>
-            </a:pPr>
             <a:r>
               <a:rPr lang="en-US" sz="1300" dirty="0">
                 <a:solidFill>
@@ -2655,9 +2364,6 @@
               </a:rPr>
               <a:t>端侧 RDB / Preferences</a:t>
             </a:r>
-            <a:pPr indent="0" marL="0">
-              <a:buNone/>
-            </a:pPr>
             <a:r>
               <a:rPr lang="en-US" sz="1300" dirty="0">
                 <a:solidFill>
@@ -2669,9 +2375,6 @@
               </a:rPr>
               <a:t>   ·   </a:t>
             </a:r>
-            <a:pPr indent="0" marL="0">
-              <a:buNone/>
-            </a:pPr>
             <a:r>
               <a:rPr lang="en-US" sz="1300" dirty="0">
                 <a:solidFill>
@@ -2731,7 +2434,7 @@
           <a:bodyPr wrap="square" lIns="0" tIns="0" rIns="0" bIns="0" rtlCol="0" anchor="ctr"/>
           <a:lstStyle/>
           <a:p>
-            <a:pPr indent="0" marL="0">
+            <a:pPr marL="0" indent="0">
               <a:buNone/>
             </a:pPr>
             <a:r>
@@ -2745,9 +2448,6 @@
               </a:rPr>
               <a:t>答辩人：</a:t>
             </a:r>
-            <a:pPr indent="0" marL="0">
-              <a:buNone/>
-            </a:pPr>
             <a:r>
               <a:rPr lang="en-US" sz="1300" b="1" dirty="0">
                 <a:solidFill>
@@ -2759,9 +2459,6 @@
               </a:rPr>
               <a:t>柯云超 (k yc)</a:t>
             </a:r>
-            <a:pPr indent="0" marL="0">
-              <a:buNone/>
-            </a:pPr>
             <a:r>
               <a:rPr lang="en-US" sz="1300" dirty="0">
                 <a:solidFill>
@@ -2773,9 +2470,6 @@
               </a:rPr>
               <a:t>        包名：</a:t>
             </a:r>
-            <a:pPr indent="0" marL="0">
-              <a:buNone/>
-            </a:pPr>
             <a:r>
               <a:rPr lang="en-US" sz="1300" dirty="0">
                 <a:solidFill>
@@ -2788,6 +2482,53 @@
               <a:t>com.nankai.zhixu</a:t>
             </a:r>
             <a:endParaRPr lang="en-US" sz="1300" dirty="0"/>
+          </a:p>
+        </p:txBody>
+      </p:sp>
+      <p:sp>
+        <p:nvSpPr>
+          <p:cNvPr id="11" name="文本框 10">
+            <a:extLst>
+              <a:ext uri="{FF2B5EF4-FFF2-40B4-BE49-F238E27FC236}">
+                <a16:creationId xmlns:a16="http://schemas.microsoft.com/office/drawing/2014/main" id="{B15E3CC1-AE40-7523-7736-B1DC767A02F7}"/>
+              </a:ext>
+            </a:extLst>
+          </p:cNvPr>
+          <p:cNvSpPr txBox="1"/>
+          <p:nvPr/>
+        </p:nvSpPr>
+        <p:spPr>
+          <a:xfrm>
+            <a:off x="1117600" y="4318000"/>
+            <a:ext cx="7112000" cy="292388"/>
+          </a:xfrm>
+          <a:prstGeom prst="rect">
+            <a:avLst/>
+          </a:prstGeom>
+          <a:noFill/>
+        </p:spPr>
+        <p:txBody>
+          <a:bodyPr vert="horz" rtlCol="0">
+            <a:spAutoFit/>
+          </a:bodyPr>
+          <a:lstStyle/>
+          <a:p>
+            <a:r>
+              <a:rPr lang="en-US" altLang="zh-CN" sz="1300">
+                <a:solidFill>
+                  <a:srgbClr val="777777"/>
+                </a:solidFill>
+                <a:latin typeface="Microsoft YaHei" panose="020B0503020204020204" pitchFamily="34" charset="-122"/>
+                <a:hlinkClick r:id="rId3"/>
+              </a:rPr>
+              <a:t>GitHub: github.com/kyc001/focusflow-harmony</a:t>
+            </a:r>
+            <a:endParaRPr lang="zh-CN" altLang="en-US" sz="1300">
+              <a:solidFill>
+                <a:srgbClr val="777777"/>
+              </a:solidFill>
+              <a:latin typeface="Microsoft YaHei" panose="020B0503020204020204" pitchFamily="34" charset="-122"/>
+            </a:endParaRPr>
           </a:p>
         </p:txBody>
       </p:sp>
@@ -2807,6 +2548,7 @@
         <a:solidFill>
           <a:srgbClr val="F8FAFC"/>
         </a:solidFill>
+        <a:effectLst/>
       </p:bgPr>
     </p:bg>
     <p:spTree>
@@ -2869,11 +2611,11 @@
           <a:bodyPr wrap="square" lIns="0" tIns="0" rIns="0" bIns="0" rtlCol="0" anchor="ctr"/>
           <a:lstStyle/>
           <a:p>
-            <a:pPr indent="0" marL="0">
-              <a:buNone/>
-            </a:pPr>
-            <a:r>
-              <a:rPr lang="en-US" sz="1100" b="1" spc="200" kern="0" dirty="0">
+            <a:pPr marL="0" indent="0">
+              <a:buNone/>
+            </a:pPr>
+            <a:r>
+              <a:rPr lang="en-US" sz="1100" b="1" kern="0" spc="200" dirty="0">
                 <a:solidFill>
                   <a:srgbClr val="F59E0B"/>
                 </a:solidFill>
@@ -2908,7 +2650,7 @@
           <a:bodyPr wrap="square" lIns="0" tIns="0" rIns="0" bIns="0" rtlCol="0" anchor="ctr"/>
           <a:lstStyle/>
           <a:p>
-            <a:pPr indent="0" marL="0">
+            <a:pPr marL="0" indent="0">
               <a:buNone/>
             </a:pPr>
             <a:r>
@@ -2949,9 +2691,27 @@
             <a:tbl>
               <a:tblPr/>
               <a:tblGrid>
-                <a:gridCol w="1554480"/>
-                <a:gridCol w="4206240"/>
-                <a:gridCol w="2377440"/>
+                <a:gridCol w="1554480">
+                  <a:extLst>
+                    <a:ext uri="{9D8B030D-6E8A-4147-A177-3AD203B41FA5}">
+                      <a16:colId xmlns:a16="http://schemas.microsoft.com/office/drawing/2014/main" val="20000"/>
+                    </a:ext>
+                  </a:extLst>
+                </a:gridCol>
+                <a:gridCol w="4206240">
+                  <a:extLst>
+                    <a:ext uri="{9D8B030D-6E8A-4147-A177-3AD203B41FA5}">
+                      <a16:colId xmlns:a16="http://schemas.microsoft.com/office/drawing/2014/main" val="20001"/>
+                    </a:ext>
+                  </a:extLst>
+                </a:gridCol>
+                <a:gridCol w="2377440">
+                  <a:extLst>
+                    <a:ext uri="{9D8B030D-6E8A-4147-A177-3AD203B41FA5}">
+                      <a16:colId xmlns:a16="http://schemas.microsoft.com/office/drawing/2014/main" val="20002"/>
+                    </a:ext>
+                  </a:extLst>
+                </a:gridCol>
               </a:tblGrid>
               <a:tr h="365760">
                 <a:tc>
@@ -2959,7 +2719,7 @@
                     <a:bodyPr/>
                     <a:lstStyle/>
                     <a:p>
-                      <a:pPr indent="0" marL="0">
+                      <a:pPr marL="0" indent="0">
                         <a:buNone/>
                       </a:pPr>
                       <a:r>
@@ -3027,7 +2787,7 @@
                     <a:bodyPr/>
                     <a:lstStyle/>
                     <a:p>
-                      <a:pPr indent="0" marL="0">
+                      <a:pPr marL="0" indent="0">
                         <a:buNone/>
                       </a:pPr>
                       <a:r>
@@ -3095,7 +2855,7 @@
                     <a:bodyPr/>
                     <a:lstStyle/>
                     <a:p>
-                      <a:pPr indent="0" marL="0">
+                      <a:pPr marL="0" indent="0">
                         <a:buNone/>
                       </a:pPr>
                       <a:r>
@@ -3158,6 +2918,11 @@
                     </a:solidFill>
                   </a:tcPr>
                 </a:tc>
+                <a:extLst>
+                  <a:ext uri="{0D108BD9-81ED-4DB2-BD59-A6C34878D82A}">
+                    <a16:rowId xmlns:a16="http://schemas.microsoft.com/office/drawing/2014/main" val="10000"/>
+                  </a:ext>
+                </a:extLst>
               </a:tr>
               <a:tr h="457200">
                 <a:tc>
@@ -3165,7 +2930,7 @@
                     <a:bodyPr/>
                     <a:lstStyle/>
                     <a:p>
-                      <a:pPr indent="0" marL="0">
+                      <a:pPr marL="0" indent="0">
                         <a:buNone/>
                       </a:pPr>
                       <a:r>
@@ -3233,7 +2998,7 @@
                     <a:bodyPr/>
                     <a:lstStyle/>
                     <a:p>
-                      <a:pPr indent="0" marL="0">
+                      <a:pPr marL="0" indent="0">
                         <a:buNone/>
                       </a:pPr>
                       <a:r>
@@ -3301,7 +3066,7 @@
                     <a:bodyPr/>
                     <a:lstStyle/>
                     <a:p>
-                      <a:pPr indent="0" marL="0">
+                      <a:pPr marL="0" indent="0">
                         <a:buNone/>
                       </a:pPr>
                       <a:r>
@@ -3364,6 +3129,11 @@
                     </a:solidFill>
                   </a:tcPr>
                 </a:tc>
+                <a:extLst>
+                  <a:ext uri="{0D108BD9-81ED-4DB2-BD59-A6C34878D82A}">
+                    <a16:rowId xmlns:a16="http://schemas.microsoft.com/office/drawing/2014/main" val="10001"/>
+                  </a:ext>
+                </a:extLst>
               </a:tr>
               <a:tr h="658368">
                 <a:tc>
@@ -3371,7 +3141,7 @@
                     <a:bodyPr/>
                     <a:lstStyle/>
                     <a:p>
-                      <a:pPr indent="0" marL="0">
+                      <a:pPr marL="0" indent="0">
                         <a:buNone/>
                       </a:pPr>
                       <a:r>
@@ -3439,7 +3209,7 @@
                     <a:bodyPr/>
                     <a:lstStyle/>
                     <a:p>
-                      <a:pPr indent="0" marL="0">
+                      <a:pPr marL="0" indent="0">
                         <a:buNone/>
                       </a:pPr>
                       <a:r>
@@ -3507,7 +3277,7 @@
                     <a:bodyPr/>
                     <a:lstStyle/>
                     <a:p>
-                      <a:pPr indent="0" marL="0">
+                      <a:pPr marL="0" indent="0">
                         <a:buNone/>
                       </a:pPr>
                       <a:r>
@@ -3570,6 +3340,11 @@
                     </a:solidFill>
                   </a:tcPr>
                 </a:tc>
+                <a:extLst>
+                  <a:ext uri="{0D108BD9-81ED-4DB2-BD59-A6C34878D82A}">
+                    <a16:rowId xmlns:a16="http://schemas.microsoft.com/office/drawing/2014/main" val="10002"/>
+                  </a:ext>
+                </a:extLst>
               </a:tr>
               <a:tr h="457200">
                 <a:tc>
@@ -3577,7 +3352,7 @@
                     <a:bodyPr/>
                     <a:lstStyle/>
                     <a:p>
-                      <a:pPr indent="0" marL="0">
+                      <a:pPr marL="0" indent="0">
                         <a:buNone/>
                       </a:pPr>
                       <a:r>
@@ -3645,7 +3420,7 @@
                     <a:bodyPr/>
                     <a:lstStyle/>
                     <a:p>
-                      <a:pPr indent="0" marL="0">
+                      <a:pPr marL="0" indent="0">
                         <a:buNone/>
                       </a:pPr>
                       <a:r>
@@ -3713,7 +3488,7 @@
                     <a:bodyPr/>
                     <a:lstStyle/>
                     <a:p>
-                      <a:pPr indent="0" marL="0">
+                      <a:pPr marL="0" indent="0">
                         <a:buNone/>
                       </a:pPr>
                       <a:r>
@@ -3776,6 +3551,11 @@
                     </a:solidFill>
                   </a:tcPr>
                 </a:tc>
+                <a:extLst>
+                  <a:ext uri="{0D108BD9-81ED-4DB2-BD59-A6C34878D82A}">
+                    <a16:rowId xmlns:a16="http://schemas.microsoft.com/office/drawing/2014/main" val="10003"/>
+                  </a:ext>
+                </a:extLst>
               </a:tr>
               <a:tr h="502920">
                 <a:tc>
@@ -3783,7 +3563,7 @@
                     <a:bodyPr/>
                     <a:lstStyle/>
                     <a:p>
-                      <a:pPr indent="0" marL="0">
+                      <a:pPr marL="0" indent="0">
                         <a:buNone/>
                       </a:pPr>
                       <a:r>
@@ -3851,7 +3631,7 @@
                     <a:bodyPr/>
                     <a:lstStyle/>
                     <a:p>
-                      <a:pPr indent="0" marL="0">
+                      <a:pPr marL="0" indent="0">
                         <a:buNone/>
                       </a:pPr>
                       <a:r>
@@ -3919,7 +3699,7 @@
                     <a:bodyPr/>
                     <a:lstStyle/>
                     <a:p>
-                      <a:pPr indent="0" marL="0">
+                      <a:pPr marL="0" indent="0">
                         <a:buNone/>
                       </a:pPr>
                       <a:r>
@@ -3982,6 +3762,11 @@
                     </a:solidFill>
                   </a:tcPr>
                 </a:tc>
+                <a:extLst>
+                  <a:ext uri="{0D108BD9-81ED-4DB2-BD59-A6C34878D82A}">
+                    <a16:rowId xmlns:a16="http://schemas.microsoft.com/office/drawing/2014/main" val="10004"/>
+                  </a:ext>
+                </a:extLst>
               </a:tr>
               <a:tr h="411480">
                 <a:tc>
@@ -3989,7 +3774,7 @@
                     <a:bodyPr/>
                     <a:lstStyle/>
                     <a:p>
-                      <a:pPr indent="0" marL="0">
+                      <a:pPr marL="0" indent="0">
                         <a:buNone/>
                       </a:pPr>
                       <a:r>
@@ -4057,7 +3842,7 @@
                     <a:bodyPr/>
                     <a:lstStyle/>
                     <a:p>
-                      <a:pPr indent="0" marL="0">
+                      <a:pPr marL="0" indent="0">
                         <a:buNone/>
                       </a:pPr>
                       <a:r>
@@ -4125,7 +3910,7 @@
                     <a:bodyPr/>
                     <a:lstStyle/>
                     <a:p>
-                      <a:pPr indent="0" marL="0">
+                      <a:pPr marL="0" indent="0">
                         <a:buNone/>
                       </a:pPr>
                       <a:r>
@@ -4188,6 +3973,11 @@
                     </a:solidFill>
                   </a:tcPr>
                 </a:tc>
+                <a:extLst>
+                  <a:ext uri="{0D108BD9-81ED-4DB2-BD59-A6C34878D82A}">
+                    <a16:rowId xmlns:a16="http://schemas.microsoft.com/office/drawing/2014/main" val="10005"/>
+                  </a:ext>
+                </a:extLst>
               </a:tr>
             </a:tbl>
           </a:graphicData>
@@ -4214,7 +4004,7 @@
           <a:bodyPr wrap="square" lIns="0" tIns="0" rIns="0" bIns="0" rtlCol="0" anchor="ctr"/>
           <a:lstStyle/>
           <a:p>
-            <a:pPr indent="0" marL="0">
+            <a:pPr marL="0" indent="0">
               <a:buNone/>
             </a:pPr>
             <a:r>
@@ -4228,9 +4018,6 @@
               </a:rPr>
               <a:t>设计要点：</a:t>
             </a:r>
-            <a:pPr indent="0" marL="0">
-              <a:buNone/>
-            </a:pPr>
             <a:r>
               <a:rPr lang="en-US" sz="1100" dirty="0">
                 <a:solidFill>
@@ -4242,9 +4029,6 @@
               </a:rPr>
               <a:t>任务 / 番茄表带 </a:t>
             </a:r>
-            <a:pPr indent="0" marL="0">
-              <a:buNone/>
-            </a:pPr>
             <a:r>
               <a:rPr lang="en-US" sz="1100" dirty="0">
                 <a:solidFill>
@@ -4256,9 +4040,6 @@
               </a:rPr>
               <a:t>updated_at</a:t>
             </a:r>
-            <a:pPr indent="0" marL="0">
-              <a:buNone/>
-            </a:pPr>
             <a:r>
               <a:rPr lang="en-US" sz="1100" dirty="0">
                 <a:solidFill>
@@ -4270,9 +4051,6 @@
               </a:rPr>
               <a:t>（冲突裁决）、</a:t>
             </a:r>
-            <a:pPr indent="0" marL="0">
-              <a:buNone/>
-            </a:pPr>
             <a:r>
               <a:rPr lang="en-US" sz="1100" dirty="0">
                 <a:solidFill>
@@ -4284,9 +4062,6 @@
               </a:rPr>
               <a:t>client_request_id</a:t>
             </a:r>
-            <a:pPr indent="0" marL="0">
-              <a:buNone/>
-            </a:pPr>
             <a:r>
               <a:rPr lang="en-US" sz="1100" dirty="0">
                 <a:solidFill>
@@ -4298,9 +4073,6 @@
               </a:rPr>
               <a:t>（幂等）、</a:t>
             </a:r>
-            <a:pPr indent="0" marL="0">
-              <a:buNone/>
-            </a:pPr>
             <a:r>
               <a:rPr lang="en-US" sz="1100" dirty="0">
                 <a:solidFill>
@@ -4312,9 +4084,6 @@
               </a:rPr>
               <a:t>is_deleted</a:t>
             </a:r>
-            <a:pPr indent="0" marL="0">
-              <a:buNone/>
-            </a:pPr>
             <a:r>
               <a:rPr lang="en-US" sz="1100" dirty="0">
                 <a:solidFill>
@@ -4351,7 +4120,7 @@
           <a:bodyPr wrap="square" lIns="0" tIns="0" rIns="0" bIns="0" rtlCol="0" anchor="ctr"/>
           <a:lstStyle/>
           <a:p>
-            <a:pPr indent="0" marL="0">
+            <a:pPr marL="0" indent="0">
               <a:buNone/>
             </a:pPr>
             <a:r>
@@ -4390,7 +4159,7 @@
           <a:bodyPr wrap="square" lIns="0" tIns="0" rIns="0" bIns="0" rtlCol="0" anchor="ctr"/>
           <a:lstStyle/>
           <a:p>
-            <a:pPr algn="r" indent="0" marL="0">
+            <a:pPr marL="0" indent="0" algn="r">
               <a:buNone/>
             </a:pPr>
             <a:r>
@@ -4424,6 +4193,7 @@
         <a:solidFill>
           <a:srgbClr val="F8FAFC"/>
         </a:solidFill>
+        <a:effectLst/>
       </p:bgPr>
     </p:bg>
     <p:spTree>
@@ -4486,11 +4256,11 @@
           <a:bodyPr wrap="square" lIns="0" tIns="0" rIns="0" bIns="0" rtlCol="0" anchor="ctr"/>
           <a:lstStyle/>
           <a:p>
-            <a:pPr indent="0" marL="0">
-              <a:buNone/>
-            </a:pPr>
-            <a:r>
-              <a:rPr lang="en-US" sz="1100" b="1" spc="200" kern="0" dirty="0">
+            <a:pPr marL="0" indent="0">
+              <a:buNone/>
+            </a:pPr>
+            <a:r>
+              <a:rPr lang="en-US" sz="1100" b="1" kern="0" spc="200" dirty="0">
                 <a:solidFill>
                   <a:srgbClr val="2563EB"/>
                 </a:solidFill>
@@ -4525,7 +4295,7 @@
           <a:bodyPr wrap="square" lIns="0" tIns="0" rIns="0" bIns="0" rtlCol="0" anchor="ctr"/>
           <a:lstStyle/>
           <a:p>
-            <a:pPr indent="0" marL="0">
+            <a:pPr marL="0" indent="0">
               <a:buNone/>
             </a:pPr>
             <a:r>
@@ -4564,7 +4334,7 @@
           <a:bodyPr wrap="square" lIns="0" tIns="0" rIns="0" bIns="0" rtlCol="0" anchor="ctr"/>
           <a:lstStyle/>
           <a:p>
-            <a:pPr indent="0" marL="0">
+            <a:pPr marL="0" indent="0">
               <a:buNone/>
             </a:pPr>
             <a:r>
@@ -4606,7 +4376,7 @@
             <a:prstDash val="solid"/>
           </a:ln>
           <a:effectLst>
-            <a:outerShdw sx="100000" sy="100000" kx="0" ky="0" algn="bl" rotWithShape="0" blurRad="63500" dist="22860" dir="8100000">
+            <a:outerShdw blurRad="63500" dist="22860" dir="8100000" algn="bl" rotWithShape="0">
               <a:srgbClr val="000000">
                 <a:alpha val="12000"/>
               </a:srgbClr>
@@ -4641,14 +4411,14 @@
       </p:sp>
       <p:pic>
         <p:nvPicPr>
-          <p:cNvPr id="8" name="Image 0" descr="preencoded.png">    </p:cNvPr>
+          <p:cNvPr id="8" name="Image 0" descr="preencoded.png"/>
           <p:cNvPicPr>
             <a:picLocks noChangeAspect="1"/>
           </p:cNvPicPr>
           <p:nvPr/>
         </p:nvPicPr>
         <p:blipFill>
-          <a:blip r:embed="rId1"/>
+          <a:blip r:embed="rId3"/>
           <a:stretch>
             <a:fillRect/>
           </a:stretch>
@@ -4684,7 +4454,7 @@
           <a:bodyPr wrap="square" lIns="0" tIns="0" rIns="0" bIns="0" rtlCol="0" anchor="ctr"/>
           <a:lstStyle/>
           <a:p>
-            <a:pPr algn="ctr" indent="0" marL="0">
+            <a:pPr marL="0" indent="0" algn="ctr">
               <a:buNone/>
             </a:pPr>
             <a:r>
@@ -4723,7 +4493,7 @@
           <a:bodyPr wrap="square" lIns="0" tIns="0" rIns="0" bIns="0" rtlCol="0" anchor="ctr"/>
           <a:lstStyle/>
           <a:p>
-            <a:pPr algn="ctr" indent="0" marL="0">
+            <a:pPr marL="0" indent="0" algn="ctr">
               <a:buNone/>
             </a:pPr>
             <a:r>
@@ -4762,7 +4532,7 @@
           <a:bodyPr wrap="square" lIns="0" tIns="0" rIns="0" bIns="0" rtlCol="0" anchor="ctr"/>
           <a:lstStyle/>
           <a:p>
-            <a:pPr algn="ctr" indent="0" marL="0">
+            <a:pPr marL="0" indent="0" algn="ctr">
               <a:buNone/>
             </a:pPr>
             <a:r>
@@ -4804,7 +4574,7 @@
             <a:prstDash val="solid"/>
           </a:ln>
           <a:effectLst>
-            <a:outerShdw sx="100000" sy="100000" kx="0" ky="0" algn="bl" rotWithShape="0" blurRad="63500" dist="22860" dir="8100000">
+            <a:outerShdw blurRad="63500" dist="22860" dir="8100000" algn="bl" rotWithShape="0">
               <a:srgbClr val="000000">
                 <a:alpha val="12000"/>
               </a:srgbClr>
@@ -4839,14 +4609,14 @@
       </p:sp>
       <p:pic>
         <p:nvPicPr>
-          <p:cNvPr id="14" name="Image 1" descr="preencoded.png">    </p:cNvPr>
+          <p:cNvPr id="14" name="Image 1" descr="preencoded.png"/>
           <p:cNvPicPr>
             <a:picLocks noChangeAspect="1"/>
           </p:cNvPicPr>
           <p:nvPr/>
         </p:nvPicPr>
         <p:blipFill>
-          <a:blip r:embed="rId2"/>
+          <a:blip r:embed="rId4"/>
           <a:stretch>
             <a:fillRect/>
           </a:stretch>
@@ -4882,7 +4652,7 @@
           <a:bodyPr wrap="square" lIns="0" tIns="0" rIns="0" bIns="0" rtlCol="0" anchor="ctr"/>
           <a:lstStyle/>
           <a:p>
-            <a:pPr algn="ctr" indent="0" marL="0">
+            <a:pPr marL="0" indent="0" algn="ctr">
               <a:buNone/>
             </a:pPr>
             <a:r>
@@ -4921,7 +4691,7 @@
           <a:bodyPr wrap="square" lIns="0" tIns="0" rIns="0" bIns="0" rtlCol="0" anchor="ctr"/>
           <a:lstStyle/>
           <a:p>
-            <a:pPr algn="ctr" indent="0" marL="0">
+            <a:pPr marL="0" indent="0" algn="ctr">
               <a:buNone/>
             </a:pPr>
             <a:r>
@@ -4960,7 +4730,7 @@
           <a:bodyPr wrap="square" lIns="0" tIns="0" rIns="0" bIns="0" rtlCol="0" anchor="ctr"/>
           <a:lstStyle/>
           <a:p>
-            <a:pPr algn="ctr" indent="0" marL="0">
+            <a:pPr marL="0" indent="0" algn="ctr">
               <a:buNone/>
             </a:pPr>
             <a:r>
@@ -5002,7 +4772,7 @@
             <a:prstDash val="solid"/>
           </a:ln>
           <a:effectLst>
-            <a:outerShdw sx="100000" sy="100000" kx="0" ky="0" algn="bl" rotWithShape="0" blurRad="63500" dist="22860" dir="8100000">
+            <a:outerShdw blurRad="63500" dist="22860" dir="8100000" algn="bl" rotWithShape="0">
               <a:srgbClr val="000000">
                 <a:alpha val="12000"/>
               </a:srgbClr>
@@ -5037,14 +4807,14 @@
       </p:sp>
       <p:pic>
         <p:nvPicPr>
-          <p:cNvPr id="20" name="Image 2" descr="preencoded.png">    </p:cNvPr>
+          <p:cNvPr id="20" name="Image 2" descr="preencoded.png"/>
           <p:cNvPicPr>
             <a:picLocks noChangeAspect="1"/>
           </p:cNvPicPr>
           <p:nvPr/>
         </p:nvPicPr>
         <p:blipFill>
-          <a:blip r:embed="rId3"/>
+          <a:blip r:embed="rId5"/>
           <a:stretch>
             <a:fillRect/>
           </a:stretch>
@@ -5080,7 +4850,7 @@
           <a:bodyPr wrap="square" lIns="0" tIns="0" rIns="0" bIns="0" rtlCol="0" anchor="ctr"/>
           <a:lstStyle/>
           <a:p>
-            <a:pPr algn="ctr" indent="0" marL="0">
+            <a:pPr marL="0" indent="0" algn="ctr">
               <a:buNone/>
             </a:pPr>
             <a:r>
@@ -5119,7 +4889,7 @@
           <a:bodyPr wrap="square" lIns="0" tIns="0" rIns="0" bIns="0" rtlCol="0" anchor="ctr"/>
           <a:lstStyle/>
           <a:p>
-            <a:pPr algn="ctr" indent="0" marL="0">
+            <a:pPr marL="0" indent="0" algn="ctr">
               <a:buNone/>
             </a:pPr>
             <a:r>
@@ -5158,7 +4928,7 @@
           <a:bodyPr wrap="square" lIns="0" tIns="0" rIns="0" bIns="0" rtlCol="0" anchor="ctr"/>
           <a:lstStyle/>
           <a:p>
-            <a:pPr algn="ctr" indent="0" marL="0">
+            <a:pPr marL="0" indent="0" algn="ctr">
               <a:buNone/>
             </a:pPr>
             <a:r>
@@ -5197,7 +4967,7 @@
           <a:bodyPr wrap="square" lIns="0" tIns="0" rIns="0" bIns="0" rtlCol="0" anchor="ctr"/>
           <a:lstStyle/>
           <a:p>
-            <a:pPr indent="0" marL="0">
+            <a:pPr marL="0" indent="0">
               <a:buNone/>
             </a:pPr>
             <a:r>
@@ -5211,9 +4981,6 @@
               </a:rPr>
               <a:t>同步流程：</a:t>
             </a:r>
-            <a:pPr indent="0" marL="0">
-              <a:buNone/>
-            </a:pPr>
             <a:r>
               <a:rPr lang="en-US" sz="1150" dirty="0">
                 <a:solidFill>
@@ -5250,7 +5017,7 @@
           <a:bodyPr wrap="square" lIns="0" tIns="0" rIns="0" bIns="0" rtlCol="0" anchor="ctr"/>
           <a:lstStyle/>
           <a:p>
-            <a:pPr indent="0" marL="0">
+            <a:pPr marL="0" indent="0">
               <a:buNone/>
             </a:pPr>
             <a:r>
@@ -5289,7 +5056,7 @@
           <a:bodyPr wrap="square" lIns="0" tIns="0" rIns="0" bIns="0" rtlCol="0" anchor="ctr"/>
           <a:lstStyle/>
           <a:p>
-            <a:pPr algn="r" indent="0" marL="0">
+            <a:pPr marL="0" indent="0" algn="r">
               <a:buNone/>
             </a:pPr>
             <a:r>
@@ -5323,6 +5090,7 @@
         <a:solidFill>
           <a:srgbClr val="F8FAFC"/>
         </a:solidFill>
+        <a:effectLst/>
       </p:bgPr>
     </p:bg>
     <p:spTree>
@@ -5385,11 +5153,11 @@
           <a:bodyPr wrap="square" lIns="0" tIns="0" rIns="0" bIns="0" rtlCol="0" anchor="ctr"/>
           <a:lstStyle/>
           <a:p>
-            <a:pPr indent="0" marL="0">
-              <a:buNone/>
-            </a:pPr>
-            <a:r>
-              <a:rPr lang="en-US" sz="1100" b="1" spc="200" kern="0" dirty="0">
+            <a:pPr marL="0" indent="0">
+              <a:buNone/>
+            </a:pPr>
+            <a:r>
+              <a:rPr lang="en-US" sz="1100" b="1" kern="0" spc="200" dirty="0">
                 <a:solidFill>
                   <a:srgbClr val="14B8A6"/>
                 </a:solidFill>
@@ -5424,7 +5192,7 @@
           <a:bodyPr wrap="square" lIns="0" tIns="0" rIns="0" bIns="0" rtlCol="0" anchor="ctr"/>
           <a:lstStyle/>
           <a:p>
-            <a:pPr indent="0" marL="0">
+            <a:pPr marL="0" indent="0">
               <a:buNone/>
             </a:pPr>
             <a:r>
@@ -5466,7 +5234,7 @@
             <a:prstDash val="solid"/>
           </a:ln>
           <a:effectLst>
-            <a:outerShdw sx="100000" sy="100000" kx="0" ky="0" algn="bl" rotWithShape="0" blurRad="63500" dist="22860" dir="8100000">
+            <a:outerShdw blurRad="63500" dist="22860" dir="8100000" algn="bl" rotWithShape="0">
               <a:srgbClr val="000000">
                 <a:alpha val="12000"/>
               </a:srgbClr>
@@ -5495,7 +5263,7 @@
           <a:bodyPr wrap="square" lIns="0" tIns="0" rIns="0" bIns="0" rtlCol="0" anchor="ctr"/>
           <a:lstStyle/>
           <a:p>
-            <a:pPr indent="0" marL="0">
+            <a:pPr marL="0" indent="0">
               <a:buNone/>
             </a:pPr>
             <a:r>
@@ -5534,7 +5302,7 @@
           <a:bodyPr wrap="square" lIns="0" tIns="0" rIns="0" bIns="0" rtlCol="0" anchor="ctr"/>
           <a:lstStyle/>
           <a:p>
-            <a:pPr indent="0" marL="0">
+            <a:pPr marL="0" indent="0">
               <a:spcAft>
                 <a:spcPts val="800"/>
               </a:spcAft>
@@ -5621,7 +5389,7 @@
             <a:prstDash val="solid"/>
           </a:ln>
           <a:effectLst>
-            <a:outerShdw sx="100000" sy="100000" kx="0" ky="0" algn="bl" rotWithShape="0" blurRad="63500" dist="22860" dir="8100000">
+            <a:outerShdw blurRad="63500" dist="22860" dir="8100000" algn="bl" rotWithShape="0">
               <a:srgbClr val="000000">
                 <a:alpha val="12000"/>
               </a:srgbClr>
@@ -5656,14 +5424,14 @@
       </p:sp>
       <p:pic>
         <p:nvPicPr>
-          <p:cNvPr id="10" name="Image 0" descr="preencoded.png">    </p:cNvPr>
+          <p:cNvPr id="10" name="Image 0" descr="preencoded.png"/>
           <p:cNvPicPr>
             <a:picLocks noChangeAspect="1"/>
           </p:cNvPicPr>
           <p:nvPr/>
         </p:nvPicPr>
         <p:blipFill>
-          <a:blip r:embed="rId1"/>
+          <a:blip r:embed="rId3"/>
           <a:stretch>
             <a:fillRect/>
           </a:stretch>
@@ -5699,7 +5467,7 @@
           <a:bodyPr wrap="square" lIns="0" tIns="0" rIns="0" bIns="0" rtlCol="0" anchor="ctr"/>
           <a:lstStyle/>
           <a:p>
-            <a:pPr indent="0" marL="0">
+            <a:pPr marL="0" indent="0">
               <a:buNone/>
             </a:pPr>
             <a:r>
@@ -5844,7 +5612,7 @@
           <a:bodyPr wrap="square" lIns="0" tIns="0" rIns="0" bIns="0" rtlCol="0" anchor="ctr"/>
           <a:lstStyle/>
           <a:p>
-            <a:pPr indent="0" marL="0">
+            <a:pPr marL="0" indent="0">
               <a:buNone/>
             </a:pPr>
             <a:r>
@@ -5883,7 +5651,7 @@
           <a:bodyPr wrap="square" lIns="0" tIns="0" rIns="0" bIns="0" rtlCol="0" anchor="ctr"/>
           <a:lstStyle/>
           <a:p>
-            <a:pPr indent="0" marL="0">
+            <a:pPr marL="0" indent="0">
               <a:buNone/>
             </a:pPr>
             <a:r>
@@ -5922,7 +5690,7 @@
           <a:bodyPr wrap="square" lIns="0" tIns="0" rIns="0" bIns="0" rtlCol="0" anchor="ctr"/>
           <a:lstStyle/>
           <a:p>
-            <a:pPr algn="r" indent="0" marL="0">
+            <a:pPr marL="0" indent="0" algn="r">
               <a:buNone/>
             </a:pPr>
             <a:r>
@@ -5956,6 +5724,7 @@
         <a:solidFill>
           <a:srgbClr val="F8FAFC"/>
         </a:solidFill>
+        <a:effectLst/>
       </p:bgPr>
     </p:bg>
     <p:spTree>
@@ -6018,11 +5787,11 @@
           <a:bodyPr wrap="square" lIns="0" tIns="0" rIns="0" bIns="0" rtlCol="0" anchor="ctr"/>
           <a:lstStyle/>
           <a:p>
-            <a:pPr indent="0" marL="0">
-              <a:buNone/>
-            </a:pPr>
-            <a:r>
-              <a:rPr lang="en-US" sz="1100" b="1" spc="200" kern="0" dirty="0">
+            <a:pPr marL="0" indent="0">
+              <a:buNone/>
+            </a:pPr>
+            <a:r>
+              <a:rPr lang="en-US" sz="1100" b="1" kern="0" spc="200" dirty="0">
                 <a:solidFill>
                   <a:srgbClr val="F59E0B"/>
                 </a:solidFill>
@@ -6057,7 +5826,7 @@
           <a:bodyPr wrap="square" lIns="0" tIns="0" rIns="0" bIns="0" rtlCol="0" anchor="ctr"/>
           <a:lstStyle/>
           <a:p>
-            <a:pPr indent="0" marL="0">
+            <a:pPr marL="0" indent="0">
               <a:buNone/>
             </a:pPr>
             <a:r>
@@ -6096,7 +5865,7 @@
           <a:bodyPr wrap="square" lIns="0" tIns="0" rIns="0" bIns="0" rtlCol="0" anchor="ctr"/>
           <a:lstStyle/>
           <a:p>
-            <a:pPr indent="0" marL="0">
+            <a:pPr marL="0" indent="0">
               <a:buNone/>
             </a:pPr>
             <a:r>
@@ -6138,7 +5907,7 @@
             <a:prstDash val="solid"/>
           </a:ln>
           <a:effectLst>
-            <a:outerShdw sx="100000" sy="100000" kx="0" ky="0" algn="bl" rotWithShape="0" blurRad="63500" dist="22860" dir="8100000">
+            <a:outerShdw blurRad="63500" dist="22860" dir="8100000" algn="bl" rotWithShape="0">
               <a:srgbClr val="000000">
                 <a:alpha val="12000"/>
               </a:srgbClr>
@@ -6167,7 +5936,7 @@
           <a:bodyPr wrap="square" lIns="0" tIns="0" rIns="0" bIns="0" rtlCol="0" anchor="ctr"/>
           <a:lstStyle/>
           <a:p>
-            <a:pPr algn="ctr" indent="0" marL="0">
+            <a:pPr marL="0" indent="0" algn="ctr">
               <a:buNone/>
             </a:pPr>
             <a:r>
@@ -6206,7 +5975,7 @@
           <a:bodyPr wrap="square" lIns="0" tIns="0" rIns="0" bIns="0" rtlCol="0" anchor="ctr"/>
           <a:lstStyle/>
           <a:p>
-            <a:pPr algn="ctr" indent="0" marL="0">
+            <a:pPr marL="0" indent="0" algn="ctr">
               <a:buNone/>
             </a:pPr>
             <a:r>
@@ -6251,14 +6020,14 @@
       </p:sp>
       <p:pic>
         <p:nvPicPr>
-          <p:cNvPr id="10" name="Image 0" descr="preencoded.png">    </p:cNvPr>
+          <p:cNvPr id="10" name="Image 0" descr="preencoded.png"/>
           <p:cNvPicPr>
             <a:picLocks noChangeAspect="1"/>
           </p:cNvPicPr>
           <p:nvPr/>
         </p:nvPicPr>
         <p:blipFill>
-          <a:blip r:embed="rId1"/>
+          <a:blip r:embed="rId3"/>
           <a:stretch>
             <a:fillRect/>
           </a:stretch>
@@ -6297,7 +6066,7 @@
             <a:prstDash val="solid"/>
           </a:ln>
           <a:effectLst>
-            <a:outerShdw sx="100000" sy="100000" kx="0" ky="0" algn="bl" rotWithShape="0" blurRad="63500" dist="22860" dir="8100000">
+            <a:outerShdw blurRad="63500" dist="22860" dir="8100000" algn="bl" rotWithShape="0">
               <a:srgbClr val="000000">
                 <a:alpha val="12000"/>
               </a:srgbClr>
@@ -6326,7 +6095,7 @@
           <a:bodyPr wrap="square" lIns="0" tIns="0" rIns="0" bIns="0" rtlCol="0" anchor="ctr"/>
           <a:lstStyle/>
           <a:p>
-            <a:pPr algn="ctr" indent="0" marL="0">
+            <a:pPr marL="0" indent="0" algn="ctr">
               <a:buNone/>
             </a:pPr>
             <a:r>
@@ -6343,7 +6112,7 @@
             <a:endParaRPr lang="en-US" sz="1400" dirty="0"/>
           </a:p>
           <a:p>
-            <a:pPr algn="ctr" indent="0" marL="0">
+            <a:pPr marL="0" indent="0" algn="ctr">
               <a:buNone/>
             </a:pPr>
             <a:r>
@@ -6382,7 +6151,7 @@
           <a:bodyPr wrap="square" lIns="0" tIns="0" rIns="0" bIns="0" rtlCol="0" anchor="ctr"/>
           <a:lstStyle/>
           <a:p>
-            <a:pPr algn="ctr" indent="0" marL="0">
+            <a:pPr marL="0" indent="0" algn="ctr">
               <a:buNone/>
             </a:pPr>
             <a:r>
@@ -6427,14 +6196,14 @@
       </p:sp>
       <p:pic>
         <p:nvPicPr>
-          <p:cNvPr id="15" name="Image 1" descr="preencoded.png">    </p:cNvPr>
+          <p:cNvPr id="15" name="Image 1" descr="preencoded.png"/>
           <p:cNvPicPr>
             <a:picLocks noChangeAspect="1"/>
           </p:cNvPicPr>
           <p:nvPr/>
         </p:nvPicPr>
         <p:blipFill>
-          <a:blip r:embed="rId2"/>
+          <a:blip r:embed="rId3"/>
           <a:stretch>
             <a:fillRect/>
           </a:stretch>
@@ -6473,7 +6242,7 @@
             <a:prstDash val="solid"/>
           </a:ln>
           <a:effectLst>
-            <a:outerShdw sx="100000" sy="100000" kx="0" ky="0" algn="bl" rotWithShape="0" blurRad="63500" dist="22860" dir="8100000">
+            <a:outerShdw blurRad="63500" dist="22860" dir="8100000" algn="bl" rotWithShape="0">
               <a:srgbClr val="000000">
                 <a:alpha val="12000"/>
               </a:srgbClr>
@@ -6502,7 +6271,7 @@
           <a:bodyPr wrap="square" lIns="0" tIns="0" rIns="0" bIns="0" rtlCol="0" anchor="ctr"/>
           <a:lstStyle/>
           <a:p>
-            <a:pPr algn="ctr" indent="0" marL="0">
+            <a:pPr marL="0" indent="0" algn="ctr">
               <a:buNone/>
             </a:pPr>
             <a:r>
@@ -6541,7 +6310,7 @@
           <a:bodyPr wrap="square" lIns="0" tIns="0" rIns="0" bIns="0" rtlCol="0" anchor="ctr"/>
           <a:lstStyle/>
           <a:p>
-            <a:pPr algn="ctr" indent="0" marL="0">
+            <a:pPr marL="0" indent="0" algn="ctr">
               <a:buNone/>
             </a:pPr>
             <a:r>
@@ -6586,7 +6355,7 @@
       </p:sp>
       <p:pic>
         <p:nvPicPr>
-          <p:cNvPr id="20" name="Image 2" descr="preencoded.png">    </p:cNvPr>
+          <p:cNvPr id="20" name="Image 2" descr="preencoded.png"/>
           <p:cNvPicPr>
             <a:picLocks noChangeAspect="1"/>
           </p:cNvPicPr>
@@ -6632,7 +6401,7 @@
             <a:prstDash val="solid"/>
           </a:ln>
           <a:effectLst>
-            <a:outerShdw sx="100000" sy="100000" kx="0" ky="0" algn="bl" rotWithShape="0" blurRad="63500" dist="22860" dir="8100000">
+            <a:outerShdw blurRad="63500" dist="22860" dir="8100000" algn="bl" rotWithShape="0">
               <a:srgbClr val="000000">
                 <a:alpha val="12000"/>
               </a:srgbClr>
@@ -6661,7 +6430,7 @@
           <a:bodyPr wrap="square" lIns="0" tIns="0" rIns="0" bIns="0" rtlCol="0" anchor="ctr"/>
           <a:lstStyle/>
           <a:p>
-            <a:pPr algn="ctr" indent="0" marL="0">
+            <a:pPr marL="0" indent="0" algn="ctr">
               <a:buNone/>
             </a:pPr>
             <a:r>
@@ -6700,7 +6469,7 @@
           <a:bodyPr wrap="square" lIns="0" tIns="0" rIns="0" bIns="0" rtlCol="0" anchor="ctr"/>
           <a:lstStyle/>
           <a:p>
-            <a:pPr algn="ctr" indent="0" marL="0">
+            <a:pPr marL="0" indent="0" algn="ctr">
               <a:buNone/>
             </a:pPr>
             <a:r>
@@ -6739,7 +6508,7 @@
           <a:bodyPr wrap="square" lIns="0" tIns="0" rIns="0" bIns="0" rtlCol="0" anchor="ctr"/>
           <a:lstStyle/>
           <a:p>
-            <a:pPr indent="0" marL="0">
+            <a:pPr marL="0" indent="0">
               <a:buNone/>
             </a:pPr>
             <a:r>
@@ -6753,9 +6522,6 @@
               </a:rPr>
               <a:t>两个关键约束：</a:t>
             </a:r>
-            <a:pPr indent="0" marL="0">
-              <a:buNone/>
-            </a:pPr>
             <a:r>
               <a:rPr lang="en-US" sz="1150" dirty="0">
                 <a:solidFill>
@@ -6792,7 +6558,7 @@
           <a:bodyPr wrap="square" lIns="0" tIns="0" rIns="0" bIns="0" rtlCol="0" anchor="ctr"/>
           <a:lstStyle/>
           <a:p>
-            <a:pPr indent="0" marL="0">
+            <a:pPr marL="0" indent="0">
               <a:buNone/>
             </a:pPr>
             <a:r>
@@ -6831,7 +6597,7 @@
           <a:bodyPr wrap="square" lIns="0" tIns="0" rIns="0" bIns="0" rtlCol="0" anchor="ctr"/>
           <a:lstStyle/>
           <a:p>
-            <a:pPr algn="r" indent="0" marL="0">
+            <a:pPr marL="0" indent="0" algn="r">
               <a:buNone/>
             </a:pPr>
             <a:r>
@@ -6865,6 +6631,7 @@
         <a:solidFill>
           <a:srgbClr val="F8FAFC"/>
         </a:solidFill>
+        <a:effectLst/>
       </p:bgPr>
     </p:bg>
     <p:spTree>
@@ -6927,11 +6694,11 @@
           <a:bodyPr wrap="square" lIns="0" tIns="0" rIns="0" bIns="0" rtlCol="0" anchor="ctr"/>
           <a:lstStyle/>
           <a:p>
-            <a:pPr indent="0" marL="0">
-              <a:buNone/>
-            </a:pPr>
-            <a:r>
-              <a:rPr lang="en-US" sz="1100" b="1" spc="200" kern="0" dirty="0">
+            <a:pPr marL="0" indent="0">
+              <a:buNone/>
+            </a:pPr>
+            <a:r>
+              <a:rPr lang="en-US" sz="1100" b="1" kern="0" spc="200" dirty="0">
                 <a:solidFill>
                   <a:srgbClr val="7C3AED"/>
                 </a:solidFill>
@@ -6966,7 +6733,7 @@
           <a:bodyPr wrap="square" lIns="0" tIns="0" rIns="0" bIns="0" rtlCol="0" anchor="ctr"/>
           <a:lstStyle/>
           <a:p>
-            <a:pPr indent="0" marL="0">
+            <a:pPr marL="0" indent="0">
               <a:buNone/>
             </a:pPr>
             <a:r>
@@ -7008,7 +6775,7 @@
             <a:prstDash val="solid"/>
           </a:ln>
           <a:effectLst>
-            <a:outerShdw sx="100000" sy="100000" kx="0" ky="0" algn="bl" rotWithShape="0" blurRad="63500" dist="22860" dir="8100000">
+            <a:outerShdw blurRad="63500" dist="22860" dir="8100000" algn="bl" rotWithShape="0">
               <a:srgbClr val="000000">
                 <a:alpha val="12000"/>
               </a:srgbClr>
@@ -7037,7 +6804,7 @@
           <a:bodyPr wrap="square" lIns="0" tIns="0" rIns="0" bIns="0" rtlCol="0" anchor="ctr"/>
           <a:lstStyle/>
           <a:p>
-            <a:pPr indent="0" marL="0">
+            <a:pPr marL="0" indent="0">
               <a:buNone/>
             </a:pPr>
             <a:r>
@@ -7076,7 +6843,7 @@
           <a:bodyPr wrap="square" lIns="0" tIns="0" rIns="0" bIns="0" rtlCol="0" anchor="ctr"/>
           <a:lstStyle/>
           <a:p>
-            <a:pPr indent="0" marL="0">
+            <a:pPr marL="0" indent="0">
               <a:spcAft>
                 <a:spcPts val="700"/>
               </a:spcAft>
@@ -7096,7 +6863,7 @@
             <a:endParaRPr lang="en-US" sz="1100" dirty="0"/>
           </a:p>
           <a:p>
-            <a:pPr indent="0" marL="0">
+            <a:pPr marL="0" indent="0">
               <a:spcAft>
                 <a:spcPts val="700"/>
               </a:spcAft>
@@ -7116,7 +6883,7 @@
             <a:endParaRPr lang="en-US" sz="1100" dirty="0"/>
           </a:p>
           <a:p>
-            <a:pPr indent="0" marL="0">
+            <a:pPr marL="0" indent="0">
               <a:spcAft>
                 <a:spcPts val="700"/>
               </a:spcAft>
@@ -7136,7 +6903,7 @@
             <a:endParaRPr lang="en-US" sz="1100" dirty="0"/>
           </a:p>
           <a:p>
-            <a:pPr indent="0" marL="0">
+            <a:pPr marL="0" indent="0">
               <a:spcAft>
                 <a:spcPts val="700"/>
               </a:spcAft>
@@ -7156,7 +6923,7 @@
             <a:endParaRPr lang="en-US" sz="1100" dirty="0"/>
           </a:p>
           <a:p>
-            <a:pPr indent="0" marL="0">
+            <a:pPr marL="0" indent="0">
               <a:spcAft>
                 <a:spcPts val="700"/>
               </a:spcAft>
@@ -7176,7 +6943,7 @@
             <a:endParaRPr lang="en-US" sz="1100" dirty="0"/>
           </a:p>
           <a:p>
-            <a:pPr indent="0" marL="0">
+            <a:pPr marL="0" indent="0">
               <a:spcAft>
                 <a:spcPts val="700"/>
               </a:spcAft>
@@ -7221,7 +6988,7 @@
             <a:prstDash val="solid"/>
           </a:ln>
           <a:effectLst>
-            <a:outerShdw sx="100000" sy="100000" kx="0" ky="0" algn="bl" rotWithShape="0" blurRad="63500" dist="22860" dir="8100000">
+            <a:outerShdw blurRad="63500" dist="22860" dir="8100000" algn="bl" rotWithShape="0">
               <a:srgbClr val="000000">
                 <a:alpha val="12000"/>
               </a:srgbClr>
@@ -7256,14 +7023,14 @@
       </p:sp>
       <p:pic>
         <p:nvPicPr>
-          <p:cNvPr id="10" name="Image 0" descr="preencoded.png">    </p:cNvPr>
+          <p:cNvPr id="10" name="Image 0" descr="preencoded.png"/>
           <p:cNvPicPr>
             <a:picLocks noChangeAspect="1"/>
           </p:cNvPicPr>
           <p:nvPr/>
         </p:nvPicPr>
         <p:blipFill>
-          <a:blip r:embed="rId1"/>
+          <a:blip r:embed="rId3"/>
           <a:stretch>
             <a:fillRect/>
           </a:stretch>
@@ -7299,7 +7066,7 @@
           <a:bodyPr wrap="square" lIns="0" tIns="0" rIns="0" bIns="0" rtlCol="0" anchor="ctr"/>
           <a:lstStyle/>
           <a:p>
-            <a:pPr indent="0" marL="0">
+            <a:pPr marL="0" indent="0">
               <a:buNone/>
             </a:pPr>
             <a:r>
@@ -7338,7 +7105,7 @@
           <a:bodyPr wrap="square" lIns="0" tIns="0" rIns="0" bIns="0" rtlCol="0" anchor="ctr"/>
           <a:lstStyle/>
           <a:p>
-            <a:pPr indent="0" marL="0">
+            <a:pPr marL="0" indent="0">
               <a:buNone/>
             </a:pPr>
             <a:r>
@@ -7355,13 +7122,13 @@
             <a:endParaRPr lang="en-US" sz="1200" dirty="0"/>
           </a:p>
           <a:p>
-            <a:pPr indent="0" marL="0">
+            <a:pPr marL="0" indent="0">
               <a:buNone/>
             </a:pPr>
             <a:endParaRPr lang="en-US" sz="1200" dirty="0"/>
           </a:p>
           <a:p>
-            <a:pPr indent="0" marL="0">
+            <a:pPr marL="0" indent="0">
               <a:buNone/>
             </a:pPr>
             <a:r>
@@ -7378,13 +7145,13 @@
             <a:endParaRPr lang="en-US" sz="1200" dirty="0"/>
           </a:p>
           <a:p>
-            <a:pPr indent="0" marL="0">
+            <a:pPr marL="0" indent="0">
               <a:buNone/>
             </a:pPr>
             <a:endParaRPr lang="en-US" sz="1200" dirty="0"/>
           </a:p>
           <a:p>
-            <a:pPr indent="0" marL="0">
+            <a:pPr marL="0" indent="0">
               <a:buNone/>
             </a:pPr>
             <a:r>
@@ -7423,7 +7190,7 @@
           <a:bodyPr wrap="square" lIns="0" tIns="0" rIns="0" bIns="0" rtlCol="0" anchor="ctr"/>
           <a:lstStyle/>
           <a:p>
-            <a:pPr indent="0" marL="0">
+            <a:pPr marL="0" indent="0">
               <a:buNone/>
             </a:pPr>
             <a:r>
@@ -7462,7 +7229,7 @@
           <a:bodyPr wrap="square" lIns="0" tIns="0" rIns="0" bIns="0" rtlCol="0" anchor="ctr"/>
           <a:lstStyle/>
           <a:p>
-            <a:pPr algn="r" indent="0" marL="0">
+            <a:pPr marL="0" indent="0" algn="r">
               <a:buNone/>
             </a:pPr>
             <a:r>
@@ -7496,6 +7263,7 @@
         <a:solidFill>
           <a:srgbClr val="F8FAFC"/>
         </a:solidFill>
+        <a:effectLst/>
       </p:bgPr>
     </p:bg>
     <p:spTree>
@@ -7558,11 +7326,11 @@
           <a:bodyPr wrap="square" lIns="0" tIns="0" rIns="0" bIns="0" rtlCol="0" anchor="ctr"/>
           <a:lstStyle/>
           <a:p>
-            <a:pPr indent="0" marL="0">
-              <a:buNone/>
-            </a:pPr>
-            <a:r>
-              <a:rPr lang="en-US" sz="1100" b="1" spc="200" kern="0" dirty="0">
+            <a:pPr marL="0" indent="0">
+              <a:buNone/>
+            </a:pPr>
+            <a:r>
+              <a:rPr lang="en-US" sz="1100" b="1" kern="0" spc="200" dirty="0">
                 <a:solidFill>
                   <a:srgbClr val="14B8A6"/>
                 </a:solidFill>
@@ -7597,7 +7365,7 @@
           <a:bodyPr wrap="square" lIns="0" tIns="0" rIns="0" bIns="0" rtlCol="0" anchor="ctr"/>
           <a:lstStyle/>
           <a:p>
-            <a:pPr indent="0" marL="0">
+            <a:pPr marL="0" indent="0">
               <a:buNone/>
             </a:pPr>
             <a:r>
@@ -7639,7 +7407,7 @@
             <a:prstDash val="solid"/>
           </a:ln>
           <a:effectLst>
-            <a:outerShdw sx="100000" sy="100000" kx="0" ky="0" algn="bl" rotWithShape="0" blurRad="63500" dist="22860" dir="8100000">
+            <a:outerShdw blurRad="63500" dist="22860" dir="8100000" algn="bl" rotWithShape="0">
               <a:srgbClr val="000000">
                 <a:alpha val="12000"/>
               </a:srgbClr>
@@ -7668,7 +7436,7 @@
           <a:bodyPr wrap="square" lIns="0" tIns="0" rIns="0" bIns="0" rtlCol="0" anchor="ctr"/>
           <a:lstStyle/>
           <a:p>
-            <a:pPr indent="0" marL="0">
+            <a:pPr marL="0" indent="0">
               <a:buNone/>
             </a:pPr>
             <a:r>
@@ -7707,7 +7475,7 @@
           <a:bodyPr wrap="square" lIns="0" tIns="0" rIns="0" bIns="0" rtlCol="0" anchor="ctr"/>
           <a:lstStyle/>
           <a:p>
-            <a:pPr indent="0" marL="0">
+            <a:pPr marL="0" indent="0">
               <a:buNone/>
             </a:pPr>
             <a:r>
@@ -7746,7 +7514,7 @@
           <a:bodyPr wrap="square" lIns="0" tIns="0" rIns="0" bIns="0" rtlCol="0" anchor="ctr"/>
           <a:lstStyle/>
           <a:p>
-            <a:pPr indent="0" marL="0">
+            <a:pPr marL="0" indent="0">
               <a:buNone/>
             </a:pPr>
             <a:r>
@@ -7791,14 +7559,14 @@
       </p:sp>
       <p:pic>
         <p:nvPicPr>
-          <p:cNvPr id="10" name="Image 0" descr="preencoded.png">    </p:cNvPr>
+          <p:cNvPr id="10" name="Image 0" descr="preencoded.png"/>
           <p:cNvPicPr>
             <a:picLocks noChangeAspect="1"/>
           </p:cNvPicPr>
           <p:nvPr/>
         </p:nvPicPr>
         <p:blipFill>
-          <a:blip r:embed="rId1"/>
+          <a:blip r:embed="rId3"/>
           <a:stretch>
             <a:fillRect/>
           </a:stretch>
@@ -7837,7 +7605,7 @@
             <a:prstDash val="solid"/>
           </a:ln>
           <a:effectLst>
-            <a:outerShdw sx="100000" sy="100000" kx="0" ky="0" algn="bl" rotWithShape="0" blurRad="63500" dist="22860" dir="8100000">
+            <a:outerShdw blurRad="63500" dist="22860" dir="8100000" algn="bl" rotWithShape="0">
               <a:srgbClr val="000000">
                 <a:alpha val="12000"/>
               </a:srgbClr>
@@ -7866,7 +7634,7 @@
           <a:bodyPr wrap="square" lIns="0" tIns="0" rIns="0" bIns="0" rtlCol="0" anchor="ctr"/>
           <a:lstStyle/>
           <a:p>
-            <a:pPr indent="0" marL="0">
+            <a:pPr marL="0" indent="0">
               <a:buNone/>
             </a:pPr>
             <a:r>
@@ -7905,7 +7673,7 @@
           <a:bodyPr wrap="square" lIns="0" tIns="0" rIns="0" bIns="0" rtlCol="0" anchor="ctr"/>
           <a:lstStyle/>
           <a:p>
-            <a:pPr indent="0" marL="0">
+            <a:pPr marL="0" indent="0">
               <a:buNone/>
             </a:pPr>
             <a:r>
@@ -7944,7 +7712,7 @@
           <a:bodyPr wrap="square" lIns="0" tIns="0" rIns="0" bIns="0" rtlCol="0" anchor="ctr"/>
           <a:lstStyle/>
           <a:p>
-            <a:pPr indent="0" marL="0">
+            <a:pPr marL="0" indent="0">
               <a:buNone/>
             </a:pPr>
             <a:r>
@@ -7989,14 +7757,14 @@
       </p:sp>
       <p:pic>
         <p:nvPicPr>
-          <p:cNvPr id="16" name="Image 1" descr="preencoded.png">    </p:cNvPr>
+          <p:cNvPr id="16" name="Image 1" descr="preencoded.png"/>
           <p:cNvPicPr>
             <a:picLocks noChangeAspect="1"/>
           </p:cNvPicPr>
           <p:nvPr/>
         </p:nvPicPr>
         <p:blipFill>
-          <a:blip r:embed="rId2"/>
+          <a:blip r:embed="rId3"/>
           <a:stretch>
             <a:fillRect/>
           </a:stretch>
@@ -8035,7 +7803,7 @@
             <a:prstDash val="solid"/>
           </a:ln>
           <a:effectLst>
-            <a:outerShdw sx="100000" sy="100000" kx="0" ky="0" algn="bl" rotWithShape="0" blurRad="63500" dist="22860" dir="8100000">
+            <a:outerShdw blurRad="63500" dist="22860" dir="8100000" algn="bl" rotWithShape="0">
               <a:srgbClr val="000000">
                 <a:alpha val="12000"/>
               </a:srgbClr>
@@ -8064,7 +7832,7 @@
           <a:bodyPr wrap="square" lIns="0" tIns="0" rIns="0" bIns="0" rtlCol="0" anchor="ctr"/>
           <a:lstStyle/>
           <a:p>
-            <a:pPr indent="0" marL="0">
+            <a:pPr marL="0" indent="0">
               <a:buNone/>
             </a:pPr>
             <a:r>
@@ -8103,7 +7871,7 @@
           <a:bodyPr wrap="square" lIns="0" tIns="0" rIns="0" bIns="0" rtlCol="0" anchor="ctr"/>
           <a:lstStyle/>
           <a:p>
-            <a:pPr indent="0" marL="0">
+            <a:pPr marL="0" indent="0">
               <a:buNone/>
             </a:pPr>
             <a:r>
@@ -8142,7 +7910,7 @@
           <a:bodyPr wrap="square" lIns="0" tIns="0" rIns="0" bIns="0" rtlCol="0" anchor="ctr"/>
           <a:lstStyle/>
           <a:p>
-            <a:pPr indent="0" marL="0">
+            <a:pPr marL="0" indent="0">
               <a:buNone/>
             </a:pPr>
             <a:r>
@@ -8184,7 +7952,7 @@
             <a:prstDash val="solid"/>
           </a:ln>
           <a:effectLst>
-            <a:outerShdw sx="100000" sy="100000" kx="0" ky="0" algn="bl" rotWithShape="0" blurRad="63500" dist="22860" dir="8100000">
+            <a:outerShdw blurRad="63500" dist="22860" dir="8100000" algn="bl" rotWithShape="0">
               <a:srgbClr val="000000">
                 <a:alpha val="12000"/>
               </a:srgbClr>
@@ -8213,7 +7981,7 @@
           <a:bodyPr wrap="square" lIns="0" tIns="0" rIns="0" bIns="0" rtlCol="0" anchor="ctr"/>
           <a:lstStyle/>
           <a:p>
-            <a:pPr indent="0" marL="0">
+            <a:pPr marL="0" indent="0">
               <a:buNone/>
             </a:pPr>
             <a:r>
@@ -8252,7 +8020,7 @@
           <a:bodyPr wrap="square" lIns="0" tIns="0" rIns="0" bIns="0" rtlCol="0" anchor="ctr"/>
           <a:lstStyle/>
           <a:p>
-            <a:pPr indent="0" marL="0">
+            <a:pPr marL="0" indent="0">
               <a:buNone/>
             </a:pPr>
             <a:r>
@@ -8291,7 +8059,7 @@
           <a:bodyPr wrap="square" lIns="0" tIns="0" rIns="0" bIns="0" rtlCol="0" anchor="ctr"/>
           <a:lstStyle/>
           <a:p>
-            <a:pPr indent="0" marL="0">
+            <a:pPr marL="0" indent="0">
               <a:buNone/>
             </a:pPr>
             <a:r>
@@ -8336,7 +8104,7 @@
       </p:sp>
       <p:pic>
         <p:nvPicPr>
-          <p:cNvPr id="26" name="Image 2" descr="preencoded.png">    </p:cNvPr>
+          <p:cNvPr id="26" name="Image 2" descr="preencoded.png"/>
           <p:cNvPicPr>
             <a:picLocks noChangeAspect="1"/>
           </p:cNvPicPr>
@@ -8382,7 +8150,7 @@
             <a:prstDash val="solid"/>
           </a:ln>
           <a:effectLst>
-            <a:outerShdw sx="100000" sy="100000" kx="0" ky="0" algn="bl" rotWithShape="0" blurRad="63500" dist="22860" dir="8100000">
+            <a:outerShdw blurRad="63500" dist="22860" dir="8100000" algn="bl" rotWithShape="0">
               <a:srgbClr val="000000">
                 <a:alpha val="12000"/>
               </a:srgbClr>
@@ -8411,7 +8179,7 @@
           <a:bodyPr wrap="square" lIns="0" tIns="0" rIns="0" bIns="0" rtlCol="0" anchor="ctr"/>
           <a:lstStyle/>
           <a:p>
-            <a:pPr indent="0" marL="0">
+            <a:pPr marL="0" indent="0">
               <a:buNone/>
             </a:pPr>
             <a:r>
@@ -8450,7 +8218,7 @@
           <a:bodyPr wrap="square" lIns="0" tIns="0" rIns="0" bIns="0" rtlCol="0" anchor="ctr"/>
           <a:lstStyle/>
           <a:p>
-            <a:pPr indent="0" marL="0">
+            <a:pPr marL="0" indent="0">
               <a:buNone/>
             </a:pPr>
             <a:r>
@@ -8489,7 +8257,7 @@
           <a:bodyPr wrap="square" lIns="0" tIns="0" rIns="0" bIns="0" rtlCol="0" anchor="ctr"/>
           <a:lstStyle/>
           <a:p>
-            <a:pPr indent="0" marL="0">
+            <a:pPr marL="0" indent="0">
               <a:buNone/>
             </a:pPr>
             <a:r>
@@ -8534,14 +8302,14 @@
       </p:sp>
       <p:pic>
         <p:nvPicPr>
-          <p:cNvPr id="32" name="Image 3" descr="preencoded.png">    </p:cNvPr>
+          <p:cNvPr id="32" name="Image 3" descr="preencoded.png"/>
           <p:cNvPicPr>
             <a:picLocks noChangeAspect="1"/>
           </p:cNvPicPr>
           <p:nvPr/>
         </p:nvPicPr>
         <p:blipFill>
-          <a:blip r:embed="rId4"/>
+          <a:blip r:embed="rId3"/>
           <a:stretch>
             <a:fillRect/>
           </a:stretch>
@@ -8580,7 +8348,7 @@
             <a:prstDash val="solid"/>
           </a:ln>
           <a:effectLst>
-            <a:outerShdw sx="100000" sy="100000" kx="0" ky="0" algn="bl" rotWithShape="0" blurRad="63500" dist="22860" dir="8100000">
+            <a:outerShdw blurRad="63500" dist="22860" dir="8100000" algn="bl" rotWithShape="0">
               <a:srgbClr val="000000">
                 <a:alpha val="12000"/>
               </a:srgbClr>
@@ -8609,7 +8377,7 @@
           <a:bodyPr wrap="square" lIns="0" tIns="0" rIns="0" bIns="0" rtlCol="0" anchor="ctr"/>
           <a:lstStyle/>
           <a:p>
-            <a:pPr indent="0" marL="0">
+            <a:pPr marL="0" indent="0">
               <a:buNone/>
             </a:pPr>
             <a:r>
@@ -8648,7 +8416,7 @@
           <a:bodyPr wrap="square" lIns="0" tIns="0" rIns="0" bIns="0" rtlCol="0" anchor="ctr"/>
           <a:lstStyle/>
           <a:p>
-            <a:pPr indent="0" marL="0">
+            <a:pPr marL="0" indent="0">
               <a:buNone/>
             </a:pPr>
             <a:r>
@@ -8687,7 +8455,7 @@
           <a:bodyPr wrap="square" lIns="0" tIns="0" rIns="0" bIns="0" rtlCol="0" anchor="ctr"/>
           <a:lstStyle/>
           <a:p>
-            <a:pPr indent="0" marL="0">
+            <a:pPr marL="0" indent="0">
               <a:buNone/>
             </a:pPr>
             <a:r>
@@ -8726,7 +8494,7 @@
           <a:bodyPr wrap="square" lIns="0" tIns="0" rIns="0" bIns="0" rtlCol="0" anchor="ctr"/>
           <a:lstStyle/>
           <a:p>
-            <a:pPr indent="0" marL="0">
+            <a:pPr marL="0" indent="0">
               <a:buNone/>
             </a:pPr>
             <a:r>
@@ -8765,7 +8533,7 @@
           <a:bodyPr wrap="square" lIns="0" tIns="0" rIns="0" bIns="0" rtlCol="0" anchor="ctr"/>
           <a:lstStyle/>
           <a:p>
-            <a:pPr indent="0" marL="0">
+            <a:pPr marL="0" indent="0">
               <a:buNone/>
             </a:pPr>
             <a:r>
@@ -8804,7 +8572,7 @@
           <a:bodyPr wrap="square" lIns="0" tIns="0" rIns="0" bIns="0" rtlCol="0" anchor="ctr"/>
           <a:lstStyle/>
           <a:p>
-            <a:pPr algn="r" indent="0" marL="0">
+            <a:pPr marL="0" indent="0" algn="r">
               <a:buNone/>
             </a:pPr>
             <a:r>
@@ -8838,6 +8606,7 @@
         <a:solidFill>
           <a:srgbClr val="F8FAFC"/>
         </a:solidFill>
+        <a:effectLst/>
       </p:bgPr>
     </p:bg>
     <p:spTree>
@@ -8900,11 +8669,11 @@
           <a:bodyPr wrap="square" lIns="0" tIns="0" rIns="0" bIns="0" rtlCol="0" anchor="ctr"/>
           <a:lstStyle/>
           <a:p>
-            <a:pPr indent="0" marL="0">
-              <a:buNone/>
-            </a:pPr>
-            <a:r>
-              <a:rPr lang="en-US" sz="1100" b="1" spc="200" kern="0" dirty="0">
+            <a:pPr marL="0" indent="0">
+              <a:buNone/>
+            </a:pPr>
+            <a:r>
+              <a:rPr lang="en-US" sz="1100" b="1" kern="0" spc="200" dirty="0">
                 <a:solidFill>
                   <a:srgbClr val="2563EB"/>
                 </a:solidFill>
@@ -8939,7 +8708,7 @@
           <a:bodyPr wrap="square" lIns="0" tIns="0" rIns="0" bIns="0" rtlCol="0" anchor="ctr"/>
           <a:lstStyle/>
           <a:p>
-            <a:pPr indent="0" marL="0">
+            <a:pPr marL="0" indent="0">
               <a:buNone/>
             </a:pPr>
             <a:r>
@@ -8981,7 +8750,7 @@
             <a:prstDash val="solid"/>
           </a:ln>
           <a:effectLst>
-            <a:outerShdw sx="100000" sy="100000" kx="0" ky="0" algn="bl" rotWithShape="0" blurRad="63500" dist="22860" dir="8100000">
+            <a:outerShdw blurRad="63500" dist="22860" dir="8100000" algn="bl" rotWithShape="0">
               <a:srgbClr val="000000">
                 <a:alpha val="12000"/>
               </a:srgbClr>
@@ -9016,14 +8785,14 @@
       </p:sp>
       <p:pic>
         <p:nvPicPr>
-          <p:cNvPr id="7" name="Image 0" descr="preencoded.png">    </p:cNvPr>
+          <p:cNvPr id="7" name="Image 0" descr="preencoded.png"/>
           <p:cNvPicPr>
             <a:picLocks noChangeAspect="1"/>
           </p:cNvPicPr>
           <p:nvPr/>
         </p:nvPicPr>
         <p:blipFill>
-          <a:blip r:embed="rId1"/>
+          <a:blip r:embed="rId3"/>
           <a:stretch>
             <a:fillRect/>
           </a:stretch>
@@ -9059,7 +8828,7 @@
           <a:bodyPr wrap="square" lIns="0" tIns="0" rIns="0" bIns="0" rtlCol="0" anchor="ctr"/>
           <a:lstStyle/>
           <a:p>
-            <a:pPr indent="0" marL="0">
+            <a:pPr marL="0" indent="0">
               <a:buNone/>
             </a:pPr>
             <a:r>
@@ -9073,9 +8842,6 @@
               </a:rPr>
               <a:t>HAP / 容器层级  </a:t>
             </a:r>
-            <a:pPr indent="0" marL="0">
-              <a:buNone/>
-            </a:pPr>
             <a:r>
               <a:rPr lang="en-US" sz="950" dirty="0">
                 <a:solidFill>
@@ -9115,7 +8881,7 @@
             <a:prstDash val="solid"/>
           </a:ln>
           <a:effectLst>
-            <a:outerShdw sx="100000" sy="100000" kx="0" ky="0" algn="bl" rotWithShape="0" blurRad="63500" dist="22860" dir="8100000">
+            <a:outerShdw blurRad="63500" dist="22860" dir="8100000" algn="bl" rotWithShape="0">
               <a:srgbClr val="000000">
                 <a:alpha val="12000"/>
               </a:srgbClr>
@@ -9150,14 +8916,14 @@
       </p:sp>
       <p:pic>
         <p:nvPicPr>
-          <p:cNvPr id="11" name="Image 1" descr="preencoded.png">    </p:cNvPr>
+          <p:cNvPr id="11" name="Image 1" descr="preencoded.png"/>
           <p:cNvPicPr>
             <a:picLocks noChangeAspect="1"/>
           </p:cNvPicPr>
           <p:nvPr/>
         </p:nvPicPr>
         <p:blipFill>
-          <a:blip r:embed="rId2"/>
+          <a:blip r:embed="rId3"/>
           <a:stretch>
             <a:fillRect/>
           </a:stretch>
@@ -9193,7 +8959,7 @@
           <a:bodyPr wrap="square" lIns="0" tIns="0" rIns="0" bIns="0" rtlCol="0" anchor="ctr"/>
           <a:lstStyle/>
           <a:p>
-            <a:pPr indent="0" marL="0">
+            <a:pPr marL="0" indent="0">
               <a:buNone/>
             </a:pPr>
             <a:r>
@@ -9207,9 +8973,6 @@
               </a:rPr>
               <a:t>UIAbility / singleton  </a:t>
             </a:r>
-            <a:pPr indent="0" marL="0">
-              <a:buNone/>
-            </a:pPr>
             <a:r>
               <a:rPr lang="en-US" sz="950" dirty="0">
                 <a:solidFill>
@@ -9249,7 +9012,7 @@
             <a:prstDash val="solid"/>
           </a:ln>
           <a:effectLst>
-            <a:outerShdw sx="100000" sy="100000" kx="0" ky="0" algn="bl" rotWithShape="0" blurRad="63500" dist="22860" dir="8100000">
+            <a:outerShdw blurRad="63500" dist="22860" dir="8100000" algn="bl" rotWithShape="0">
               <a:srgbClr val="000000">
                 <a:alpha val="12000"/>
               </a:srgbClr>
@@ -9284,7 +9047,7 @@
       </p:sp>
       <p:pic>
         <p:nvPicPr>
-          <p:cNvPr id="15" name="Image 2" descr="preencoded.png">    </p:cNvPr>
+          <p:cNvPr id="15" name="Image 2" descr="preencoded.png"/>
           <p:cNvPicPr>
             <a:picLocks noChangeAspect="1"/>
           </p:cNvPicPr>
@@ -9327,7 +9090,7 @@
           <a:bodyPr wrap="square" lIns="0" tIns="0" rIns="0" bIns="0" rtlCol="0" anchor="ctr"/>
           <a:lstStyle/>
           <a:p>
-            <a:pPr indent="0" marL="0">
+            <a:pPr marL="0" indent="0">
               <a:buNone/>
             </a:pPr>
             <a:r>
@@ -9341,9 +9104,6 @@
               </a:rPr>
               <a:t>Navigation + NavPathStack  </a:t>
             </a:r>
-            <a:pPr indent="0" marL="0">
-              <a:buNone/>
-            </a:pPr>
             <a:r>
               <a:rPr lang="en-US" sz="950" dirty="0">
                 <a:solidFill>
@@ -9383,7 +9143,7 @@
             <a:prstDash val="solid"/>
           </a:ln>
           <a:effectLst>
-            <a:outerShdw sx="100000" sy="100000" kx="0" ky="0" algn="bl" rotWithShape="0" blurRad="63500" dist="22860" dir="8100000">
+            <a:outerShdw blurRad="63500" dist="22860" dir="8100000" algn="bl" rotWithShape="0">
               <a:srgbClr val="000000">
                 <a:alpha val="12000"/>
               </a:srgbClr>
@@ -9418,14 +9178,14 @@
       </p:sp>
       <p:pic>
         <p:nvPicPr>
-          <p:cNvPr id="19" name="Image 3" descr="preencoded.png">    </p:cNvPr>
+          <p:cNvPr id="19" name="Image 3" descr="preencoded.png"/>
           <p:cNvPicPr>
             <a:picLocks noChangeAspect="1"/>
           </p:cNvPicPr>
           <p:nvPr/>
         </p:nvPicPr>
         <p:blipFill>
-          <a:blip r:embed="rId4"/>
+          <a:blip r:embed="rId3"/>
           <a:stretch>
             <a:fillRect/>
           </a:stretch>
@@ -9461,7 +9221,7 @@
           <a:bodyPr wrap="square" lIns="0" tIns="0" rIns="0" bIns="0" rtlCol="0" anchor="ctr"/>
           <a:lstStyle/>
           <a:p>
-            <a:pPr indent="0" marL="0">
+            <a:pPr marL="0" indent="0">
               <a:buNone/>
             </a:pPr>
             <a:r>
@@ -9475,9 +9235,6 @@
               </a:rPr>
               <a:t>http · POST 非幂等  </a:t>
             </a:r>
-            <a:pPr indent="0" marL="0">
-              <a:buNone/>
-            </a:pPr>
             <a:r>
               <a:rPr lang="en-US" sz="950" dirty="0">
                 <a:solidFill>
@@ -9517,7 +9274,7 @@
             <a:prstDash val="solid"/>
           </a:ln>
           <a:effectLst>
-            <a:outerShdw sx="100000" sy="100000" kx="0" ky="0" algn="bl" rotWithShape="0" blurRad="63500" dist="22860" dir="8100000">
+            <a:outerShdw blurRad="63500" dist="22860" dir="8100000" algn="bl" rotWithShape="0">
               <a:srgbClr val="000000">
                 <a:alpha val="12000"/>
               </a:srgbClr>
@@ -9552,14 +9309,14 @@
       </p:sp>
       <p:pic>
         <p:nvPicPr>
-          <p:cNvPr id="23" name="Image 4" descr="preencoded.png">    </p:cNvPr>
+          <p:cNvPr id="23" name="Image 4" descr="preencoded.png"/>
           <p:cNvPicPr>
             <a:picLocks noChangeAspect="1"/>
           </p:cNvPicPr>
           <p:nvPr/>
         </p:nvPicPr>
         <p:blipFill>
-          <a:blip r:embed="rId5"/>
+          <a:blip r:embed="rId3"/>
           <a:stretch>
             <a:fillRect/>
           </a:stretch>
@@ -9595,7 +9352,7 @@
           <a:bodyPr wrap="square" lIns="0" tIns="0" rIns="0" bIns="0" rtlCol="0" anchor="ctr"/>
           <a:lstStyle/>
           <a:p>
-            <a:pPr indent="0" marL="0">
+            <a:pPr marL="0" indent="0">
               <a:buNone/>
             </a:pPr>
             <a:r>
@@ -9609,9 +9366,6 @@
               </a:rPr>
               <a:t>RDB 三大组件  </a:t>
             </a:r>
-            <a:pPr indent="0" marL="0">
-              <a:buNone/>
-            </a:pPr>
             <a:r>
               <a:rPr lang="en-US" sz="950" dirty="0">
                 <a:solidFill>
@@ -9651,7 +9405,7 @@
             <a:prstDash val="solid"/>
           </a:ln>
           <a:effectLst>
-            <a:outerShdw sx="100000" sy="100000" kx="0" ky="0" algn="bl" rotWithShape="0" blurRad="63500" dist="22860" dir="8100000">
+            <a:outerShdw blurRad="63500" dist="22860" dir="8100000" algn="bl" rotWithShape="0">
               <a:srgbClr val="000000">
                 <a:alpha val="12000"/>
               </a:srgbClr>
@@ -9686,14 +9440,14 @@
       </p:sp>
       <p:pic>
         <p:nvPicPr>
-          <p:cNvPr id="27" name="Image 5" descr="preencoded.png">    </p:cNvPr>
+          <p:cNvPr id="27" name="Image 5" descr="preencoded.png"/>
           <p:cNvPicPr>
             <a:picLocks noChangeAspect="1"/>
           </p:cNvPicPr>
           <p:nvPr/>
         </p:nvPicPr>
         <p:blipFill>
-          <a:blip r:embed="rId6"/>
+          <a:blip r:embed="rId3"/>
           <a:stretch>
             <a:fillRect/>
           </a:stretch>
@@ -9729,7 +9483,7 @@
           <a:bodyPr wrap="square" lIns="0" tIns="0" rIns="0" bIns="0" rtlCol="0" anchor="ctr"/>
           <a:lstStyle/>
           <a:p>
-            <a:pPr indent="0" marL="0">
+            <a:pPr marL="0" indent="0">
               <a:buNone/>
             </a:pPr>
             <a:r>
@@ -9743,9 +9497,6 @@
               </a:rPr>
               <a:t>Preferences KV  </a:t>
             </a:r>
-            <a:pPr indent="0" marL="0">
-              <a:buNone/>
-            </a:pPr>
             <a:r>
               <a:rPr lang="en-US" sz="950" dirty="0">
                 <a:solidFill>
@@ -9785,7 +9536,7 @@
             <a:prstDash val="solid"/>
           </a:ln>
           <a:effectLst>
-            <a:outerShdw sx="100000" sy="100000" kx="0" ky="0" algn="bl" rotWithShape="0" blurRad="63500" dist="22860" dir="8100000">
+            <a:outerShdw blurRad="63500" dist="22860" dir="8100000" algn="bl" rotWithShape="0">
               <a:srgbClr val="000000">
                 <a:alpha val="12000"/>
               </a:srgbClr>
@@ -9820,14 +9571,14 @@
       </p:sp>
       <p:pic>
         <p:nvPicPr>
-          <p:cNvPr id="31" name="Image 6" descr="preencoded.png">    </p:cNvPr>
+          <p:cNvPr id="31" name="Image 6" descr="preencoded.png"/>
           <p:cNvPicPr>
             <a:picLocks noChangeAspect="1"/>
           </p:cNvPicPr>
           <p:nvPr/>
         </p:nvPicPr>
         <p:blipFill>
-          <a:blip r:embed="rId7"/>
+          <a:blip r:embed="rId3"/>
           <a:stretch>
             <a:fillRect/>
           </a:stretch>
@@ -9863,7 +9614,7 @@
           <a:bodyPr wrap="square" lIns="0" tIns="0" rIns="0" bIns="0" rtlCol="0" anchor="ctr"/>
           <a:lstStyle/>
           <a:p>
-            <a:pPr indent="0" marL="0">
+            <a:pPr marL="0" indent="0">
               <a:buNone/>
             </a:pPr>
             <a:r>
@@ -9877,9 +9628,6 @@
               </a:rPr>
               <a:t>TaskPool @Concurrent  </a:t>
             </a:r>
-            <a:pPr indent="0" marL="0">
-              <a:buNone/>
-            </a:pPr>
             <a:r>
               <a:rPr lang="en-US" sz="950" dirty="0">
                 <a:solidFill>
@@ -9919,7 +9667,7 @@
             <a:prstDash val="solid"/>
           </a:ln>
           <a:effectLst>
-            <a:outerShdw sx="100000" sy="100000" kx="0" ky="0" algn="bl" rotWithShape="0" blurRad="63500" dist="22860" dir="8100000">
+            <a:outerShdw blurRad="63500" dist="22860" dir="8100000" algn="bl" rotWithShape="0">
               <a:srgbClr val="000000">
                 <a:alpha val="12000"/>
               </a:srgbClr>
@@ -9954,14 +9702,14 @@
       </p:sp>
       <p:pic>
         <p:nvPicPr>
-          <p:cNvPr id="35" name="Image 7" descr="preencoded.png">    </p:cNvPr>
+          <p:cNvPr id="35" name="Image 7" descr="preencoded.png"/>
           <p:cNvPicPr>
             <a:picLocks noChangeAspect="1"/>
           </p:cNvPicPr>
           <p:nvPr/>
         </p:nvPicPr>
         <p:blipFill>
-          <a:blip r:embed="rId8"/>
+          <a:blip r:embed="rId3"/>
           <a:stretch>
             <a:fillRect/>
           </a:stretch>
@@ -9997,7 +9745,7 @@
           <a:bodyPr wrap="square" lIns="0" tIns="0" rIns="0" bIns="0" rtlCol="0" anchor="ctr"/>
           <a:lstStyle/>
           <a:p>
-            <a:pPr indent="0" marL="0">
+            <a:pPr marL="0" indent="0">
               <a:buNone/>
             </a:pPr>
             <a:r>
@@ -10011,9 +9759,6 @@
               </a:rPr>
               <a:t>ArkWeb 混合开发  </a:t>
             </a:r>
-            <a:pPr indent="0" marL="0">
-              <a:buNone/>
-            </a:pPr>
             <a:r>
               <a:rPr lang="en-US" sz="950" dirty="0">
                 <a:solidFill>
@@ -10053,7 +9798,7 @@
             <a:prstDash val="solid"/>
           </a:ln>
           <a:effectLst>
-            <a:outerShdw sx="100000" sy="100000" kx="0" ky="0" algn="bl" rotWithShape="0" blurRad="63500" dist="22860" dir="8100000">
+            <a:outerShdw blurRad="63500" dist="22860" dir="8100000" algn="bl" rotWithShape="0">
               <a:srgbClr val="000000">
                 <a:alpha val="12000"/>
               </a:srgbClr>
@@ -10088,14 +9833,14 @@
       </p:sp>
       <p:pic>
         <p:nvPicPr>
-          <p:cNvPr id="39" name="Image 8" descr="preencoded.png">    </p:cNvPr>
+          <p:cNvPr id="39" name="Image 8" descr="preencoded.png"/>
           <p:cNvPicPr>
             <a:picLocks noChangeAspect="1"/>
           </p:cNvPicPr>
           <p:nvPr/>
         </p:nvPicPr>
         <p:blipFill>
-          <a:blip r:embed="rId9"/>
+          <a:blip r:embed="rId3"/>
           <a:stretch>
             <a:fillRect/>
           </a:stretch>
@@ -10131,7 +9876,7 @@
           <a:bodyPr wrap="square" lIns="0" tIns="0" rIns="0" bIns="0" rtlCol="0" anchor="ctr"/>
           <a:lstStyle/>
           <a:p>
-            <a:pPr indent="0" marL="0">
+            <a:pPr marL="0" indent="0">
               <a:buNone/>
             </a:pPr>
             <a:r>
@@ -10145,9 +9890,6 @@
               </a:rPr>
               <a:t>Spring Boot + MyBatis + Maven  </a:t>
             </a:r>
-            <a:pPr indent="0" marL="0">
-              <a:buNone/>
-            </a:pPr>
             <a:r>
               <a:rPr lang="en-US" sz="950" dirty="0">
                 <a:solidFill>
@@ -10187,7 +9929,7 @@
             <a:prstDash val="solid"/>
           </a:ln>
           <a:effectLst>
-            <a:outerShdw sx="100000" sy="100000" kx="0" ky="0" algn="bl" rotWithShape="0" blurRad="63500" dist="22860" dir="8100000">
+            <a:outerShdw blurRad="63500" dist="22860" dir="8100000" algn="bl" rotWithShape="0">
               <a:srgbClr val="000000">
                 <a:alpha val="12000"/>
               </a:srgbClr>
@@ -10222,14 +9964,14 @@
       </p:sp>
       <p:pic>
         <p:nvPicPr>
-          <p:cNvPr id="43" name="Image 9" descr="preencoded.png">    </p:cNvPr>
+          <p:cNvPr id="43" name="Image 9" descr="preencoded.png"/>
           <p:cNvPicPr>
             <a:picLocks noChangeAspect="1"/>
           </p:cNvPicPr>
           <p:nvPr/>
         </p:nvPicPr>
         <p:blipFill>
-          <a:blip r:embed="rId10"/>
+          <a:blip r:embed="rId3"/>
           <a:stretch>
             <a:fillRect/>
           </a:stretch>
@@ -10265,7 +10007,7 @@
           <a:bodyPr wrap="square" lIns="0" tIns="0" rIns="0" bIns="0" rtlCol="0" anchor="ctr"/>
           <a:lstStyle/>
           <a:p>
-            <a:pPr indent="0" marL="0">
+            <a:pPr marL="0" indent="0">
               <a:buNone/>
             </a:pPr>
             <a:r>
@@ -10279,9 +10021,6 @@
               </a:rPr>
               <a:t>Lombok 构造注解  </a:t>
             </a:r>
-            <a:pPr indent="0" marL="0">
-              <a:buNone/>
-            </a:pPr>
             <a:r>
               <a:rPr lang="en-US" sz="950" dirty="0">
                 <a:solidFill>
@@ -10318,7 +10057,7 @@
           <a:bodyPr wrap="square" lIns="0" tIns="0" rIns="0" bIns="0" rtlCol="0" anchor="ctr"/>
           <a:lstStyle/>
           <a:p>
-            <a:pPr indent="0" marL="0">
+            <a:pPr marL="0" indent="0">
               <a:buNone/>
             </a:pPr>
             <a:r>
@@ -10357,7 +10096,7 @@
           <a:bodyPr wrap="square" lIns="0" tIns="0" rIns="0" bIns="0" rtlCol="0" anchor="ctr"/>
           <a:lstStyle/>
           <a:p>
-            <a:pPr algn="r" indent="0" marL="0">
+            <a:pPr marL="0" indent="0" algn="r">
               <a:buNone/>
             </a:pPr>
             <a:r>
@@ -10391,6 +10130,7 @@
         <a:solidFill>
           <a:srgbClr val="F8FAFC"/>
         </a:solidFill>
+        <a:effectLst/>
       </p:bgPr>
     </p:bg>
     <p:spTree>
@@ -10453,11 +10193,11 @@
           <a:bodyPr wrap="square" lIns="0" tIns="0" rIns="0" bIns="0" rtlCol="0" anchor="ctr"/>
           <a:lstStyle/>
           <a:p>
-            <a:pPr indent="0" marL="0">
-              <a:buNone/>
-            </a:pPr>
-            <a:r>
-              <a:rPr lang="en-US" sz="1100" b="1" spc="200" kern="0" dirty="0">
+            <a:pPr marL="0" indent="0">
+              <a:buNone/>
+            </a:pPr>
+            <a:r>
+              <a:rPr lang="en-US" sz="1100" b="1" kern="0" spc="200" dirty="0">
                 <a:solidFill>
                   <a:srgbClr val="7C3AED"/>
                 </a:solidFill>
@@ -10492,7 +10232,7 @@
           <a:bodyPr wrap="square" lIns="0" tIns="0" rIns="0" bIns="0" rtlCol="0" anchor="ctr"/>
           <a:lstStyle/>
           <a:p>
-            <a:pPr indent="0" marL="0">
+            <a:pPr marL="0" indent="0">
               <a:buNone/>
             </a:pPr>
             <a:r>
@@ -10534,7 +10274,7 @@
             <a:prstDash val="solid"/>
           </a:ln>
           <a:effectLst>
-            <a:outerShdw sx="100000" sy="100000" kx="0" ky="0" algn="bl" rotWithShape="0" blurRad="63500" dist="22860" dir="8100000">
+            <a:outerShdw blurRad="63500" dist="22860" dir="8100000" algn="bl" rotWithShape="0">
               <a:srgbClr val="000000">
                 <a:alpha val="12000"/>
               </a:srgbClr>
@@ -10569,14 +10309,14 @@
       </p:sp>
       <p:pic>
         <p:nvPicPr>
-          <p:cNvPr id="7" name="Image 0" descr="preencoded.png">    </p:cNvPr>
+          <p:cNvPr id="7" name="Image 0" descr="preencoded.png"/>
           <p:cNvPicPr>
             <a:picLocks noChangeAspect="1"/>
           </p:cNvPicPr>
           <p:nvPr/>
         </p:nvPicPr>
         <p:blipFill>
-          <a:blip r:embed="rId1"/>
+          <a:blip r:embed="rId3"/>
           <a:stretch>
             <a:fillRect/>
           </a:stretch>
@@ -10612,7 +10352,7 @@
           <a:bodyPr wrap="square" lIns="0" tIns="0" rIns="0" bIns="0" rtlCol="0" anchor="ctr"/>
           <a:lstStyle/>
           <a:p>
-            <a:pPr indent="0" marL="0">
+            <a:pPr marL="0" indent="0">
               <a:buNone/>
             </a:pPr>
             <a:r>
@@ -10781,7 +10521,7 @@
             <a:prstDash val="solid"/>
           </a:ln>
           <a:effectLst>
-            <a:outerShdw sx="100000" sy="100000" kx="0" ky="0" algn="bl" rotWithShape="0" blurRad="63500" dist="22860" dir="8100000">
+            <a:outerShdw blurRad="63500" dist="22860" dir="8100000" algn="bl" rotWithShape="0">
               <a:srgbClr val="000000">
                 <a:alpha val="12000"/>
               </a:srgbClr>
@@ -10816,14 +10556,14 @@
       </p:sp>
       <p:pic>
         <p:nvPicPr>
-          <p:cNvPr id="12" name="Image 1" descr="preencoded.png">    </p:cNvPr>
+          <p:cNvPr id="12" name="Image 1" descr="preencoded.png"/>
           <p:cNvPicPr>
             <a:picLocks noChangeAspect="1"/>
           </p:cNvPicPr>
           <p:nvPr/>
         </p:nvPicPr>
         <p:blipFill>
-          <a:blip r:embed="rId2"/>
+          <a:blip r:embed="rId4"/>
           <a:stretch>
             <a:fillRect/>
           </a:stretch>
@@ -10859,7 +10599,7 @@
           <a:bodyPr wrap="square" lIns="0" tIns="0" rIns="0" bIns="0" rtlCol="0" anchor="ctr"/>
           <a:lstStyle/>
           <a:p>
-            <a:pPr indent="0" marL="0">
+            <a:pPr marL="0" indent="0">
               <a:buNone/>
             </a:pPr>
             <a:r>
@@ -11004,7 +10744,7 @@
           <a:bodyPr wrap="square" lIns="0" tIns="0" rIns="0" bIns="0" rtlCol="0" anchor="ctr"/>
           <a:lstStyle/>
           <a:p>
-            <a:pPr indent="0" marL="0">
+            <a:pPr marL="0" indent="0">
               <a:buNone/>
             </a:pPr>
             <a:r>
@@ -11043,7 +10783,7 @@
           <a:bodyPr wrap="square" lIns="0" tIns="0" rIns="0" bIns="0" rtlCol="0" anchor="ctr"/>
           <a:lstStyle/>
           <a:p>
-            <a:pPr algn="r" indent="0" marL="0">
+            <a:pPr marL="0" indent="0" algn="r">
               <a:buNone/>
             </a:pPr>
             <a:r>
@@ -11077,6 +10817,7 @@
         <a:solidFill>
           <a:srgbClr val="0F172A"/>
         </a:solidFill>
+        <a:effectLst/>
       </p:bgPr>
     </p:bg>
     <p:spTree>
@@ -11172,7 +10913,7 @@
           <a:bodyPr wrap="square" lIns="0" tIns="0" rIns="0" bIns="0" rtlCol="0" anchor="ctr"/>
           <a:lstStyle/>
           <a:p>
-            <a:pPr algn="ctr" indent="0" marL="0">
+            <a:pPr marL="0" indent="0" algn="ctr">
               <a:buNone/>
             </a:pPr>
             <a:r>
@@ -11211,7 +10952,7 @@
           <a:bodyPr wrap="square" lIns="0" tIns="0" rIns="0" bIns="0" rtlCol="0" anchor="ctr"/>
           <a:lstStyle/>
           <a:p>
-            <a:pPr algn="ctr" indent="0" marL="0">
+            <a:pPr marL="0" indent="0" algn="ctr">
               <a:buNone/>
             </a:pPr>
             <a:r>
@@ -11250,7 +10991,7 @@
           <a:bodyPr wrap="square" lIns="0" tIns="0" rIns="0" bIns="0" rtlCol="0" anchor="ctr"/>
           <a:lstStyle/>
           <a:p>
-            <a:pPr algn="ctr" indent="0" marL="0">
+            <a:pPr marL="0" indent="0" algn="ctr">
               <a:buNone/>
             </a:pPr>
             <a:r>
@@ -11284,6 +11025,7 @@
         <a:solidFill>
           <a:srgbClr val="F8FAFC"/>
         </a:solidFill>
+        <a:effectLst/>
       </p:bgPr>
     </p:bg>
     <p:spTree>
@@ -11346,11 +11088,11 @@
           <a:bodyPr wrap="square" lIns="0" tIns="0" rIns="0" bIns="0" rtlCol="0" anchor="ctr"/>
           <a:lstStyle/>
           <a:p>
-            <a:pPr indent="0" marL="0">
-              <a:buNone/>
-            </a:pPr>
-            <a:r>
-              <a:rPr lang="en-US" sz="1100" b="1" spc="200" kern="0" dirty="0">
+            <a:pPr marL="0" indent="0">
+              <a:buNone/>
+            </a:pPr>
+            <a:r>
+              <a:rPr lang="en-US" sz="1100" b="1" kern="0" spc="200" dirty="0">
                 <a:solidFill>
                   <a:srgbClr val="2563EB"/>
                 </a:solidFill>
@@ -11385,7 +11127,7 @@
           <a:bodyPr wrap="square" lIns="0" tIns="0" rIns="0" bIns="0" rtlCol="0" anchor="ctr"/>
           <a:lstStyle/>
           <a:p>
-            <a:pPr indent="0" marL="0">
+            <a:pPr marL="0" indent="0">
               <a:buNone/>
             </a:pPr>
             <a:r>
@@ -11427,7 +11169,7 @@
             <a:prstDash val="solid"/>
           </a:ln>
           <a:effectLst>
-            <a:outerShdw sx="100000" sy="100000" kx="0" ky="0" algn="bl" rotWithShape="0" blurRad="63500" dist="22860" dir="8100000">
+            <a:outerShdw blurRad="63500" dist="22860" dir="8100000" algn="bl" rotWithShape="0">
               <a:srgbClr val="000000">
                 <a:alpha val="12000"/>
               </a:srgbClr>
@@ -11456,7 +11198,7 @@
           <a:bodyPr wrap="square" lIns="0" tIns="0" rIns="0" bIns="0" rtlCol="0" anchor="ctr"/>
           <a:lstStyle/>
           <a:p>
-            <a:pPr indent="0" marL="0">
+            <a:pPr marL="0" indent="0">
               <a:buNone/>
             </a:pPr>
             <a:r>
@@ -11501,14 +11243,14 @@
       </p:sp>
       <p:pic>
         <p:nvPicPr>
-          <p:cNvPr id="8" name="Image 0" descr="preencoded.png">    </p:cNvPr>
+          <p:cNvPr id="8" name="Image 0" descr="preencoded.png"/>
           <p:cNvPicPr>
             <a:picLocks noChangeAspect="1"/>
           </p:cNvPicPr>
           <p:nvPr/>
         </p:nvPicPr>
         <p:blipFill>
-          <a:blip r:embed="rId1"/>
+          <a:blip r:embed="rId3"/>
           <a:stretch>
             <a:fillRect/>
           </a:stretch>
@@ -11544,7 +11286,7 @@
           <a:bodyPr wrap="square" lIns="0" tIns="0" rIns="0" bIns="0" rtlCol="0" anchor="ctr"/>
           <a:lstStyle/>
           <a:p>
-            <a:pPr indent="0" marL="0">
+            <a:pPr marL="0" indent="0">
               <a:buNone/>
             </a:pPr>
             <a:r>
@@ -11586,7 +11328,7 @@
             <a:prstDash val="solid"/>
           </a:ln>
           <a:effectLst>
-            <a:outerShdw sx="100000" sy="100000" kx="0" ky="0" algn="bl" rotWithShape="0" blurRad="63500" dist="22860" dir="8100000">
+            <a:outerShdw blurRad="63500" dist="22860" dir="8100000" algn="bl" rotWithShape="0">
               <a:srgbClr val="000000">
                 <a:alpha val="12000"/>
               </a:srgbClr>
@@ -11615,7 +11357,7 @@
           <a:bodyPr wrap="square" lIns="0" tIns="0" rIns="0" bIns="0" rtlCol="0" anchor="ctr"/>
           <a:lstStyle/>
           <a:p>
-            <a:pPr indent="0" marL="0">
+            <a:pPr marL="0" indent="0">
               <a:buNone/>
             </a:pPr>
             <a:r>
@@ -11660,14 +11402,14 @@
       </p:sp>
       <p:pic>
         <p:nvPicPr>
-          <p:cNvPr id="13" name="Image 1" descr="preencoded.png">    </p:cNvPr>
+          <p:cNvPr id="13" name="Image 1" descr="preencoded.png"/>
           <p:cNvPicPr>
             <a:picLocks noChangeAspect="1"/>
           </p:cNvPicPr>
           <p:nvPr/>
         </p:nvPicPr>
         <p:blipFill>
-          <a:blip r:embed="rId2"/>
+          <a:blip r:embed="rId4"/>
           <a:stretch>
             <a:fillRect/>
           </a:stretch>
@@ -11703,7 +11445,7 @@
           <a:bodyPr wrap="square" lIns="0" tIns="0" rIns="0" bIns="0" rtlCol="0" anchor="ctr"/>
           <a:lstStyle/>
           <a:p>
-            <a:pPr indent="0" marL="0">
+            <a:pPr marL="0" indent="0">
               <a:buNone/>
             </a:pPr>
             <a:r>
@@ -11745,7 +11487,7 @@
             <a:prstDash val="solid"/>
           </a:ln>
           <a:effectLst>
-            <a:outerShdw sx="100000" sy="100000" kx="0" ky="0" algn="bl" rotWithShape="0" blurRad="63500" dist="22860" dir="8100000">
+            <a:outerShdw blurRad="63500" dist="22860" dir="8100000" algn="bl" rotWithShape="0">
               <a:srgbClr val="000000">
                 <a:alpha val="12000"/>
               </a:srgbClr>
@@ -11774,7 +11516,7 @@
           <a:bodyPr wrap="square" lIns="0" tIns="0" rIns="0" bIns="0" rtlCol="0" anchor="ctr"/>
           <a:lstStyle/>
           <a:p>
-            <a:pPr indent="0" marL="0">
+            <a:pPr marL="0" indent="0">
               <a:buNone/>
             </a:pPr>
             <a:r>
@@ -11819,14 +11561,14 @@
       </p:sp>
       <p:pic>
         <p:nvPicPr>
-          <p:cNvPr id="18" name="Image 2" descr="preencoded.png">    </p:cNvPr>
+          <p:cNvPr id="18" name="Image 2" descr="preencoded.png"/>
           <p:cNvPicPr>
             <a:picLocks noChangeAspect="1"/>
           </p:cNvPicPr>
           <p:nvPr/>
         </p:nvPicPr>
         <p:blipFill>
-          <a:blip r:embed="rId3"/>
+          <a:blip r:embed="rId5"/>
           <a:stretch>
             <a:fillRect/>
           </a:stretch>
@@ -11862,7 +11604,7 @@
           <a:bodyPr wrap="square" lIns="0" tIns="0" rIns="0" bIns="0" rtlCol="0" anchor="ctr"/>
           <a:lstStyle/>
           <a:p>
-            <a:pPr indent="0" marL="0">
+            <a:pPr marL="0" indent="0">
               <a:buNone/>
             </a:pPr>
             <a:r>
@@ -11904,7 +11646,7 @@
             <a:prstDash val="solid"/>
           </a:ln>
           <a:effectLst>
-            <a:outerShdw sx="100000" sy="100000" kx="0" ky="0" algn="bl" rotWithShape="0" blurRad="63500" dist="22860" dir="8100000">
+            <a:outerShdw blurRad="63500" dist="22860" dir="8100000" algn="bl" rotWithShape="0">
               <a:srgbClr val="000000">
                 <a:alpha val="12000"/>
               </a:srgbClr>
@@ -11933,7 +11675,7 @@
           <a:bodyPr wrap="square" lIns="0" tIns="0" rIns="0" bIns="0" rtlCol="0" anchor="ctr"/>
           <a:lstStyle/>
           <a:p>
-            <a:pPr indent="0" marL="0">
+            <a:pPr marL="0" indent="0">
               <a:buNone/>
             </a:pPr>
             <a:r>
@@ -11978,14 +11720,14 @@
       </p:sp>
       <p:pic>
         <p:nvPicPr>
-          <p:cNvPr id="23" name="Image 3" descr="preencoded.png">    </p:cNvPr>
+          <p:cNvPr id="23" name="Image 3" descr="preencoded.png"/>
           <p:cNvPicPr>
             <a:picLocks noChangeAspect="1"/>
           </p:cNvPicPr>
           <p:nvPr/>
         </p:nvPicPr>
         <p:blipFill>
-          <a:blip r:embed="rId4"/>
+          <a:blip r:embed="rId6"/>
           <a:stretch>
             <a:fillRect/>
           </a:stretch>
@@ -12021,7 +11763,7 @@
           <a:bodyPr wrap="square" lIns="0" tIns="0" rIns="0" bIns="0" rtlCol="0" anchor="ctr"/>
           <a:lstStyle/>
           <a:p>
-            <a:pPr indent="0" marL="0">
+            <a:pPr marL="0" indent="0">
               <a:buNone/>
             </a:pPr>
             <a:r>
@@ -12063,7 +11805,7 @@
             <a:prstDash val="solid"/>
           </a:ln>
           <a:effectLst>
-            <a:outerShdw sx="100000" sy="100000" kx="0" ky="0" algn="bl" rotWithShape="0" blurRad="63500" dist="22860" dir="8100000">
+            <a:outerShdw blurRad="63500" dist="22860" dir="8100000" algn="bl" rotWithShape="0">
               <a:srgbClr val="000000">
                 <a:alpha val="12000"/>
               </a:srgbClr>
@@ -12092,7 +11834,7 @@
           <a:bodyPr wrap="square" lIns="0" tIns="0" rIns="0" bIns="0" rtlCol="0" anchor="ctr"/>
           <a:lstStyle/>
           <a:p>
-            <a:pPr indent="0" marL="0">
+            <a:pPr marL="0" indent="0">
               <a:buNone/>
             </a:pPr>
             <a:r>
@@ -12137,14 +11879,14 @@
       </p:sp>
       <p:pic>
         <p:nvPicPr>
-          <p:cNvPr id="28" name="Image 4" descr="preencoded.png">    </p:cNvPr>
+          <p:cNvPr id="28" name="Image 4" descr="preencoded.png"/>
           <p:cNvPicPr>
             <a:picLocks noChangeAspect="1"/>
           </p:cNvPicPr>
           <p:nvPr/>
         </p:nvPicPr>
         <p:blipFill>
-          <a:blip r:embed="rId5"/>
+          <a:blip r:embed="rId7"/>
           <a:stretch>
             <a:fillRect/>
           </a:stretch>
@@ -12180,7 +11922,7 @@
           <a:bodyPr wrap="square" lIns="0" tIns="0" rIns="0" bIns="0" rtlCol="0" anchor="ctr"/>
           <a:lstStyle/>
           <a:p>
-            <a:pPr indent="0" marL="0">
+            <a:pPr marL="0" indent="0">
               <a:buNone/>
             </a:pPr>
             <a:r>
@@ -12222,7 +11964,7 @@
             <a:prstDash val="solid"/>
           </a:ln>
           <a:effectLst>
-            <a:outerShdw sx="100000" sy="100000" kx="0" ky="0" algn="bl" rotWithShape="0" blurRad="63500" dist="22860" dir="8100000">
+            <a:outerShdw blurRad="63500" dist="22860" dir="8100000" algn="bl" rotWithShape="0">
               <a:srgbClr val="000000">
                 <a:alpha val="12000"/>
               </a:srgbClr>
@@ -12251,7 +11993,7 @@
           <a:bodyPr wrap="square" lIns="0" tIns="0" rIns="0" bIns="0" rtlCol="0" anchor="ctr"/>
           <a:lstStyle/>
           <a:p>
-            <a:pPr indent="0" marL="0">
+            <a:pPr marL="0" indent="0">
               <a:buNone/>
             </a:pPr>
             <a:r>
@@ -12296,14 +12038,14 @@
       </p:sp>
       <p:pic>
         <p:nvPicPr>
-          <p:cNvPr id="33" name="Image 5" descr="preencoded.png">    </p:cNvPr>
+          <p:cNvPr id="33" name="Image 5" descr="preencoded.png"/>
           <p:cNvPicPr>
             <a:picLocks noChangeAspect="1"/>
           </p:cNvPicPr>
           <p:nvPr/>
         </p:nvPicPr>
         <p:blipFill>
-          <a:blip r:embed="rId6"/>
+          <a:blip r:embed="rId8"/>
           <a:stretch>
             <a:fillRect/>
           </a:stretch>
@@ -12339,7 +12081,7 @@
           <a:bodyPr wrap="square" lIns="0" tIns="0" rIns="0" bIns="0" rtlCol="0" anchor="ctr"/>
           <a:lstStyle/>
           <a:p>
-            <a:pPr indent="0" marL="0">
+            <a:pPr marL="0" indent="0">
               <a:buNone/>
             </a:pPr>
             <a:r>
@@ -12381,7 +12123,7 @@
             <a:prstDash val="solid"/>
           </a:ln>
           <a:effectLst>
-            <a:outerShdw sx="100000" sy="100000" kx="0" ky="0" algn="bl" rotWithShape="0" blurRad="63500" dist="22860" dir="8100000">
+            <a:outerShdw blurRad="63500" dist="22860" dir="8100000" algn="bl" rotWithShape="0">
               <a:srgbClr val="000000">
                 <a:alpha val="12000"/>
               </a:srgbClr>
@@ -12410,7 +12152,7 @@
           <a:bodyPr wrap="square" lIns="0" tIns="0" rIns="0" bIns="0" rtlCol="0" anchor="ctr"/>
           <a:lstStyle/>
           <a:p>
-            <a:pPr indent="0" marL="0">
+            <a:pPr marL="0" indent="0">
               <a:buNone/>
             </a:pPr>
             <a:r>
@@ -12455,14 +12197,14 @@
       </p:sp>
       <p:pic>
         <p:nvPicPr>
-          <p:cNvPr id="38" name="Image 6" descr="preencoded.png">    </p:cNvPr>
+          <p:cNvPr id="38" name="Image 6" descr="preencoded.png"/>
           <p:cNvPicPr>
             <a:picLocks noChangeAspect="1"/>
           </p:cNvPicPr>
           <p:nvPr/>
         </p:nvPicPr>
         <p:blipFill>
-          <a:blip r:embed="rId7"/>
+          <a:blip r:embed="rId9"/>
           <a:stretch>
             <a:fillRect/>
           </a:stretch>
@@ -12498,7 +12240,7 @@
           <a:bodyPr wrap="square" lIns="0" tIns="0" rIns="0" bIns="0" rtlCol="0" anchor="ctr"/>
           <a:lstStyle/>
           <a:p>
-            <a:pPr indent="0" marL="0">
+            <a:pPr marL="0" indent="0">
               <a:buNone/>
             </a:pPr>
             <a:r>
@@ -12540,7 +12282,7 @@
             <a:prstDash val="solid"/>
           </a:ln>
           <a:effectLst>
-            <a:outerShdw sx="100000" sy="100000" kx="0" ky="0" algn="bl" rotWithShape="0" blurRad="63500" dist="22860" dir="8100000">
+            <a:outerShdw blurRad="63500" dist="22860" dir="8100000" algn="bl" rotWithShape="0">
               <a:srgbClr val="000000">
                 <a:alpha val="12000"/>
               </a:srgbClr>
@@ -12569,7 +12311,7 @@
           <a:bodyPr wrap="square" lIns="0" tIns="0" rIns="0" bIns="0" rtlCol="0" anchor="ctr"/>
           <a:lstStyle/>
           <a:p>
-            <a:pPr indent="0" marL="0">
+            <a:pPr marL="0" indent="0">
               <a:buNone/>
             </a:pPr>
             <a:r>
@@ -12614,14 +12356,14 @@
       </p:sp>
       <p:pic>
         <p:nvPicPr>
-          <p:cNvPr id="43" name="Image 7" descr="preencoded.png">    </p:cNvPr>
+          <p:cNvPr id="43" name="Image 7" descr="preencoded.png"/>
           <p:cNvPicPr>
             <a:picLocks noChangeAspect="1"/>
           </p:cNvPicPr>
           <p:nvPr/>
         </p:nvPicPr>
         <p:blipFill>
-          <a:blip r:embed="rId8"/>
+          <a:blip r:embed="rId10"/>
           <a:stretch>
             <a:fillRect/>
           </a:stretch>
@@ -12657,7 +12399,7 @@
           <a:bodyPr wrap="square" lIns="0" tIns="0" rIns="0" bIns="0" rtlCol="0" anchor="ctr"/>
           <a:lstStyle/>
           <a:p>
-            <a:pPr indent="0" marL="0">
+            <a:pPr marL="0" indent="0">
               <a:buNone/>
             </a:pPr>
             <a:r>
@@ -12696,7 +12438,7 @@
           <a:bodyPr wrap="square" lIns="0" tIns="0" rIns="0" bIns="0" rtlCol="0" anchor="ctr"/>
           <a:lstStyle/>
           <a:p>
-            <a:pPr indent="0" marL="0">
+            <a:pPr marL="0" indent="0">
               <a:buNone/>
             </a:pPr>
             <a:r>
@@ -12735,7 +12477,7 @@
           <a:bodyPr wrap="square" lIns="0" tIns="0" rIns="0" bIns="0" rtlCol="0" anchor="ctr"/>
           <a:lstStyle/>
           <a:p>
-            <a:pPr algn="r" indent="0" marL="0">
+            <a:pPr marL="0" indent="0" algn="r">
               <a:buNone/>
             </a:pPr>
             <a:r>
@@ -12769,6 +12511,7 @@
         <a:solidFill>
           <a:srgbClr val="F8FAFC"/>
         </a:solidFill>
+        <a:effectLst/>
       </p:bgPr>
     </p:bg>
     <p:spTree>
@@ -12831,11 +12574,11 @@
           <a:bodyPr wrap="square" lIns="0" tIns="0" rIns="0" bIns="0" rtlCol="0" anchor="ctr"/>
           <a:lstStyle/>
           <a:p>
-            <a:pPr indent="0" marL="0">
-              <a:buNone/>
-            </a:pPr>
-            <a:r>
-              <a:rPr lang="en-US" sz="1100" b="1" spc="200" kern="0" dirty="0">
+            <a:pPr marL="0" indent="0">
+              <a:buNone/>
+            </a:pPr>
+            <a:r>
+              <a:rPr lang="en-US" sz="1100" b="1" kern="0" spc="200" dirty="0">
                 <a:solidFill>
                   <a:srgbClr val="2563EB"/>
                 </a:solidFill>
@@ -12870,7 +12613,7 @@
           <a:bodyPr wrap="square" lIns="0" tIns="0" rIns="0" bIns="0" rtlCol="0" anchor="ctr"/>
           <a:lstStyle/>
           <a:p>
-            <a:pPr indent="0" marL="0">
+            <a:pPr marL="0" indent="0">
               <a:buNone/>
             </a:pPr>
             <a:r>
@@ -12909,7 +12652,7 @@
           <a:bodyPr wrap="square" lIns="0" tIns="0" rIns="0" bIns="0" rtlCol="0" anchor="ctr"/>
           <a:lstStyle/>
           <a:p>
-            <a:pPr indent="0" marL="0">
+            <a:pPr marL="0" indent="0">
               <a:buNone/>
             </a:pPr>
             <a:r>
@@ -12951,7 +12694,7 @@
             <a:prstDash val="solid"/>
           </a:ln>
           <a:effectLst>
-            <a:outerShdw sx="100000" sy="100000" kx="0" ky="0" algn="bl" rotWithShape="0" blurRad="63500" dist="22860" dir="8100000">
+            <a:outerShdw blurRad="63500" dist="22860" dir="8100000" algn="bl" rotWithShape="0">
               <a:srgbClr val="000000">
                 <a:alpha val="12000"/>
               </a:srgbClr>
@@ -13005,7 +12748,7 @@
           <a:bodyPr wrap="square" lIns="0" tIns="0" rIns="0" bIns="0" rtlCol="0" anchor="ctr"/>
           <a:lstStyle/>
           <a:p>
-            <a:pPr indent="0" marL="0">
+            <a:pPr marL="0" indent="0">
               <a:buNone/>
             </a:pPr>
             <a:r>
@@ -13044,7 +12787,7 @@
           <a:bodyPr wrap="square" lIns="0" tIns="0" rIns="0" bIns="0" rtlCol="0" anchor="ctr"/>
           <a:lstStyle/>
           <a:p>
-            <a:pPr indent="0" marL="0">
+            <a:pPr marL="0" indent="0">
               <a:buNone/>
             </a:pPr>
             <a:r>
@@ -13086,7 +12829,7 @@
             <a:prstDash val="solid"/>
           </a:ln>
           <a:effectLst>
-            <a:outerShdw sx="100000" sy="100000" kx="0" ky="0" algn="bl" rotWithShape="0" blurRad="63500" dist="22860" dir="8100000">
+            <a:outerShdw blurRad="63500" dist="22860" dir="8100000" algn="bl" rotWithShape="0">
               <a:srgbClr val="000000">
                 <a:alpha val="12000"/>
               </a:srgbClr>
@@ -13140,7 +12883,7 @@
           <a:bodyPr wrap="square" lIns="0" tIns="0" rIns="0" bIns="0" rtlCol="0" anchor="ctr"/>
           <a:lstStyle/>
           <a:p>
-            <a:pPr indent="0" marL="0">
+            <a:pPr marL="0" indent="0">
               <a:buNone/>
             </a:pPr>
             <a:r>
@@ -13179,7 +12922,7 @@
           <a:bodyPr wrap="square" lIns="0" tIns="0" rIns="0" bIns="0" rtlCol="0" anchor="ctr"/>
           <a:lstStyle/>
           <a:p>
-            <a:pPr indent="0" marL="0">
+            <a:pPr marL="0" indent="0">
               <a:buNone/>
             </a:pPr>
             <a:r>
@@ -13221,7 +12964,7 @@
             <a:prstDash val="solid"/>
           </a:ln>
           <a:effectLst>
-            <a:outerShdw sx="100000" sy="100000" kx="0" ky="0" algn="bl" rotWithShape="0" blurRad="63500" dist="22860" dir="8100000">
+            <a:outerShdw blurRad="63500" dist="22860" dir="8100000" algn="bl" rotWithShape="0">
               <a:srgbClr val="000000">
                 <a:alpha val="12000"/>
               </a:srgbClr>
@@ -13275,7 +13018,7 @@
           <a:bodyPr wrap="square" lIns="0" tIns="0" rIns="0" bIns="0" rtlCol="0" anchor="ctr"/>
           <a:lstStyle/>
           <a:p>
-            <a:pPr indent="0" marL="0">
+            <a:pPr marL="0" indent="0">
               <a:buNone/>
             </a:pPr>
             <a:r>
@@ -13314,7 +13057,7 @@
           <a:bodyPr wrap="square" lIns="0" tIns="0" rIns="0" bIns="0" rtlCol="0" anchor="ctr"/>
           <a:lstStyle/>
           <a:p>
-            <a:pPr indent="0" marL="0">
+            <a:pPr marL="0" indent="0">
               <a:buNone/>
             </a:pPr>
             <a:r>
@@ -13384,14 +13127,14 @@
       </p:sp>
       <p:pic>
         <p:nvPicPr>
-          <p:cNvPr id="20" name="Image 0" descr="preencoded.png">    </p:cNvPr>
+          <p:cNvPr id="20" name="Image 0" descr="preencoded.png"/>
           <p:cNvPicPr>
             <a:picLocks noChangeAspect="1"/>
           </p:cNvPicPr>
           <p:nvPr/>
         </p:nvPicPr>
         <p:blipFill>
-          <a:blip r:embed="rId1"/>
+          <a:blip r:embed="rId3"/>
           <a:stretch>
             <a:fillRect/>
           </a:stretch>
@@ -13427,7 +13170,7 @@
           <a:bodyPr wrap="square" lIns="0" tIns="0" rIns="0" bIns="0" rtlCol="0" anchor="ctr"/>
           <a:lstStyle/>
           <a:p>
-            <a:pPr indent="0" marL="0">
+            <a:pPr marL="0" indent="0">
               <a:buNone/>
             </a:pPr>
             <a:r>
@@ -13466,7 +13209,7 @@
           <a:bodyPr wrap="square" lIns="0" tIns="0" rIns="0" bIns="0" rtlCol="0" anchor="ctr"/>
           <a:lstStyle/>
           <a:p>
-            <a:pPr indent="0" marL="0">
+            <a:pPr marL="0" indent="0">
               <a:buNone/>
             </a:pPr>
             <a:r>
@@ -13505,7 +13248,7 @@
           <a:bodyPr wrap="square" lIns="0" tIns="0" rIns="0" bIns="0" rtlCol="0" anchor="ctr"/>
           <a:lstStyle/>
           <a:p>
-            <a:pPr indent="0" marL="0">
+            <a:pPr marL="0" indent="0">
               <a:buNone/>
             </a:pPr>
             <a:r>
@@ -13544,7 +13287,7 @@
           <a:bodyPr wrap="square" lIns="0" tIns="0" rIns="0" bIns="0" rtlCol="0" anchor="ctr"/>
           <a:lstStyle/>
           <a:p>
-            <a:pPr algn="r" indent="0" marL="0">
+            <a:pPr marL="0" indent="0" algn="r">
               <a:buNone/>
             </a:pPr>
             <a:r>
@@ -13578,6 +13321,7 @@
         <a:solidFill>
           <a:srgbClr val="F8FAFC"/>
         </a:solidFill>
+        <a:effectLst/>
       </p:bgPr>
     </p:bg>
     <p:spTree>
@@ -13640,11 +13384,11 @@
           <a:bodyPr wrap="square" lIns="0" tIns="0" rIns="0" bIns="0" rtlCol="0" anchor="ctr"/>
           <a:lstStyle/>
           <a:p>
-            <a:pPr indent="0" marL="0">
-              <a:buNone/>
-            </a:pPr>
-            <a:r>
-              <a:rPr lang="en-US" sz="1100" b="1" spc="200" kern="0" dirty="0">
+            <a:pPr marL="0" indent="0">
+              <a:buNone/>
+            </a:pPr>
+            <a:r>
+              <a:rPr lang="en-US" sz="1100" b="1" kern="0" spc="200" dirty="0">
                 <a:solidFill>
                   <a:srgbClr val="14B8A6"/>
                 </a:solidFill>
@@ -13679,7 +13423,7 @@
           <a:bodyPr wrap="square" lIns="0" tIns="0" rIns="0" bIns="0" rtlCol="0" anchor="ctr"/>
           <a:lstStyle/>
           <a:p>
-            <a:pPr indent="0" marL="0">
+            <a:pPr marL="0" indent="0">
               <a:buNone/>
             </a:pPr>
             <a:r>
@@ -13721,7 +13465,7 @@
             <a:prstDash val="solid"/>
           </a:ln>
           <a:effectLst>
-            <a:outerShdw sx="100000" sy="100000" kx="0" ky="0" algn="bl" rotWithShape="0" blurRad="63500" dist="22860" dir="8100000">
+            <a:outerShdw blurRad="63500" dist="22860" dir="8100000" algn="bl" rotWithShape="0">
               <a:srgbClr val="000000">
                 <a:alpha val="12000"/>
               </a:srgbClr>
@@ -13750,7 +13494,7 @@
           <a:bodyPr wrap="square" lIns="0" tIns="0" rIns="0" bIns="0" rtlCol="0" anchor="ctr"/>
           <a:lstStyle/>
           <a:p>
-            <a:pPr indent="0" marL="0">
+            <a:pPr marL="0" indent="0">
               <a:buNone/>
             </a:pPr>
             <a:r>
@@ -13789,7 +13533,7 @@
           <a:bodyPr wrap="square" lIns="0" tIns="0" rIns="0" bIns="0" rtlCol="0" anchor="ctr"/>
           <a:lstStyle/>
           <a:p>
-            <a:pPr indent="0" marL="0">
+            <a:pPr marL="0" indent="0">
               <a:lnSpc>
                 <a:spcPct val="105000"/>
               </a:lnSpc>
@@ -13807,13 +13551,61 @@
               <a:t>Forest / 番茄ToDo
 </a:t>
             </a:r>
-            <a:pPr indent="0" marL="0">
+            <a:r>
+              <a:rPr lang="en-US" sz="1150" dirty="0">
+                <a:solidFill>
+                  <a:srgbClr val="64748B"/>
+                </a:solidFill>
+                <a:latin typeface="Microsoft YaHei" pitchFamily="34" charset="0"/>
+                <a:ea typeface="Microsoft YaHei" pitchFamily="34" charset="-122"/>
+                <a:cs typeface="Microsoft YaHei" pitchFamily="34" charset="-120"/>
+              </a:rPr>
+              <a:t>专做专注，任务体系弱</a:t>
+            </a:r>
+            <a:endParaRPr lang="en-US" sz="1350" dirty="0"/>
+          </a:p>
+        </p:txBody>
+      </p:sp>
+      <p:sp>
+        <p:nvSpPr>
+          <p:cNvPr id="8" name="Text 6"/>
+          <p:cNvSpPr/>
+          <p:nvPr/>
+        </p:nvSpPr>
+        <p:spPr>
+          <a:xfrm>
+            <a:off x="731520" y="2743200"/>
+            <a:ext cx="3451860" cy="731520"/>
+          </a:xfrm>
+          <a:prstGeom prst="rect">
+            <a:avLst/>
+          </a:prstGeom>
+          <a:noFill/>
+          <a:ln/>
+        </p:spPr>
+        <p:txBody>
+          <a:bodyPr wrap="square" lIns="0" tIns="0" rIns="0" bIns="0" rtlCol="0" anchor="ctr"/>
+          <a:lstStyle/>
+          <a:p>
+            <a:pPr marL="0" indent="0">
               <a:lnSpc>
                 <a:spcPct val="105000"/>
               </a:lnSpc>
               <a:buNone/>
             </a:pPr>
             <a:r>
+              <a:rPr lang="en-US" sz="1350" b="1" dirty="0">
+                <a:solidFill>
+                  <a:srgbClr val="0F172A"/>
+                </a:solidFill>
+                <a:latin typeface="Microsoft YaHei" pitchFamily="34" charset="0"/>
+                <a:ea typeface="Microsoft YaHei" pitchFamily="34" charset="-122"/>
+                <a:cs typeface="Microsoft YaHei" pitchFamily="34" charset="-120"/>
+              </a:rPr>
+              <a:t>Todoist / 滴答清单
+</a:t>
+            </a:r>
+            <a:r>
               <a:rPr lang="en-US" sz="1150" dirty="0">
                 <a:solidFill>
                   <a:srgbClr val="64748B"/>
@@ -13822,7 +13614,7 @@
                 <a:ea typeface="Microsoft YaHei" pitchFamily="34" charset="-122"/>
                 <a:cs typeface="Microsoft YaHei" pitchFamily="34" charset="-120"/>
               </a:rPr>
-              <a:t>专做专注，任务体系弱</a:t>
+              <a:t>专做清单，专注与复盘弱</a:t>
             </a:r>
             <a:endParaRPr lang="en-US" sz="1350" dirty="0"/>
           </a:p>
@@ -13830,13 +13622,13 @@
       </p:sp>
       <p:sp>
         <p:nvSpPr>
-          <p:cNvPr id="8" name="Text 6"/>
-          <p:cNvSpPr/>
-          <p:nvPr/>
-        </p:nvSpPr>
-        <p:spPr>
-          <a:xfrm>
-            <a:off x="731520" y="2743200"/>
+          <p:cNvPr id="9" name="Text 7"/>
+          <p:cNvSpPr/>
+          <p:nvPr/>
+        </p:nvSpPr>
+        <p:spPr>
+          <a:xfrm>
+            <a:off x="731520" y="3520440"/>
             <a:ext cx="3451860" cy="731520"/>
           </a:xfrm>
           <a:prstGeom prst="rect">
@@ -13849,7 +13641,7 @@
           <a:bodyPr wrap="square" lIns="0" tIns="0" rIns="0" bIns="0" rtlCol="0" anchor="ctr"/>
           <a:lstStyle/>
           <a:p>
-            <a:pPr indent="0" marL="0">
+            <a:pPr marL="0" indent="0">
               <a:lnSpc>
                 <a:spcPct val="105000"/>
               </a:lnSpc>
@@ -13864,75 +13656,9 @@
                 <a:ea typeface="Microsoft YaHei" pitchFamily="34" charset="-122"/>
                 <a:cs typeface="Microsoft YaHei" pitchFamily="34" charset="-120"/>
               </a:rPr>
-              <a:t>Todoist / 滴答清单
-</a:t>
-            </a:r>
-            <a:pPr indent="0" marL="0">
-              <a:lnSpc>
-                <a:spcPct val="105000"/>
-              </a:lnSpc>
-              <a:buNone/>
-            </a:pPr>
-            <a:r>
-              <a:rPr lang="en-US" sz="1150" dirty="0">
-                <a:solidFill>
-                  <a:srgbClr val="64748B"/>
-                </a:solidFill>
-                <a:latin typeface="Microsoft YaHei" pitchFamily="34" charset="0"/>
-                <a:ea typeface="Microsoft YaHei" pitchFamily="34" charset="-122"/>
-                <a:cs typeface="Microsoft YaHei" pitchFamily="34" charset="-120"/>
-              </a:rPr>
-              <a:t>专做清单，专注与复盘弱</a:t>
-            </a:r>
-            <a:endParaRPr lang="en-US" sz="1350" dirty="0"/>
-          </a:p>
-        </p:txBody>
-      </p:sp>
-      <p:sp>
-        <p:nvSpPr>
-          <p:cNvPr id="9" name="Text 7"/>
-          <p:cNvSpPr/>
-          <p:nvPr/>
-        </p:nvSpPr>
-        <p:spPr>
-          <a:xfrm>
-            <a:off x="731520" y="3520440"/>
-            <a:ext cx="3451860" cy="731520"/>
-          </a:xfrm>
-          <a:prstGeom prst="rect">
-            <a:avLst/>
-          </a:prstGeom>
-          <a:noFill/>
-          <a:ln/>
-        </p:spPr>
-        <p:txBody>
-          <a:bodyPr wrap="square" lIns="0" tIns="0" rIns="0" bIns="0" rtlCol="0" anchor="ctr"/>
-          <a:lstStyle/>
-          <a:p>
-            <a:pPr indent="0" marL="0">
-              <a:lnSpc>
-                <a:spcPct val="105000"/>
-              </a:lnSpc>
-              <a:buNone/>
-            </a:pPr>
-            <a:r>
-              <a:rPr lang="en-US" sz="1350" b="1" dirty="0">
-                <a:solidFill>
-                  <a:srgbClr val="0F172A"/>
-                </a:solidFill>
-                <a:latin typeface="Microsoft YaHei" pitchFamily="34" charset="0"/>
-                <a:ea typeface="Microsoft YaHei" pitchFamily="34" charset="-122"/>
-                <a:cs typeface="Microsoft YaHei" pitchFamily="34" charset="-120"/>
-              </a:rPr>
               <a:t>共性问题
 </a:t>
             </a:r>
-            <a:pPr indent="0" marL="0">
-              <a:lnSpc>
-                <a:spcPct val="105000"/>
-              </a:lnSpc>
-              <a:buNone/>
-            </a:pPr>
             <a:r>
               <a:rPr lang="en-US" sz="1150" dirty="0">
                 <a:solidFill>
@@ -13972,7 +13698,7 @@
             <a:prstDash val="solid"/>
           </a:ln>
           <a:effectLst>
-            <a:outerShdw sx="100000" sy="100000" kx="0" ky="0" algn="bl" rotWithShape="0" blurRad="63500" dist="22860" dir="8100000">
+            <a:outerShdw blurRad="63500" dist="22860" dir="8100000" algn="bl" rotWithShape="0">
               <a:srgbClr val="000000">
                 <a:alpha val="12000"/>
               </a:srgbClr>
@@ -14001,7 +13727,7 @@
           <a:bodyPr wrap="square" lIns="0" tIns="0" rIns="0" bIns="0" rtlCol="0" anchor="ctr"/>
           <a:lstStyle/>
           <a:p>
-            <a:pPr indent="0" marL="0">
+            <a:pPr marL="0" indent="0">
               <a:buNone/>
             </a:pPr>
             <a:r>
@@ -14046,14 +13772,14 @@
       </p:sp>
       <p:pic>
         <p:nvPicPr>
-          <p:cNvPr id="13" name="Image 0" descr="preencoded.png">    </p:cNvPr>
+          <p:cNvPr id="13" name="Image 0" descr="preencoded.png"/>
           <p:cNvPicPr>
             <a:picLocks noChangeAspect="1"/>
           </p:cNvPicPr>
           <p:nvPr/>
         </p:nvPicPr>
         <p:blipFill>
-          <a:blip r:embed="rId1"/>
+          <a:blip r:embed="rId3"/>
           <a:stretch>
             <a:fillRect/>
           </a:stretch>
@@ -14089,7 +13815,7 @@
           <a:bodyPr wrap="square" lIns="0" tIns="0" rIns="0" bIns="0" rtlCol="0" anchor="ctr"/>
           <a:lstStyle/>
           <a:p>
-            <a:pPr indent="0" marL="0">
+            <a:pPr marL="0" indent="0">
               <a:buNone/>
             </a:pPr>
             <a:r>
@@ -14134,14 +13860,14 @@
       </p:sp>
       <p:pic>
         <p:nvPicPr>
-          <p:cNvPr id="16" name="Image 1" descr="preencoded.png">    </p:cNvPr>
+          <p:cNvPr id="16" name="Image 1" descr="preencoded.png"/>
           <p:cNvPicPr>
             <a:picLocks noChangeAspect="1"/>
           </p:cNvPicPr>
           <p:nvPr/>
         </p:nvPicPr>
         <p:blipFill>
-          <a:blip r:embed="rId2"/>
+          <a:blip r:embed="rId3"/>
           <a:stretch>
             <a:fillRect/>
           </a:stretch>
@@ -14177,7 +13903,7 @@
           <a:bodyPr wrap="square" lIns="0" tIns="0" rIns="0" bIns="0" rtlCol="0" anchor="ctr"/>
           <a:lstStyle/>
           <a:p>
-            <a:pPr indent="0" marL="0">
+            <a:pPr marL="0" indent="0">
               <a:buNone/>
             </a:pPr>
             <a:r>
@@ -14222,7 +13948,7 @@
       </p:sp>
       <p:pic>
         <p:nvPicPr>
-          <p:cNvPr id="19" name="Image 2" descr="preencoded.png">    </p:cNvPr>
+          <p:cNvPr id="19" name="Image 2" descr="preencoded.png"/>
           <p:cNvPicPr>
             <a:picLocks noChangeAspect="1"/>
           </p:cNvPicPr>
@@ -14265,7 +13991,7 @@
           <a:bodyPr wrap="square" lIns="0" tIns="0" rIns="0" bIns="0" rtlCol="0" anchor="ctr"/>
           <a:lstStyle/>
           <a:p>
-            <a:pPr indent="0" marL="0">
+            <a:pPr marL="0" indent="0">
               <a:buNone/>
             </a:pPr>
             <a:r>
@@ -14310,14 +14036,14 @@
       </p:sp>
       <p:pic>
         <p:nvPicPr>
-          <p:cNvPr id="22" name="Image 3" descr="preencoded.png">    </p:cNvPr>
+          <p:cNvPr id="22" name="Image 3" descr="preencoded.png"/>
           <p:cNvPicPr>
             <a:picLocks noChangeAspect="1"/>
           </p:cNvPicPr>
           <p:nvPr/>
         </p:nvPicPr>
         <p:blipFill>
-          <a:blip r:embed="rId4"/>
+          <a:blip r:embed="rId3"/>
           <a:stretch>
             <a:fillRect/>
           </a:stretch>
@@ -14353,7 +14079,7 @@
           <a:bodyPr wrap="square" lIns="0" tIns="0" rIns="0" bIns="0" rtlCol="0" anchor="ctr"/>
           <a:lstStyle/>
           <a:p>
-            <a:pPr indent="0" marL="0">
+            <a:pPr marL="0" indent="0">
               <a:buNone/>
             </a:pPr>
             <a:r>
@@ -14392,7 +14118,7 @@
           <a:bodyPr wrap="square" lIns="0" tIns="0" rIns="0" bIns="0" rtlCol="0" anchor="ctr"/>
           <a:lstStyle/>
           <a:p>
-            <a:pPr indent="0" marL="0">
+            <a:pPr marL="0" indent="0">
               <a:buNone/>
             </a:pPr>
             <a:r>
@@ -14431,7 +14157,7 @@
           <a:bodyPr wrap="square" lIns="0" tIns="0" rIns="0" bIns="0" rtlCol="0" anchor="ctr"/>
           <a:lstStyle/>
           <a:p>
-            <a:pPr algn="r" indent="0" marL="0">
+            <a:pPr marL="0" indent="0" algn="r">
               <a:buNone/>
             </a:pPr>
             <a:r>
@@ -14465,6 +14191,7 @@
         <a:solidFill>
           <a:srgbClr val="F8FAFC"/>
         </a:solidFill>
+        <a:effectLst/>
       </p:bgPr>
     </p:bg>
     <p:spTree>
@@ -14527,11 +14254,11 @@
           <a:bodyPr wrap="square" lIns="0" tIns="0" rIns="0" bIns="0" rtlCol="0" anchor="ctr"/>
           <a:lstStyle/>
           <a:p>
-            <a:pPr indent="0" marL="0">
-              <a:buNone/>
-            </a:pPr>
-            <a:r>
-              <a:rPr lang="en-US" sz="1100" b="1" spc="200" kern="0" dirty="0">
+            <a:pPr marL="0" indent="0">
+              <a:buNone/>
+            </a:pPr>
+            <a:r>
+              <a:rPr lang="en-US" sz="1100" b="1" kern="0" spc="200" dirty="0">
                 <a:solidFill>
                   <a:srgbClr val="7C3AED"/>
                 </a:solidFill>
@@ -14566,7 +14293,7 @@
           <a:bodyPr wrap="square" lIns="0" tIns="0" rIns="0" bIns="0" rtlCol="0" anchor="ctr"/>
           <a:lstStyle/>
           <a:p>
-            <a:pPr indent="0" marL="0">
+            <a:pPr marL="0" indent="0">
               <a:buNone/>
             </a:pPr>
             <a:r>
@@ -14608,7 +14335,7 @@
             <a:prstDash val="solid"/>
           </a:ln>
           <a:effectLst>
-            <a:outerShdw sx="100000" sy="100000" kx="0" ky="0" algn="bl" rotWithShape="0" blurRad="63500" dist="22860" dir="8100000">
+            <a:outerShdw blurRad="63500" dist="22860" dir="8100000" algn="bl" rotWithShape="0">
               <a:srgbClr val="000000">
                 <a:alpha val="12000"/>
               </a:srgbClr>
@@ -14643,14 +14370,14 @@
       </p:sp>
       <p:pic>
         <p:nvPicPr>
-          <p:cNvPr id="7" name="Image 0" descr="preencoded.png">    </p:cNvPr>
+          <p:cNvPr id="7" name="Image 0" descr="preencoded.png"/>
           <p:cNvPicPr>
             <a:picLocks noChangeAspect="1"/>
           </p:cNvPicPr>
           <p:nvPr/>
         </p:nvPicPr>
         <p:blipFill>
-          <a:blip r:embed="rId1"/>
+          <a:blip r:embed="rId3"/>
           <a:stretch>
             <a:fillRect/>
           </a:stretch>
@@ -14686,11 +14413,11 @@
           <a:bodyPr wrap="square" lIns="0" tIns="0" rIns="0" bIns="0" rtlCol="0" anchor="ctr"/>
           <a:lstStyle/>
           <a:p>
-            <a:pPr indent="0" marL="0">
-              <a:buNone/>
-            </a:pPr>
-            <a:r>
-              <a:rPr lang="en-US" sz="1100" b="1" spc="100" kern="0" dirty="0">
+            <a:pPr marL="0" indent="0">
+              <a:buNone/>
+            </a:pPr>
+            <a:r>
+              <a:rPr lang="en-US" sz="1100" b="1" kern="0" spc="100" dirty="0">
                 <a:solidFill>
                   <a:srgbClr val="64748B"/>
                 </a:solidFill>
@@ -14725,7 +14452,7 @@
           <a:bodyPr wrap="square" lIns="0" tIns="0" rIns="0" bIns="0" rtlCol="0" anchor="ctr"/>
           <a:lstStyle/>
           <a:p>
-            <a:pPr indent="0" marL="0">
+            <a:pPr marL="0" indent="0">
               <a:buNone/>
             </a:pPr>
             <a:r>
@@ -14787,7 +14514,7 @@
           <a:bodyPr wrap="square" lIns="0" tIns="0" rIns="0" bIns="0" rtlCol="0" anchor="ctr"/>
           <a:lstStyle/>
           <a:p>
-            <a:pPr indent="0" marL="0">
+            <a:pPr marL="0" indent="0">
               <a:buNone/>
             </a:pPr>
             <a:r>
@@ -14829,7 +14556,7 @@
             <a:prstDash val="solid"/>
           </a:ln>
           <a:effectLst>
-            <a:outerShdw sx="100000" sy="100000" kx="0" ky="0" algn="bl" rotWithShape="0" blurRad="63500" dist="22860" dir="8100000">
+            <a:outerShdw blurRad="63500" dist="22860" dir="8100000" algn="bl" rotWithShape="0">
               <a:srgbClr val="000000">
                 <a:alpha val="12000"/>
               </a:srgbClr>
@@ -14864,14 +14591,14 @@
       </p:sp>
       <p:pic>
         <p:nvPicPr>
-          <p:cNvPr id="14" name="Image 1" descr="preencoded.png">    </p:cNvPr>
+          <p:cNvPr id="14" name="Image 1" descr="preencoded.png"/>
           <p:cNvPicPr>
             <a:picLocks noChangeAspect="1"/>
           </p:cNvPicPr>
           <p:nvPr/>
         </p:nvPicPr>
         <p:blipFill>
-          <a:blip r:embed="rId2"/>
+          <a:blip r:embed="rId4"/>
           <a:stretch>
             <a:fillRect/>
           </a:stretch>
@@ -14907,11 +14634,11 @@
           <a:bodyPr wrap="square" lIns="0" tIns="0" rIns="0" bIns="0" rtlCol="0" anchor="ctr"/>
           <a:lstStyle/>
           <a:p>
-            <a:pPr indent="0" marL="0">
-              <a:buNone/>
-            </a:pPr>
-            <a:r>
-              <a:rPr lang="en-US" sz="1100" b="1" spc="100" kern="0" dirty="0">
+            <a:pPr marL="0" indent="0">
+              <a:buNone/>
+            </a:pPr>
+            <a:r>
+              <a:rPr lang="en-US" sz="1100" b="1" kern="0" spc="100" dirty="0">
                 <a:solidFill>
                   <a:srgbClr val="64748B"/>
                 </a:solidFill>
@@ -14946,7 +14673,7 @@
           <a:bodyPr wrap="square" lIns="0" tIns="0" rIns="0" bIns="0" rtlCol="0" anchor="ctr"/>
           <a:lstStyle/>
           <a:p>
-            <a:pPr indent="0" marL="0">
+            <a:pPr marL="0" indent="0">
               <a:buNone/>
             </a:pPr>
             <a:r>
@@ -15008,7 +14735,7 @@
           <a:bodyPr wrap="square" lIns="0" tIns="0" rIns="0" bIns="0" rtlCol="0" anchor="ctr"/>
           <a:lstStyle/>
           <a:p>
-            <a:pPr indent="0" marL="0">
+            <a:pPr marL="0" indent="0">
               <a:buNone/>
             </a:pPr>
             <a:r>
@@ -15050,7 +14777,7 @@
             <a:prstDash val="solid"/>
           </a:ln>
           <a:effectLst>
-            <a:outerShdw sx="100000" sy="100000" kx="0" ky="0" algn="bl" rotWithShape="0" blurRad="63500" dist="22860" dir="8100000">
+            <a:outerShdw blurRad="63500" dist="22860" dir="8100000" algn="bl" rotWithShape="0">
               <a:srgbClr val="000000">
                 <a:alpha val="12000"/>
               </a:srgbClr>
@@ -15085,14 +14812,14 @@
       </p:sp>
       <p:pic>
         <p:nvPicPr>
-          <p:cNvPr id="21" name="Image 2" descr="preencoded.png">    </p:cNvPr>
+          <p:cNvPr id="21" name="Image 2" descr="preencoded.png"/>
           <p:cNvPicPr>
             <a:picLocks noChangeAspect="1"/>
           </p:cNvPicPr>
           <p:nvPr/>
         </p:nvPicPr>
         <p:blipFill>
-          <a:blip r:embed="rId3"/>
+          <a:blip r:embed="rId5"/>
           <a:stretch>
             <a:fillRect/>
           </a:stretch>
@@ -15128,11 +14855,11 @@
           <a:bodyPr wrap="square" lIns="0" tIns="0" rIns="0" bIns="0" rtlCol="0" anchor="ctr"/>
           <a:lstStyle/>
           <a:p>
-            <a:pPr indent="0" marL="0">
-              <a:buNone/>
-            </a:pPr>
-            <a:r>
-              <a:rPr lang="en-US" sz="1100" b="1" spc="100" kern="0" dirty="0">
+            <a:pPr marL="0" indent="0">
+              <a:buNone/>
+            </a:pPr>
+            <a:r>
+              <a:rPr lang="en-US" sz="1100" b="1" kern="0" spc="100" dirty="0">
                 <a:solidFill>
                   <a:srgbClr val="64748B"/>
                 </a:solidFill>
@@ -15167,7 +14894,7 @@
           <a:bodyPr wrap="square" lIns="0" tIns="0" rIns="0" bIns="0" rtlCol="0" anchor="ctr"/>
           <a:lstStyle/>
           <a:p>
-            <a:pPr indent="0" marL="0">
+            <a:pPr marL="0" indent="0">
               <a:buNone/>
             </a:pPr>
             <a:r>
@@ -15229,7 +14956,7 @@
           <a:bodyPr wrap="square" lIns="0" tIns="0" rIns="0" bIns="0" rtlCol="0" anchor="ctr"/>
           <a:lstStyle/>
           <a:p>
-            <a:pPr indent="0" marL="0">
+            <a:pPr marL="0" indent="0">
               <a:buNone/>
             </a:pPr>
             <a:r>
@@ -15268,7 +14995,7 @@
           <a:bodyPr wrap="square" lIns="0" tIns="0" rIns="0" bIns="0" rtlCol="0" anchor="ctr"/>
           <a:lstStyle/>
           <a:p>
-            <a:pPr indent="0" marL="0">
+            <a:pPr marL="0" indent="0">
               <a:buNone/>
             </a:pPr>
             <a:r>
@@ -15307,7 +15034,7 @@
           <a:bodyPr wrap="square" lIns="0" tIns="0" rIns="0" bIns="0" rtlCol="0" anchor="ctr"/>
           <a:lstStyle/>
           <a:p>
-            <a:pPr algn="r" indent="0" marL="0">
+            <a:pPr marL="0" indent="0" algn="r">
               <a:buNone/>
             </a:pPr>
             <a:r>
@@ -15341,6 +15068,7 @@
         <a:solidFill>
           <a:srgbClr val="0F172A"/>
         </a:solidFill>
+        <a:effectLst/>
       </p:bgPr>
     </p:bg>
     <p:spTree>
@@ -15403,11 +15131,11 @@
           <a:bodyPr wrap="square" lIns="0" tIns="0" rIns="0" bIns="0" rtlCol="0" anchor="ctr"/>
           <a:lstStyle/>
           <a:p>
-            <a:pPr indent="0" marL="0">
-              <a:buNone/>
-            </a:pPr>
-            <a:r>
-              <a:rPr lang="en-US" sz="1100" b="1" spc="200" kern="0" dirty="0">
+            <a:pPr marL="0" indent="0">
+              <a:buNone/>
+            </a:pPr>
+            <a:r>
+              <a:rPr lang="en-US" sz="1100" b="1" kern="0" spc="200" dirty="0">
                 <a:solidFill>
                   <a:srgbClr val="14B8A6"/>
                 </a:solidFill>
@@ -15442,7 +15170,7 @@
           <a:bodyPr wrap="square" lIns="0" tIns="0" rIns="0" bIns="0" rtlCol="0" anchor="ctr"/>
           <a:lstStyle/>
           <a:p>
-            <a:pPr indent="0" marL="0">
+            <a:pPr marL="0" indent="0">
               <a:buNone/>
             </a:pPr>
             <a:r>
@@ -15484,7 +15212,7 @@
             <a:prstDash val="solid"/>
           </a:ln>
           <a:effectLst>
-            <a:outerShdw sx="100000" sy="100000" kx="0" ky="0" algn="bl" rotWithShape="0" blurRad="63500" dist="22860" dir="8100000">
+            <a:outerShdw blurRad="63500" dist="22860" dir="8100000" algn="bl" rotWithShape="0">
               <a:srgbClr val="000000">
                 <a:alpha val="12000"/>
               </a:srgbClr>
@@ -15513,7 +15241,7 @@
           <a:bodyPr wrap="square" lIns="0" tIns="0" rIns="0" bIns="0" rtlCol="0" anchor="ctr"/>
           <a:lstStyle/>
           <a:p>
-            <a:pPr algn="ctr" indent="0" marL="0">
+            <a:pPr marL="0" indent="0" algn="ctr">
               <a:buNone/>
             </a:pPr>
             <a:r>
@@ -15552,7 +15280,7 @@
           <a:bodyPr wrap="square" lIns="0" tIns="0" rIns="0" bIns="0" rtlCol="0" anchor="ctr"/>
           <a:lstStyle/>
           <a:p>
-            <a:pPr algn="ctr" indent="0" marL="0">
+            <a:pPr marL="0" indent="0" algn="ctr">
               <a:buNone/>
             </a:pPr>
             <a:r>
@@ -15594,7 +15322,7 @@
             <a:prstDash val="solid"/>
           </a:ln>
           <a:effectLst>
-            <a:outerShdw sx="100000" sy="100000" kx="0" ky="0" algn="bl" rotWithShape="0" blurRad="63500" dist="22860" dir="8100000">
+            <a:outerShdw blurRad="63500" dist="22860" dir="8100000" algn="bl" rotWithShape="0">
               <a:srgbClr val="000000">
                 <a:alpha val="12000"/>
               </a:srgbClr>
@@ -15623,7 +15351,7 @@
           <a:bodyPr wrap="square" lIns="0" tIns="0" rIns="0" bIns="0" rtlCol="0" anchor="ctr"/>
           <a:lstStyle/>
           <a:p>
-            <a:pPr algn="ctr" indent="0" marL="0">
+            <a:pPr marL="0" indent="0" algn="ctr">
               <a:buNone/>
             </a:pPr>
             <a:r>
@@ -15662,7 +15390,7 @@
           <a:bodyPr wrap="square" lIns="0" tIns="0" rIns="0" bIns="0" rtlCol="0" anchor="ctr"/>
           <a:lstStyle/>
           <a:p>
-            <a:pPr algn="ctr" indent="0" marL="0">
+            <a:pPr marL="0" indent="0" algn="ctr">
               <a:buNone/>
             </a:pPr>
             <a:r>
@@ -15704,7 +15432,7 @@
             <a:prstDash val="solid"/>
           </a:ln>
           <a:effectLst>
-            <a:outerShdw sx="100000" sy="100000" kx="0" ky="0" algn="bl" rotWithShape="0" blurRad="63500" dist="22860" dir="8100000">
+            <a:outerShdw blurRad="63500" dist="22860" dir="8100000" algn="bl" rotWithShape="0">
               <a:srgbClr val="000000">
                 <a:alpha val="12000"/>
               </a:srgbClr>
@@ -15733,7 +15461,7 @@
           <a:bodyPr wrap="square" lIns="0" tIns="0" rIns="0" bIns="0" rtlCol="0" anchor="ctr"/>
           <a:lstStyle/>
           <a:p>
-            <a:pPr algn="ctr" indent="0" marL="0">
+            <a:pPr marL="0" indent="0" algn="ctr">
               <a:buNone/>
             </a:pPr>
             <a:r>
@@ -15772,7 +15500,7 @@
           <a:bodyPr wrap="square" lIns="0" tIns="0" rIns="0" bIns="0" rtlCol="0" anchor="ctr"/>
           <a:lstStyle/>
           <a:p>
-            <a:pPr algn="ctr" indent="0" marL="0">
+            <a:pPr marL="0" indent="0" algn="ctr">
               <a:buNone/>
             </a:pPr>
             <a:r>
@@ -15814,7 +15542,7 @@
             <a:prstDash val="solid"/>
           </a:ln>
           <a:effectLst>
-            <a:outerShdw sx="100000" sy="100000" kx="0" ky="0" algn="bl" rotWithShape="0" blurRad="63500" dist="22860" dir="8100000">
+            <a:outerShdw blurRad="63500" dist="22860" dir="8100000" algn="bl" rotWithShape="0">
               <a:srgbClr val="000000">
                 <a:alpha val="12000"/>
               </a:srgbClr>
@@ -15843,7 +15571,7 @@
           <a:bodyPr wrap="square" lIns="0" tIns="0" rIns="0" bIns="0" rtlCol="0" anchor="ctr"/>
           <a:lstStyle/>
           <a:p>
-            <a:pPr algn="ctr" indent="0" marL="0">
+            <a:pPr marL="0" indent="0" algn="ctr">
               <a:buNone/>
             </a:pPr>
             <a:r>
@@ -15882,7 +15610,7 @@
           <a:bodyPr wrap="square" lIns="0" tIns="0" rIns="0" bIns="0" rtlCol="0" anchor="ctr"/>
           <a:lstStyle/>
           <a:p>
-            <a:pPr algn="ctr" indent="0" marL="0">
+            <a:pPr marL="0" indent="0" algn="ctr">
               <a:buNone/>
             </a:pPr>
             <a:r>
@@ -15946,7 +15674,7 @@
           <a:bodyPr wrap="square" lIns="0" tIns="0" rIns="0" bIns="0" rtlCol="0" anchor="ctr"/>
           <a:lstStyle/>
           <a:p>
-            <a:pPr indent="0" marL="0">
+            <a:pPr marL="0" indent="0">
               <a:buNone/>
             </a:pPr>
             <a:r>
@@ -16034,7 +15762,7 @@
           <a:bodyPr wrap="square" lIns="0" tIns="0" rIns="0" bIns="0" rtlCol="0" anchor="ctr"/>
           <a:lstStyle/>
           <a:p>
-            <a:pPr algn="ctr" indent="0" marL="0">
+            <a:pPr marL="0" indent="0" algn="ctr">
               <a:buNone/>
             </a:pPr>
             <a:r>
@@ -16073,7 +15801,7 @@
           <a:bodyPr wrap="square" lIns="0" tIns="0" rIns="0" bIns="0" rtlCol="0" anchor="ctr"/>
           <a:lstStyle/>
           <a:p>
-            <a:pPr algn="ctr" indent="0" marL="0">
+            <a:pPr marL="0" indent="0" algn="ctr">
               <a:buNone/>
             </a:pPr>
             <a:r>
@@ -16112,7 +15840,7 @@
           <a:bodyPr wrap="square" lIns="0" tIns="0" rIns="0" bIns="0" rtlCol="0" anchor="ctr"/>
           <a:lstStyle/>
           <a:p>
-            <a:pPr indent="0" marL="0">
+            <a:pPr marL="0" indent="0">
               <a:buNone/>
             </a:pPr>
             <a:r>
@@ -16126,9 +15854,6 @@
               </a:rPr>
               <a:t>本地优先：</a:t>
             </a:r>
-            <a:pPr indent="0" marL="0">
-              <a:buNone/>
-            </a:pPr>
             <a:r>
               <a:rPr lang="en-US" sz="1150" dirty="0">
                 <a:solidFill>
@@ -16165,7 +15890,7 @@
           <a:bodyPr wrap="square" lIns="0" tIns="0" rIns="0" bIns="0" rtlCol="0" anchor="ctr"/>
           <a:lstStyle/>
           <a:p>
-            <a:pPr indent="0" marL="0">
+            <a:pPr marL="0" indent="0">
               <a:buNone/>
             </a:pPr>
             <a:r>
@@ -16204,7 +15929,7 @@
           <a:bodyPr wrap="square" lIns="0" tIns="0" rIns="0" bIns="0" rtlCol="0" anchor="ctr"/>
           <a:lstStyle/>
           <a:p>
-            <a:pPr algn="r" indent="0" marL="0">
+            <a:pPr marL="0" indent="0" algn="r">
               <a:buNone/>
             </a:pPr>
             <a:r>
@@ -16238,6 +15963,7 @@
         <a:solidFill>
           <a:srgbClr val="F8FAFC"/>
         </a:solidFill>
+        <a:effectLst/>
       </p:bgPr>
     </p:bg>
     <p:spTree>
@@ -16300,11 +16026,11 @@
           <a:bodyPr wrap="square" lIns="0" tIns="0" rIns="0" bIns="0" rtlCol="0" anchor="ctr"/>
           <a:lstStyle/>
           <a:p>
-            <a:pPr indent="0" marL="0">
-              <a:buNone/>
-            </a:pPr>
-            <a:r>
-              <a:rPr lang="en-US" sz="1100" b="1" spc="200" kern="0" dirty="0">
+            <a:pPr marL="0" indent="0">
+              <a:buNone/>
+            </a:pPr>
+            <a:r>
+              <a:rPr lang="en-US" sz="1100" b="1" kern="0" spc="200" dirty="0">
                 <a:solidFill>
                   <a:srgbClr val="2563EB"/>
                 </a:solidFill>
@@ -16339,7 +16065,7 @@
           <a:bodyPr wrap="square" lIns="0" tIns="0" rIns="0" bIns="0" rtlCol="0" anchor="ctr"/>
           <a:lstStyle/>
           <a:p>
-            <a:pPr indent="0" marL="0">
+            <a:pPr marL="0" indent="0">
               <a:buNone/>
             </a:pPr>
             <a:r>
@@ -16381,7 +16107,7 @@
             <a:prstDash val="solid"/>
           </a:ln>
           <a:effectLst>
-            <a:outerShdw sx="100000" sy="100000" kx="0" ky="0" algn="bl" rotWithShape="0" blurRad="63500" dist="22860" dir="8100000">
+            <a:outerShdw blurRad="63500" dist="22860" dir="8100000" algn="bl" rotWithShape="0">
               <a:srgbClr val="000000">
                 <a:alpha val="12000"/>
               </a:srgbClr>
@@ -16435,7 +16161,7 @@
           <a:bodyPr wrap="square" lIns="0" tIns="0" rIns="0" bIns="0" rtlCol="0" anchor="ctr"/>
           <a:lstStyle/>
           <a:p>
-            <a:pPr indent="0" marL="0">
+            <a:pPr marL="0" indent="0">
               <a:buNone/>
             </a:pPr>
             <a:r>
@@ -16474,7 +16200,7 @@
           <a:bodyPr wrap="square" lIns="0" tIns="0" rIns="0" bIns="0" rtlCol="0" anchor="ctr"/>
           <a:lstStyle/>
           <a:p>
-            <a:pPr indent="0" marL="0">
+            <a:pPr marL="0" indent="0">
               <a:buNone/>
             </a:pPr>
             <a:r>
@@ -16513,7 +16239,7 @@
           <a:bodyPr wrap="square" lIns="0" tIns="0" rIns="0" bIns="0" rtlCol="0" anchor="ctr"/>
           <a:lstStyle/>
           <a:p>
-            <a:pPr indent="0" marL="0">
+            <a:pPr marL="0" indent="0">
               <a:buNone/>
             </a:pPr>
             <a:r>
@@ -16555,7 +16281,7 @@
             <a:prstDash val="solid"/>
           </a:ln>
           <a:effectLst>
-            <a:outerShdw sx="100000" sy="100000" kx="0" ky="0" algn="bl" rotWithShape="0" blurRad="63500" dist="22860" dir="8100000">
+            <a:outerShdw blurRad="63500" dist="22860" dir="8100000" algn="bl" rotWithShape="0">
               <a:srgbClr val="000000">
                 <a:alpha val="12000"/>
               </a:srgbClr>
@@ -16609,7 +16335,7 @@
           <a:bodyPr wrap="square" lIns="0" tIns="0" rIns="0" bIns="0" rtlCol="0" anchor="ctr"/>
           <a:lstStyle/>
           <a:p>
-            <a:pPr indent="0" marL="0">
+            <a:pPr marL="0" indent="0">
               <a:buNone/>
             </a:pPr>
             <a:r>
@@ -16648,7 +16374,7 @@
           <a:bodyPr wrap="square" lIns="0" tIns="0" rIns="0" bIns="0" rtlCol="0" anchor="ctr"/>
           <a:lstStyle/>
           <a:p>
-            <a:pPr indent="0" marL="0">
+            <a:pPr marL="0" indent="0">
               <a:buNone/>
             </a:pPr>
             <a:r>
@@ -16687,7 +16413,7 @@
           <a:bodyPr wrap="square" lIns="0" tIns="0" rIns="0" bIns="0" rtlCol="0" anchor="ctr"/>
           <a:lstStyle/>
           <a:p>
-            <a:pPr indent="0" marL="0">
+            <a:pPr marL="0" indent="0">
               <a:buNone/>
             </a:pPr>
             <a:r>
@@ -16729,7 +16455,7 @@
             <a:prstDash val="solid"/>
           </a:ln>
           <a:effectLst>
-            <a:outerShdw sx="100000" sy="100000" kx="0" ky="0" algn="bl" rotWithShape="0" blurRad="63500" dist="22860" dir="8100000">
+            <a:outerShdw blurRad="63500" dist="22860" dir="8100000" algn="bl" rotWithShape="0">
               <a:srgbClr val="000000">
                 <a:alpha val="12000"/>
               </a:srgbClr>
@@ -16783,7 +16509,7 @@
           <a:bodyPr wrap="square" lIns="0" tIns="0" rIns="0" bIns="0" rtlCol="0" anchor="ctr"/>
           <a:lstStyle/>
           <a:p>
-            <a:pPr indent="0" marL="0">
+            <a:pPr marL="0" indent="0">
               <a:buNone/>
             </a:pPr>
             <a:r>
@@ -16822,7 +16548,7 @@
           <a:bodyPr wrap="square" lIns="0" tIns="0" rIns="0" bIns="0" rtlCol="0" anchor="ctr"/>
           <a:lstStyle/>
           <a:p>
-            <a:pPr indent="0" marL="0">
+            <a:pPr marL="0" indent="0">
               <a:buNone/>
             </a:pPr>
             <a:r>
@@ -16861,7 +16587,7 @@
           <a:bodyPr wrap="square" lIns="0" tIns="0" rIns="0" bIns="0" rtlCol="0" anchor="ctr"/>
           <a:lstStyle/>
           <a:p>
-            <a:pPr indent="0" marL="0">
+            <a:pPr marL="0" indent="0">
               <a:buNone/>
             </a:pPr>
             <a:r>
@@ -16903,7 +16629,7 @@
             <a:prstDash val="solid"/>
           </a:ln>
           <a:effectLst>
-            <a:outerShdw sx="100000" sy="100000" kx="0" ky="0" algn="bl" rotWithShape="0" blurRad="63500" dist="22860" dir="8100000">
+            <a:outerShdw blurRad="63500" dist="22860" dir="8100000" algn="bl" rotWithShape="0">
               <a:srgbClr val="000000">
                 <a:alpha val="12000"/>
               </a:srgbClr>
@@ -16932,7 +16658,7 @@
           <a:bodyPr wrap="square" lIns="0" tIns="0" rIns="0" bIns="0" rtlCol="0" anchor="ctr"/>
           <a:lstStyle/>
           <a:p>
-            <a:pPr indent="0" marL="0">
+            <a:pPr marL="0" indent="0">
               <a:buNone/>
             </a:pPr>
             <a:r>
@@ -16971,7 +16697,7 @@
           <a:bodyPr wrap="square" lIns="0" tIns="0" rIns="0" bIns="0" rtlCol="0" anchor="ctr"/>
           <a:lstStyle/>
           <a:p>
-            <a:pPr indent="0" marL="0">
+            <a:pPr marL="0" indent="0">
               <a:buNone/>
             </a:pPr>
             <a:r>
@@ -17013,7 +16739,7 @@
             <a:prstDash val="solid"/>
           </a:ln>
           <a:effectLst>
-            <a:outerShdw sx="100000" sy="100000" kx="0" ky="0" algn="bl" rotWithShape="0" blurRad="63500" dist="22860" dir="8100000">
+            <a:outerShdw blurRad="63500" dist="22860" dir="8100000" algn="bl" rotWithShape="0">
               <a:srgbClr val="000000">
                 <a:alpha val="12000"/>
               </a:srgbClr>
@@ -17042,7 +16768,7 @@
           <a:bodyPr wrap="square" lIns="0" tIns="0" rIns="0" bIns="0" rtlCol="0" anchor="ctr"/>
           <a:lstStyle/>
           <a:p>
-            <a:pPr indent="0" marL="0">
+            <a:pPr marL="0" indent="0">
               <a:buNone/>
             </a:pPr>
             <a:r>
@@ -17081,7 +16807,7 @@
           <a:bodyPr wrap="square" lIns="0" tIns="0" rIns="0" bIns="0" rtlCol="0" anchor="ctr"/>
           <a:lstStyle/>
           <a:p>
-            <a:pPr indent="0" marL="0">
+            <a:pPr marL="0" indent="0">
               <a:buNone/>
             </a:pPr>
             <a:r>
@@ -17120,7 +16846,7 @@
           <a:bodyPr wrap="square" lIns="0" tIns="0" rIns="0" bIns="0" rtlCol="0" anchor="ctr"/>
           <a:lstStyle/>
           <a:p>
-            <a:pPr indent="0" marL="0">
+            <a:pPr marL="0" indent="0">
               <a:buNone/>
             </a:pPr>
             <a:r>
@@ -17159,7 +16885,7 @@
           <a:bodyPr wrap="square" lIns="0" tIns="0" rIns="0" bIns="0" rtlCol="0" anchor="ctr"/>
           <a:lstStyle/>
           <a:p>
-            <a:pPr indent="0" marL="0">
+            <a:pPr marL="0" indent="0">
               <a:buNone/>
             </a:pPr>
             <a:r>
@@ -17198,7 +16924,7 @@
           <a:bodyPr wrap="square" lIns="0" tIns="0" rIns="0" bIns="0" rtlCol="0" anchor="ctr"/>
           <a:lstStyle/>
           <a:p>
-            <a:pPr algn="r" indent="0" marL="0">
+            <a:pPr marL="0" indent="0" algn="r">
               <a:buNone/>
             </a:pPr>
             <a:r>
@@ -17225,13 +16951,14 @@
 </file>
 
 <file path=ppt/slides/slide8.xml><?xml version="1.0" encoding="utf-8"?>
-<p:sld xmlns:a="http://schemas.openxmlformats.org/drawingml/2006/main" xmlns:p="http://schemas.openxmlformats.org/presentationml/2006/main" xmlns:r="http://schemas.openxmlformats.org/officeDocument/2006/relationships">
+<p:sld xmlns:a="http://schemas.openxmlformats.org/drawingml/2006/main" xmlns:r="http://schemas.openxmlformats.org/officeDocument/2006/relationships" xmlns:p="http://schemas.openxmlformats.org/presentationml/2006/main">
   <p:cSld name="Slide 8">
     <p:bg>
       <p:bgPr>
         <a:solidFill>
           <a:srgbClr val="F8FAFC"/>
         </a:solidFill>
+        <a:effectLst/>
       </p:bgPr>
     </p:bg>
     <p:spTree>
@@ -17294,11 +17021,11 @@
           <a:bodyPr wrap="square" lIns="0" tIns="0" rIns="0" bIns="0" rtlCol="0" anchor="ctr"/>
           <a:lstStyle/>
           <a:p>
-            <a:pPr indent="0" marL="0">
-              <a:buNone/>
-            </a:pPr>
-            <a:r>
-              <a:rPr lang="en-US" sz="1100" b="1" spc="200" kern="0" dirty="0">
+            <a:pPr marL="0" indent="0">
+              <a:buNone/>
+            </a:pPr>
+            <a:r>
+              <a:rPr lang="en-US" sz="1100" b="1" kern="0" spc="200" dirty="0">
                 <a:solidFill>
                   <a:srgbClr val="14B8A6"/>
                 </a:solidFill>
@@ -17333,7 +17060,7 @@
           <a:bodyPr wrap="square" lIns="0" tIns="0" rIns="0" bIns="0" rtlCol="0" anchor="ctr"/>
           <a:lstStyle/>
           <a:p>
-            <a:pPr indent="0" marL="0">
+            <a:pPr marL="0" indent="0">
               <a:buNone/>
             </a:pPr>
             <a:r>
@@ -17375,7 +17102,7 @@
             <a:prstDash val="solid"/>
           </a:ln>
           <a:effectLst>
-            <a:outerShdw sx="100000" sy="100000" kx="0" ky="0" algn="bl" rotWithShape="0" blurRad="63500" dist="22860" dir="8100000">
+            <a:outerShdw blurRad="63500" dist="22860" dir="8100000" algn="bl" rotWithShape="0">
               <a:srgbClr val="000000">
                 <a:alpha val="12000"/>
               </a:srgbClr>
@@ -17410,14 +17137,14 @@
       </p:sp>
       <p:pic>
         <p:nvPicPr>
-          <p:cNvPr id="7" name="Image 0" descr="preencoded.png">    </p:cNvPr>
+          <p:cNvPr id="7" name="Image 0" descr="preencoded.png"/>
           <p:cNvPicPr>
             <a:picLocks noChangeAspect="1"/>
           </p:cNvPicPr>
           <p:nvPr/>
         </p:nvPicPr>
         <p:blipFill>
-          <a:blip r:embed="rId1"/>
+          <a:blip r:embed="rId3"/>
           <a:stretch>
             <a:fillRect/>
           </a:stretch>
@@ -17453,7 +17180,7 @@
           <a:bodyPr wrap="square" lIns="0" tIns="0" rIns="0" bIns="0" rtlCol="0" anchor="ctr"/>
           <a:lstStyle/>
           <a:p>
-            <a:pPr indent="0" marL="0">
+            <a:pPr marL="0" indent="0">
               <a:buNone/>
             </a:pPr>
             <a:r>
@@ -17492,7 +17219,7 @@
           <a:bodyPr wrap="square" lIns="0" tIns="0" rIns="0" bIns="0" rtlCol="0" anchor="ctr"/>
           <a:lstStyle/>
           <a:p>
-            <a:pPr indent="0" marL="0">
+            <a:pPr marL="0" indent="0">
               <a:buNone/>
             </a:pPr>
             <a:r>
@@ -17534,7 +17261,7 @@
             <a:prstDash val="solid"/>
           </a:ln>
           <a:effectLst>
-            <a:outerShdw sx="100000" sy="100000" kx="0" ky="0" algn="bl" rotWithShape="0" blurRad="63500" dist="22860" dir="8100000">
+            <a:outerShdw blurRad="63500" dist="22860" dir="8100000" algn="bl" rotWithShape="0">
               <a:srgbClr val="000000">
                 <a:alpha val="12000"/>
               </a:srgbClr>
@@ -17569,14 +17296,14 @@
       </p:sp>
       <p:pic>
         <p:nvPicPr>
-          <p:cNvPr id="12" name="Image 1" descr="preencoded.png">    </p:cNvPr>
+          <p:cNvPr id="12" name="Image 1" descr="preencoded.png"/>
           <p:cNvPicPr>
             <a:picLocks noChangeAspect="1"/>
           </p:cNvPicPr>
           <p:nvPr/>
         </p:nvPicPr>
         <p:blipFill>
-          <a:blip r:embed="rId2"/>
+          <a:blip r:embed="rId4"/>
           <a:stretch>
             <a:fillRect/>
           </a:stretch>
@@ -17612,7 +17339,7 @@
           <a:bodyPr wrap="square" lIns="0" tIns="0" rIns="0" bIns="0" rtlCol="0" anchor="ctr"/>
           <a:lstStyle/>
           <a:p>
-            <a:pPr indent="0" marL="0">
+            <a:pPr marL="0" indent="0">
               <a:buNone/>
             </a:pPr>
             <a:r>
@@ -17651,7 +17378,7 @@
           <a:bodyPr wrap="square" lIns="0" tIns="0" rIns="0" bIns="0" rtlCol="0" anchor="ctr"/>
           <a:lstStyle/>
           <a:p>
-            <a:pPr indent="0" marL="0">
+            <a:pPr marL="0" indent="0">
               <a:buNone/>
             </a:pPr>
             <a:r>
@@ -17693,7 +17420,7 @@
             <a:prstDash val="solid"/>
           </a:ln>
           <a:effectLst>
-            <a:outerShdw sx="100000" sy="100000" kx="0" ky="0" algn="bl" rotWithShape="0" blurRad="63500" dist="22860" dir="8100000">
+            <a:outerShdw blurRad="63500" dist="22860" dir="8100000" algn="bl" rotWithShape="0">
               <a:srgbClr val="000000">
                 <a:alpha val="12000"/>
               </a:srgbClr>
@@ -17728,14 +17455,14 @@
       </p:sp>
       <p:pic>
         <p:nvPicPr>
-          <p:cNvPr id="17" name="Image 2" descr="preencoded.png">    </p:cNvPr>
+          <p:cNvPr id="17" name="Image 2" descr="preencoded.png"/>
           <p:cNvPicPr>
             <a:picLocks noChangeAspect="1"/>
           </p:cNvPicPr>
           <p:nvPr/>
         </p:nvPicPr>
         <p:blipFill>
-          <a:blip r:embed="rId3"/>
+          <a:blip r:embed="rId5"/>
           <a:stretch>
             <a:fillRect/>
           </a:stretch>
@@ -17771,7 +17498,7 @@
           <a:bodyPr wrap="square" lIns="0" tIns="0" rIns="0" bIns="0" rtlCol="0" anchor="ctr"/>
           <a:lstStyle/>
           <a:p>
-            <a:pPr indent="0" marL="0">
+            <a:pPr marL="0" indent="0">
               <a:buNone/>
             </a:pPr>
             <a:r>
@@ -17810,7 +17537,7 @@
           <a:bodyPr wrap="square" lIns="0" tIns="0" rIns="0" bIns="0" rtlCol="0" anchor="ctr"/>
           <a:lstStyle/>
           <a:p>
-            <a:pPr indent="0" marL="0">
+            <a:pPr marL="0" indent="0">
               <a:buNone/>
             </a:pPr>
             <a:r>
@@ -17852,7 +17579,7 @@
             <a:prstDash val="solid"/>
           </a:ln>
           <a:effectLst>
-            <a:outerShdw sx="100000" sy="100000" kx="0" ky="0" algn="bl" rotWithShape="0" blurRad="63500" dist="22860" dir="8100000">
+            <a:outerShdw blurRad="63500" dist="22860" dir="8100000" algn="bl" rotWithShape="0">
               <a:srgbClr val="000000">
                 <a:alpha val="12000"/>
               </a:srgbClr>
@@ -17887,14 +17614,14 @@
       </p:sp>
       <p:pic>
         <p:nvPicPr>
-          <p:cNvPr id="22" name="Image 3" descr="preencoded.png">    </p:cNvPr>
+          <p:cNvPr id="22" name="Image 3" descr="preencoded.png"/>
           <p:cNvPicPr>
             <a:picLocks noChangeAspect="1"/>
           </p:cNvPicPr>
           <p:nvPr/>
         </p:nvPicPr>
         <p:blipFill>
-          <a:blip r:embed="rId4"/>
+          <a:blip r:embed="rId6"/>
           <a:stretch>
             <a:fillRect/>
           </a:stretch>
@@ -17930,7 +17657,7 @@
           <a:bodyPr wrap="square" lIns="0" tIns="0" rIns="0" bIns="0" rtlCol="0" anchor="ctr"/>
           <a:lstStyle/>
           <a:p>
-            <a:pPr indent="0" marL="0">
+            <a:pPr marL="0" indent="0">
               <a:buNone/>
             </a:pPr>
             <a:r>
@@ -17969,7 +17696,7 @@
           <a:bodyPr wrap="square" lIns="0" tIns="0" rIns="0" bIns="0" rtlCol="0" anchor="ctr"/>
           <a:lstStyle/>
           <a:p>
-            <a:pPr indent="0" marL="0">
+            <a:pPr marL="0" indent="0">
               <a:buNone/>
             </a:pPr>
             <a:r>
@@ -18011,7 +17738,7 @@
             <a:prstDash val="solid"/>
           </a:ln>
           <a:effectLst>
-            <a:outerShdw sx="100000" sy="100000" kx="0" ky="0" algn="bl" rotWithShape="0" blurRad="63500" dist="22860" dir="8100000">
+            <a:outerShdw blurRad="63500" dist="22860" dir="8100000" algn="bl" rotWithShape="0">
               <a:srgbClr val="000000">
                 <a:alpha val="12000"/>
               </a:srgbClr>
@@ -18046,14 +17773,14 @@
       </p:sp>
       <p:pic>
         <p:nvPicPr>
-          <p:cNvPr id="27" name="Image 4" descr="preencoded.png">    </p:cNvPr>
+          <p:cNvPr id="27" name="Image 4" descr="preencoded.png"/>
           <p:cNvPicPr>
             <a:picLocks noChangeAspect="1"/>
           </p:cNvPicPr>
           <p:nvPr/>
         </p:nvPicPr>
         <p:blipFill>
-          <a:blip r:embed="rId5"/>
+          <a:blip r:embed="rId7"/>
           <a:stretch>
             <a:fillRect/>
           </a:stretch>
@@ -18089,7 +17816,7 @@
           <a:bodyPr wrap="square" lIns="0" tIns="0" rIns="0" bIns="0" rtlCol="0" anchor="ctr"/>
           <a:lstStyle/>
           <a:p>
-            <a:pPr indent="0" marL="0">
+            <a:pPr marL="0" indent="0">
               <a:buNone/>
             </a:pPr>
             <a:r>
@@ -18128,7 +17855,7 @@
           <a:bodyPr wrap="square" lIns="0" tIns="0" rIns="0" bIns="0" rtlCol="0" anchor="ctr"/>
           <a:lstStyle/>
           <a:p>
-            <a:pPr indent="0" marL="0">
+            <a:pPr marL="0" indent="0">
               <a:buNone/>
             </a:pPr>
             <a:r>
@@ -18170,7 +17897,7 @@
             <a:prstDash val="solid"/>
           </a:ln>
           <a:effectLst>
-            <a:outerShdw sx="100000" sy="100000" kx="0" ky="0" algn="bl" rotWithShape="0" blurRad="63500" dist="22860" dir="8100000">
+            <a:outerShdw blurRad="63500" dist="22860" dir="8100000" algn="bl" rotWithShape="0">
               <a:srgbClr val="000000">
                 <a:alpha val="12000"/>
               </a:srgbClr>
@@ -18205,14 +17932,14 @@
       </p:sp>
       <p:pic>
         <p:nvPicPr>
-          <p:cNvPr id="32" name="Image 5" descr="preencoded.png">    </p:cNvPr>
+          <p:cNvPr id="32" name="Image 5" descr="preencoded.png"/>
           <p:cNvPicPr>
             <a:picLocks noChangeAspect="1"/>
           </p:cNvPicPr>
           <p:nvPr/>
         </p:nvPicPr>
         <p:blipFill>
-          <a:blip r:embed="rId6"/>
+          <a:blip r:embed="rId8"/>
           <a:stretch>
             <a:fillRect/>
           </a:stretch>
@@ -18248,7 +17975,7 @@
           <a:bodyPr wrap="square" lIns="0" tIns="0" rIns="0" bIns="0" rtlCol="0" anchor="ctr"/>
           <a:lstStyle/>
           <a:p>
-            <a:pPr indent="0" marL="0">
+            <a:pPr marL="0" indent="0">
               <a:buNone/>
             </a:pPr>
             <a:r>
@@ -18287,7 +18014,7 @@
           <a:bodyPr wrap="square" lIns="0" tIns="0" rIns="0" bIns="0" rtlCol="0" anchor="ctr"/>
           <a:lstStyle/>
           <a:p>
-            <a:pPr indent="0" marL="0">
+            <a:pPr marL="0" indent="0">
               <a:buNone/>
             </a:pPr>
             <a:r>
@@ -18326,7 +18053,7 @@
           <a:bodyPr wrap="square" lIns="0" tIns="0" rIns="0" bIns="0" rtlCol="0" anchor="ctr"/>
           <a:lstStyle/>
           <a:p>
-            <a:pPr indent="0" marL="0">
+            <a:pPr marL="0" indent="0">
               <a:buNone/>
             </a:pPr>
             <a:r>
@@ -18365,7 +18092,7 @@
           <a:bodyPr wrap="square" lIns="0" tIns="0" rIns="0" bIns="0" rtlCol="0" anchor="ctr"/>
           <a:lstStyle/>
           <a:p>
-            <a:pPr algn="r" indent="0" marL="0">
+            <a:pPr marL="0" indent="0" algn="r">
               <a:buNone/>
             </a:pPr>
             <a:r>
@@ -18392,13 +18119,14 @@
 </file>
 
 <file path=ppt/slides/slide9.xml><?xml version="1.0" encoding="utf-8"?>
-<p:sld xmlns:a="http://schemas.openxmlformats.org/drawingml/2006/main" xmlns:p="http://schemas.openxmlformats.org/presentationml/2006/main" xmlns:r="http://schemas.openxmlformats.org/officeDocument/2006/relationships">
+<p:sld xmlns:a="http://schemas.openxmlformats.org/drawingml/2006/main" xmlns:r="http://schemas.openxmlformats.org/officeDocument/2006/relationships" xmlns:p="http://schemas.openxmlformats.org/presentationml/2006/main">
   <p:cSld name="Slide 9">
     <p:bg>
       <p:bgPr>
         <a:solidFill>
           <a:srgbClr val="F8FAFC"/>
         </a:solidFill>
+        <a:effectLst/>
       </p:bgPr>
     </p:bg>
     <p:spTree>
@@ -18461,11 +18189,11 @@
           <a:bodyPr wrap="square" lIns="0" tIns="0" rIns="0" bIns="0" rtlCol="0" anchor="ctr"/>
           <a:lstStyle/>
           <a:p>
-            <a:pPr indent="0" marL="0">
-              <a:buNone/>
-            </a:pPr>
-            <a:r>
-              <a:rPr lang="en-US" sz="1100" b="1" spc="200" kern="0" dirty="0">
+            <a:pPr marL="0" indent="0">
+              <a:buNone/>
+            </a:pPr>
+            <a:r>
+              <a:rPr lang="en-US" sz="1100" b="1" kern="0" spc="200" dirty="0">
                 <a:solidFill>
                   <a:srgbClr val="2563EB"/>
                 </a:solidFill>
@@ -18500,7 +18228,7 @@
           <a:bodyPr wrap="square" lIns="0" tIns="0" rIns="0" bIns="0" rtlCol="0" anchor="ctr"/>
           <a:lstStyle/>
           <a:p>
-            <a:pPr indent="0" marL="0">
+            <a:pPr marL="0" indent="0">
               <a:buNone/>
             </a:pPr>
             <a:r>
@@ -18539,7 +18267,7 @@
           <a:bodyPr wrap="square" lIns="0" tIns="0" rIns="0" bIns="0" rtlCol="0" anchor="ctr"/>
           <a:lstStyle/>
           <a:p>
-            <a:pPr indent="0" marL="0">
+            <a:pPr marL="0" indent="0">
               <a:buNone/>
             </a:pPr>
             <a:r>
@@ -18609,14 +18337,14 @@
       </p:sp>
       <p:pic>
         <p:nvPicPr>
-          <p:cNvPr id="8" name="Image 0" descr="????">    </p:cNvPr>
+          <p:cNvPr id="8" name="Image 0" descr="????"/>
           <p:cNvPicPr>
             <a:picLocks noChangeAspect="1"/>
           </p:cNvPicPr>
           <p:nvPr/>
         </p:nvPicPr>
         <p:blipFill>
-          <a:blip r:embed="rId1"/>
+          <a:blip r:embed="rId3"/>
           <a:stretch>
             <a:fillRect/>
           </a:stretch>
@@ -18652,7 +18380,7 @@
           <a:bodyPr wrap="square" lIns="0" tIns="0" rIns="0" bIns="0" rtlCol="0" anchor="ctr"/>
           <a:lstStyle/>
           <a:p>
-            <a:pPr algn="ctr" indent="0" marL="0">
+            <a:pPr marL="0" indent="0" algn="ctr">
               <a:buNone/>
             </a:pPr>
             <a:r>
@@ -18691,7 +18419,7 @@
           <a:bodyPr wrap="square" lIns="0" tIns="0" rIns="0" bIns="0" rtlCol="0" anchor="ctr"/>
           <a:lstStyle/>
           <a:p>
-            <a:pPr algn="ctr" indent="0" marL="0">
+            <a:pPr marL="0" indent="0" algn="ctr">
               <a:buNone/>
             </a:pPr>
             <a:r>
@@ -18761,14 +18489,14 @@
       </p:sp>
       <p:pic>
         <p:nvPicPr>
-          <p:cNvPr id="13" name="Image 1" descr="??????">    </p:cNvPr>
+          <p:cNvPr id="13" name="Image 1" descr="??????"/>
           <p:cNvPicPr>
             <a:picLocks noChangeAspect="1"/>
           </p:cNvPicPr>
           <p:nvPr/>
         </p:nvPicPr>
         <p:blipFill>
-          <a:blip r:embed="rId2"/>
+          <a:blip r:embed="rId4"/>
           <a:stretch>
             <a:fillRect/>
           </a:stretch>
@@ -18804,7 +18532,7 @@
           <a:bodyPr wrap="square" lIns="0" tIns="0" rIns="0" bIns="0" rtlCol="0" anchor="ctr"/>
           <a:lstStyle/>
           <a:p>
-            <a:pPr algn="ctr" indent="0" marL="0">
+            <a:pPr marL="0" indent="0" algn="ctr">
               <a:buNone/>
             </a:pPr>
             <a:r>
@@ -18843,7 +18571,7 @@
           <a:bodyPr wrap="square" lIns="0" tIns="0" rIns="0" bIns="0" rtlCol="0" anchor="ctr"/>
           <a:lstStyle/>
           <a:p>
-            <a:pPr algn="ctr" indent="0" marL="0">
+            <a:pPr marL="0" indent="0" algn="ctr">
               <a:buNone/>
             </a:pPr>
             <a:r>
@@ -18913,14 +18641,14 @@
       </p:sp>
       <p:pic>
         <p:nvPicPr>
-          <p:cNvPr id="18" name="Image 2" descr="???????">    </p:cNvPr>
+          <p:cNvPr id="18" name="Image 2" descr="???????"/>
           <p:cNvPicPr>
             <a:picLocks noChangeAspect="1"/>
           </p:cNvPicPr>
           <p:nvPr/>
         </p:nvPicPr>
         <p:blipFill>
-          <a:blip r:embed="rId3"/>
+          <a:blip r:embed="rId5"/>
           <a:stretch>
             <a:fillRect/>
           </a:stretch>
@@ -18956,7 +18684,7 @@
           <a:bodyPr wrap="square" lIns="0" tIns="0" rIns="0" bIns="0" rtlCol="0" anchor="ctr"/>
           <a:lstStyle/>
           <a:p>
-            <a:pPr algn="ctr" indent="0" marL="0">
+            <a:pPr marL="0" indent="0" algn="ctr">
               <a:buNone/>
             </a:pPr>
             <a:r>
@@ -18995,7 +18723,7 @@
           <a:bodyPr wrap="square" lIns="0" tIns="0" rIns="0" bIns="0" rtlCol="0" anchor="ctr"/>
           <a:lstStyle/>
           <a:p>
-            <a:pPr algn="ctr" indent="0" marL="0">
+            <a:pPr marL="0" indent="0" algn="ctr">
               <a:buNone/>
             </a:pPr>
             <a:r>
@@ -19065,14 +18793,14 @@
       </p:sp>
       <p:pic>
         <p:nvPicPr>
-          <p:cNvPr id="23" name="Image 3" descr="????">    </p:cNvPr>
+          <p:cNvPr id="23" name="Image 3" descr="????"/>
           <p:cNvPicPr>
             <a:picLocks noChangeAspect="1"/>
           </p:cNvPicPr>
           <p:nvPr/>
         </p:nvPicPr>
         <p:blipFill>
-          <a:blip r:embed="rId4"/>
+          <a:blip r:embed="rId6"/>
           <a:stretch>
             <a:fillRect/>
           </a:stretch>
@@ -19108,7 +18836,7 @@
           <a:bodyPr wrap="square" lIns="0" tIns="0" rIns="0" bIns="0" rtlCol="0" anchor="ctr"/>
           <a:lstStyle/>
           <a:p>
-            <a:pPr algn="ctr" indent="0" marL="0">
+            <a:pPr marL="0" indent="0" algn="ctr">
               <a:buNone/>
             </a:pPr>
             <a:r>
@@ -19147,7 +18875,7 @@
           <a:bodyPr wrap="square" lIns="0" tIns="0" rIns="0" bIns="0" rtlCol="0" anchor="ctr"/>
           <a:lstStyle/>
           <a:p>
-            <a:pPr algn="ctr" indent="0" marL="0">
+            <a:pPr marL="0" indent="0" algn="ctr">
               <a:buNone/>
             </a:pPr>
             <a:r>
@@ -19186,7 +18914,7 @@
           <a:bodyPr wrap="square" lIns="0" tIns="0" rIns="0" bIns="0" rtlCol="0" anchor="ctr"/>
           <a:lstStyle/>
           <a:p>
-            <a:pPr indent="0" marL="0">
+            <a:pPr marL="0" indent="0">
               <a:buNone/>
             </a:pPr>
             <a:r>
@@ -19225,7 +18953,7 @@
           <a:bodyPr wrap="square" lIns="0" tIns="0" rIns="0" bIns="0" rtlCol="0" anchor="ctr"/>
           <a:lstStyle/>
           <a:p>
-            <a:pPr algn="r" indent="0" marL="0">
+            <a:pPr marL="0" indent="0" algn="r">
               <a:buNone/>
             </a:pPr>
             <a:r>
@@ -19544,4 +19272,299 @@
     </a:ext>
   </a:extLst>
 </a:theme>
+</file>
+
+<file path=ppt/theme/theme2.xml><?xml version="1.0" encoding="utf-8"?>
+<a:theme xmlns:a="http://schemas.openxmlformats.org/drawingml/2006/main" name="Office 主题​​">
+  <a:themeElements>
+    <a:clrScheme name="Office">
+      <a:dk1>
+        <a:sysClr val="windowText" lastClr="000000"/>
+      </a:dk1>
+      <a:lt1>
+        <a:sysClr val="window" lastClr="FFFFFF"/>
+      </a:lt1>
+      <a:dk2>
+        <a:srgbClr val="44546A"/>
+      </a:dk2>
+      <a:lt2>
+        <a:srgbClr val="E7E6E6"/>
+      </a:lt2>
+      <a:accent1>
+        <a:srgbClr val="4472C4"/>
+      </a:accent1>
+      <a:accent2>
+        <a:srgbClr val="ED7D31"/>
+      </a:accent2>
+      <a:accent3>
+        <a:srgbClr val="A5A5A5"/>
+      </a:accent3>
+      <a:accent4>
+        <a:srgbClr val="FFC000"/>
+      </a:accent4>
+      <a:accent5>
+        <a:srgbClr val="5B9BD5"/>
+      </a:accent5>
+      <a:accent6>
+        <a:srgbClr val="70AD47"/>
+      </a:accent6>
+      <a:hlink>
+        <a:srgbClr val="0563C1"/>
+      </a:hlink>
+      <a:folHlink>
+        <a:srgbClr val="954F72"/>
+      </a:folHlink>
+    </a:clrScheme>
+    <a:fontScheme name="Office">
+      <a:majorFont>
+        <a:latin typeface="等线 Light" panose="020F0302020204030204"/>
+        <a:ea typeface=""/>
+        <a:cs typeface=""/>
+        <a:font script="Jpan" typeface="游ゴシック Light"/>
+        <a:font script="Hang" typeface="맑은 고딕"/>
+        <a:font script="Hans" typeface="等线 Light"/>
+        <a:font script="Hant" typeface="新細明體"/>
+        <a:font script="Arab" typeface="Times New Roman"/>
+        <a:font script="Hebr" typeface="Times New Roman"/>
+        <a:font script="Thai" typeface="Angsana New"/>
+        <a:font script="Ethi" typeface="Nyala"/>
+        <a:font script="Beng" typeface="Vrinda"/>
+        <a:font script="Gujr" typeface="Shruti"/>
+        <a:font script="Khmr" typeface="MoolBoran"/>
+        <a:font script="Knda" typeface="Tunga"/>
+        <a:font script="Guru" typeface="Raavi"/>
+        <a:font script="Cans" typeface="Euphemia"/>
+        <a:font script="Cher" typeface="Plantagenet Cherokee"/>
+        <a:font script="Yiii" typeface="Microsoft Yi Baiti"/>
+        <a:font script="Tibt" typeface="Microsoft Himalaya"/>
+        <a:font script="Thaa" typeface="MV Boli"/>
+        <a:font script="Deva" typeface="Mangal"/>
+        <a:font script="Telu" typeface="Gautami"/>
+        <a:font script="Taml" typeface="Latha"/>
+        <a:font script="Syrc" typeface="Estrangelo Edessa"/>
+        <a:font script="Orya" typeface="Kalinga"/>
+        <a:font script="Mlym" typeface="Kartika"/>
+        <a:font script="Laoo" typeface="DokChampa"/>
+        <a:font script="Sinh" typeface="Iskoola Pota"/>
+        <a:font script="Mong" typeface="Mongolian Baiti"/>
+        <a:font script="Viet" typeface="Times New Roman"/>
+        <a:font script="Uigh" typeface="Microsoft Uighur"/>
+        <a:font script="Geor" typeface="Sylfaen"/>
+        <a:font script="Armn" typeface="Arial"/>
+        <a:font script="Bugi" typeface="Leelawadee UI"/>
+        <a:font script="Bopo" typeface="Microsoft JhengHei"/>
+        <a:font script="Java" typeface="Javanese Text"/>
+        <a:font script="Lisu" typeface="Segoe UI"/>
+        <a:font script="Mymr" typeface="Myanmar Text"/>
+        <a:font script="Nkoo" typeface="Ebrima"/>
+        <a:font script="Olck" typeface="Nirmala UI"/>
+        <a:font script="Osma" typeface="Ebrima"/>
+        <a:font script="Phag" typeface="Phagspa"/>
+        <a:font script="Syrn" typeface="Estrangelo Edessa"/>
+        <a:font script="Syrj" typeface="Estrangelo Edessa"/>
+        <a:font script="Syre" typeface="Estrangelo Edessa"/>
+        <a:font script="Sora" typeface="Nirmala UI"/>
+        <a:font script="Tale" typeface="Microsoft Tai Le"/>
+        <a:font script="Talu" typeface="Microsoft New Tai Lue"/>
+        <a:font script="Tfng" typeface="Ebrima"/>
+      </a:majorFont>
+      <a:minorFont>
+        <a:latin typeface="等线" panose="020F0502020204030204"/>
+        <a:ea typeface=""/>
+        <a:cs typeface=""/>
+        <a:font script="Jpan" typeface="游ゴシック"/>
+        <a:font script="Hang" typeface="맑은 고딕"/>
+        <a:font script="Hans" typeface="等线"/>
+        <a:font script="Hant" typeface="新細明體"/>
+        <a:font script="Arab" typeface="Arial"/>
+        <a:font script="Hebr" typeface="Arial"/>
+        <a:font script="Thai" typeface="Cordia New"/>
+        <a:font script="Ethi" typeface="Nyala"/>
+        <a:font script="Beng" typeface="Vrinda"/>
+        <a:font script="Gujr" typeface="Shruti"/>
+        <a:font script="Khmr" typeface="DaunPenh"/>
+        <a:font script="Knda" typeface="Tunga"/>
+        <a:font script="Guru" typeface="Raavi"/>
+        <a:font script="Cans" typeface="Euphemia"/>
+        <a:font script="Cher" typeface="Plantagenet Cherokee"/>
+        <a:font script="Yiii" typeface="Microsoft Yi Baiti"/>
+        <a:font script="Tibt" typeface="Microsoft Himalaya"/>
+        <a:font script="Thaa" typeface="MV Boli"/>
+        <a:font script="Deva" typeface="Mangal"/>
+        <a:font script="Telu" typeface="Gautami"/>
+        <a:font script="Taml" typeface="Latha"/>
+        <a:font script="Syrc" typeface="Estrangelo Edessa"/>
+        <a:font script="Orya" typeface="Kalinga"/>
+        <a:font script="Mlym" typeface="Kartika"/>
+        <a:font script="Laoo" typeface="DokChampa"/>
+        <a:font script="Sinh" typeface="Iskoola Pota"/>
+        <a:font script="Mong" typeface="Mongolian Baiti"/>
+        <a:font script="Viet" typeface="Arial"/>
+        <a:font script="Uigh" typeface="Microsoft Uighur"/>
+        <a:font script="Geor" typeface="Sylfaen"/>
+        <a:font script="Armn" typeface="Arial"/>
+        <a:font script="Bugi" typeface="Leelawadee UI"/>
+        <a:font script="Bopo" typeface="Microsoft JhengHei"/>
+        <a:font script="Java" typeface="Javanese Text"/>
+        <a:font script="Lisu" typeface="Segoe UI"/>
+        <a:font script="Mymr" typeface="Myanmar Text"/>
+        <a:font script="Nkoo" typeface="Ebrima"/>
+        <a:font script="Olck" typeface="Nirmala UI"/>
+        <a:font script="Osma" typeface="Ebrima"/>
+        <a:font script="Phag" typeface="Phagspa"/>
+        <a:font script="Syrn" typeface="Estrangelo Edessa"/>
+        <a:font script="Syrj" typeface="Estrangelo Edessa"/>
+        <a:font script="Syre" typeface="Estrangelo Edessa"/>
+        <a:font script="Sora" typeface="Nirmala UI"/>
+        <a:font script="Tale" typeface="Microsoft Tai Le"/>
+        <a:font script="Talu" typeface="Microsoft New Tai Lue"/>
+        <a:font script="Tfng" typeface="Ebrima"/>
+      </a:minorFont>
+    </a:fontScheme>
+    <a:fmtScheme name="Office">
+      <a:fillStyleLst>
+        <a:solidFill>
+          <a:schemeClr val="phClr"/>
+        </a:solidFill>
+        <a:gradFill rotWithShape="1">
+          <a:gsLst>
+            <a:gs pos="0">
+              <a:schemeClr val="phClr">
+                <a:lumMod val="110000"/>
+                <a:satMod val="105000"/>
+                <a:tint val="67000"/>
+              </a:schemeClr>
+            </a:gs>
+            <a:gs pos="50000">
+              <a:schemeClr val="phClr">
+                <a:lumMod val="105000"/>
+                <a:satMod val="103000"/>
+                <a:tint val="73000"/>
+              </a:schemeClr>
+            </a:gs>
+            <a:gs pos="100000">
+              <a:schemeClr val="phClr">
+                <a:lumMod val="105000"/>
+                <a:satMod val="109000"/>
+                <a:tint val="81000"/>
+              </a:schemeClr>
+            </a:gs>
+          </a:gsLst>
+          <a:lin ang="5400000" scaled="0"/>
+        </a:gradFill>
+        <a:gradFill rotWithShape="1">
+          <a:gsLst>
+            <a:gs pos="0">
+              <a:schemeClr val="phClr">
+                <a:satMod val="103000"/>
+                <a:lumMod val="102000"/>
+                <a:tint val="94000"/>
+              </a:schemeClr>
+            </a:gs>
+            <a:gs pos="50000">
+              <a:schemeClr val="phClr">
+                <a:satMod val="110000"/>
+                <a:lumMod val="100000"/>
+                <a:shade val="100000"/>
+              </a:schemeClr>
+            </a:gs>
+            <a:gs pos="100000">
+              <a:schemeClr val="phClr">
+                <a:lumMod val="99000"/>
+                <a:satMod val="120000"/>
+                <a:shade val="78000"/>
+              </a:schemeClr>
+            </a:gs>
+          </a:gsLst>
+          <a:lin ang="5400000" scaled="0"/>
+        </a:gradFill>
+      </a:fillStyleLst>
+      <a:lnStyleLst>
+        <a:ln w="6350" cap="flat" cmpd="sng" algn="ctr">
+          <a:solidFill>
+            <a:schemeClr val="phClr"/>
+          </a:solidFill>
+          <a:prstDash val="solid"/>
+          <a:miter lim="800000"/>
+        </a:ln>
+        <a:ln w="12700" cap="flat" cmpd="sng" algn="ctr">
+          <a:solidFill>
+            <a:schemeClr val="phClr"/>
+          </a:solidFill>
+          <a:prstDash val="solid"/>
+          <a:miter lim="800000"/>
+        </a:ln>
+        <a:ln w="19050" cap="flat" cmpd="sng" algn="ctr">
+          <a:solidFill>
+            <a:schemeClr val="phClr"/>
+          </a:solidFill>
+          <a:prstDash val="solid"/>
+          <a:miter lim="800000"/>
+        </a:ln>
+      </a:lnStyleLst>
+      <a:effectStyleLst>
+        <a:effectStyle>
+          <a:effectLst/>
+        </a:effectStyle>
+        <a:effectStyle>
+          <a:effectLst/>
+        </a:effectStyle>
+        <a:effectStyle>
+          <a:effectLst>
+            <a:outerShdw blurRad="57150" dist="19050" dir="5400000" algn="ctr" rotWithShape="0">
+              <a:srgbClr val="000000">
+                <a:alpha val="63000"/>
+              </a:srgbClr>
+            </a:outerShdw>
+          </a:effectLst>
+        </a:effectStyle>
+      </a:effectStyleLst>
+      <a:bgFillStyleLst>
+        <a:solidFill>
+          <a:schemeClr val="phClr"/>
+        </a:solidFill>
+        <a:solidFill>
+          <a:schemeClr val="phClr">
+            <a:tint val="95000"/>
+            <a:satMod val="170000"/>
+          </a:schemeClr>
+        </a:solidFill>
+        <a:gradFill rotWithShape="1">
+          <a:gsLst>
+            <a:gs pos="0">
+              <a:schemeClr val="phClr">
+                <a:tint val="93000"/>
+                <a:satMod val="150000"/>
+                <a:shade val="98000"/>
+                <a:lumMod val="102000"/>
+              </a:schemeClr>
+            </a:gs>
+            <a:gs pos="50000">
+              <a:schemeClr val="phClr">
+                <a:tint val="98000"/>
+                <a:satMod val="130000"/>
+                <a:shade val="90000"/>
+                <a:lumMod val="103000"/>
+              </a:schemeClr>
+            </a:gs>
+            <a:gs pos="100000">
+              <a:schemeClr val="phClr">
+                <a:shade val="63000"/>
+                <a:satMod val="120000"/>
+              </a:schemeClr>
+            </a:gs>
+          </a:gsLst>
+          <a:lin ang="5400000" scaled="0"/>
+        </a:gradFill>
+      </a:bgFillStyleLst>
+    </a:fmtScheme>
+  </a:themeElements>
+  <a:objectDefaults/>
+  <a:extraClrSchemeLst/>
+  <a:extLst>
+    <a:ext uri="{05A4C25C-085E-4340-85A3-A5531E510DB2}">
+      <thm15:themeFamily xmlns:thm15="http://schemas.microsoft.com/office/thememl/2012/main" name="Office Theme" id="{62F939B6-93AF-4DB8-9C6B-D6C7DFDC589F}" vid="{4A3C46E8-61CC-4603-A589-7422A47A8E4A}"/>
+    </a:ext>
+  </a:extLst>
+</a:theme>
 </file>